--- a/dist/초3/수학/자연수계산/초3_수학_자연수계산_02_세자리수의뺄셈.pptx
+++ b/dist/초3/수학/자연수계산/초3_수학_자연수계산_02_세자리수의뺄셈.pptx
@@ -121,13 +121,13 @@
   <p:extLst>
     <p:ext uri="{521415D9-36F7-43E2-AB2F-B90AF26B5E84}">
       <p14:sectionLst xmlns:p14="http://schemas.microsoft.com/office/powerpoint/2010/main">
-        <p14:section name="도입" id="{8a8dad0b-c258-b098-ba12-0881fdb12690}">
+        <p14:section name="도입" id="{a4af4909-344f-f060-773e-917566a7cfb4}">
           <p14:sldIdLst>
             <p14:sldId id="256"/>
             <p14:sldId id="257"/>
           </p14:sldIdLst>
         </p14:section>
-        <p14:section name="개념" id="{1dcdbe8b-aec3-cfef-9487-525955e6c9df}">
+        <p14:section name="개념" id="{aef8dd77-4fee-becb-475a-3b185b837159}">
           <p14:sldIdLst>
             <p14:sldId id="258"/>
             <p14:sldId id="259"/>
@@ -136,32 +136,32 @@
             <p14:sldId id="263"/>
           </p14:sldIdLst>
         </p14:section>
-        <p14:section name="연습" id="{13b32dc7-9d00-a13a-b98e-11958433efbf}">
+        <p14:section name="연습" id="{ea5f5ffb-864a-1cb8-7dfb-adf15030b3de}">
           <p14:sldIdLst>
             <p14:sldId id="262"/>
             <p14:sldId id="264"/>
             <p14:sldId id="265"/>
           </p14:sldIdLst>
         </p14:section>
-        <p14:section name="개념" id="{87d7e558-3007-673a-a00f-c893a49ea5af}">
+        <p14:section name="개념" id="{04779a41-962d-ad2a-f4d8-24d148b725e7}">
           <p14:sldIdLst/>
         </p14:section>
-        <p14:section name="연습" id="{400a7e67-16ab-ea3e-6dcc-8f8b9318dba1}">
+        <p14:section name="연습" id="{9aa0fa47-649a-107b-32c4-ff09050c66ef}">
           <p14:sldIdLst/>
         </p14:section>
-        <p14:section name="확인" id="{c37a34c6-b0a4-85f9-ee3b-b7d2a23c8636}">
+        <p14:section name="확인" id="{90216819-2d8f-af1d-c68c-1b7be14db7de}">
           <p14:sldIdLst>
             <p14:sldId id="266"/>
             <p14:sldId id="267"/>
             <p14:sldId id="268"/>
           </p14:sldIdLst>
         </p14:section>
-        <p14:section name="정리" id="{6b737c4d-6000-953c-79e8-13bfdc52a912}">
+        <p14:section name="정리" id="{d4f3253f-7ad5-e657-2977-ab7ad6d0e3b5}">
           <p14:sldIdLst>
             <p14:sldId id="269"/>
           </p14:sldIdLst>
         </p14:section>
-        <p14:section name="보충" id="{c3b1cb50-63da-a620-74dd-50d38610a150}">
+        <p14:section name="보충" id="{96a352ce-9f00-24d2-184c-2e9e64e52e5b}">
           <p14:sldIdLst>
             <p14:sldId id="270"/>
           </p14:sldIdLst>
@@ -1181,7 +1181,7 @@
 막히면
 - 종이 수 모형으로 52를 놓고 십 막대 하나를 일 모형 10개와 바꾼 뒤 27을 덜어 냅니다. 43 − 18, 61 − 34로도 해 봅니다(25, 27).
 주의
-- 보충으로도 어려우면 초2 4차시 ‘받아내림이 있는 두 자리 수 뺄셈’(KR22-G02-MAT-SUB2D-L01)를 먼저 합니다.
+- 보충으로도 어려우면 초2 4차시 ‘받아내림이 있는 두 자리 수 뺄셈’(KR22-G02-MAT-SUB2D-L01)를 먼저 합니다. 덧셈 확인이 어려우면 초3 1차시 ‘세 자리 수의 덧셈’(KR22-G03-MAT-ADD3D-L01)을 다시 합니다.
 - 보충이 오래 걸리면 오늘은 여기까지 하고 다음 날 S02부터 다시 시작합니다.</a:t>
             </a:r>
             <a:endParaRPr lang="en-US" dirty="0"/>
@@ -3137,7 +3137,7 @@
           </p:nvPr>
         </p:nvGraphicFramePr>
         <p:xfrm>
-          <a:off x="7726680" y="965200"/>
+          <a:off x="7726680" y="1000760"/>
           <a:ext cx="3840480" cy="914400"/>
         </p:xfrm>
         <a:graphic>
@@ -3150,7 +3150,7 @@
                 <a:gridCol w="960120"/>
                 <a:gridCol w="960120"/>
               </a:tblGrid>
-              <a:tr h="568960">
+              <a:tr h="551180">
                 <a:tc>
                   <a:txBody>
                     <a:bodyPr/>
@@ -3413,7 +3413,7 @@
                   </a:tcPr>
                 </a:tc>
               </a:tr>
-              <a:tr h="568960">
+              <a:tr h="551180">
                 <a:tc>
                   <a:txBody>
                     <a:bodyPr/>
@@ -3676,7 +3676,7 @@
                   </a:tcPr>
                 </a:tc>
               </a:tr>
-              <a:tr h="568960">
+              <a:tr h="551180">
                 <a:tc>
                   <a:txBody>
                     <a:bodyPr/>
@@ -3950,7 +3950,7 @@
                   </a:tcPr>
                 </a:tc>
               </a:tr>
-              <a:tr h="568960">
+              <a:tr h="551180">
                 <a:tc>
                   <a:txBody>
                     <a:bodyPr/>
@@ -7206,7 +7206,7 @@
           </p:nvPr>
         </p:nvGraphicFramePr>
         <p:xfrm>
-          <a:off x="8063728" y="2042160"/>
+          <a:off x="8063728" y="2089785"/>
           <a:ext cx="3291840" cy="914400"/>
         </p:xfrm>
         <a:graphic>
@@ -7218,7 +7218,7 @@
                 <a:gridCol w="1097280"/>
                 <a:gridCol w="1097280"/>
               </a:tblGrid>
-              <a:tr h="609600">
+              <a:tr h="590550">
                 <a:tc>
                   <a:txBody>
                     <a:bodyPr/>
@@ -7413,7 +7413,7 @@
                   </a:tcPr>
                 </a:tc>
               </a:tr>
-              <a:tr h="609600">
+              <a:tr h="590550">
                 <a:tc>
                   <a:txBody>
                     <a:bodyPr/>
@@ -7608,7 +7608,7 @@
                   </a:tcPr>
                 </a:tc>
               </a:tr>
-              <a:tr h="609600">
+              <a:tr h="590550">
                 <a:tc>
                   <a:txBody>
                     <a:bodyPr/>
@@ -7803,7 +7803,7 @@
                   </a:tcPr>
                 </a:tc>
               </a:tr>
-              <a:tr h="609600">
+              <a:tr h="590550">
                 <a:tc>
                   <a:txBody>
                     <a:bodyPr/>
@@ -8009,7 +8009,7 @@
                   </a:tcPr>
                 </a:tc>
               </a:tr>
-              <a:tr h="609600">
+              <a:tr h="590550">
                 <a:tc>
                   <a:txBody>
                     <a:bodyPr/>
@@ -9106,7 +9106,7 @@
           </p:nvPr>
         </p:nvGraphicFramePr>
         <p:xfrm>
-          <a:off x="2162556" y="2322830"/>
+          <a:off x="2162556" y="2355850"/>
           <a:ext cx="7863840" cy="914400"/>
         </p:xfrm>
         <a:graphic>
@@ -9119,7 +9119,7 @@
                 <a:gridCol w="1808683"/>
                 <a:gridCol w="1808683"/>
               </a:tblGrid>
-              <a:tr h="528320">
+              <a:tr h="511810">
                 <a:tc>
                   <a:txBody>
                     <a:bodyPr/>
@@ -9382,7 +9382,7 @@
                   </a:tcPr>
                 </a:tc>
               </a:tr>
-              <a:tr h="528320">
+              <a:tr h="511810">
                 <a:tc>
                   <a:txBody>
                     <a:bodyPr/>
@@ -9656,7 +9656,7 @@
                   </a:tcPr>
                 </a:tc>
               </a:tr>
-              <a:tr h="528320">
+              <a:tr h="511810">
                 <a:tc>
                   <a:txBody>
                     <a:bodyPr/>
@@ -9930,7 +9930,7 @@
                   </a:tcPr>
                 </a:tc>
               </a:tr>
-              <a:tr h="528320">
+              <a:tr h="511810">
                 <a:tc>
                   <a:txBody>
                     <a:bodyPr/>
@@ -10445,7 +10445,7 @@
           </p:nvPr>
         </p:nvGraphicFramePr>
         <p:xfrm>
-          <a:off x="7483450" y="2042160"/>
+          <a:off x="7483450" y="2089785"/>
           <a:ext cx="4023360" cy="914400"/>
         </p:xfrm>
         <a:graphic>
@@ -10458,7 +10458,7 @@
                 <a:gridCol w="1005840"/>
                 <a:gridCol w="1005840"/>
               </a:tblGrid>
-              <a:tr h="609600">
+              <a:tr h="590550">
                 <a:tc>
                   <a:txBody>
                     <a:bodyPr/>
@@ -10721,7 +10721,7 @@
                   </a:tcPr>
                 </a:tc>
               </a:tr>
-              <a:tr h="609600">
+              <a:tr h="590550">
                 <a:tc>
                   <a:txBody>
                     <a:bodyPr/>
@@ -10973,7 +10973,7 @@
                   </a:tcPr>
                 </a:tc>
               </a:tr>
-              <a:tr h="609600">
+              <a:tr h="590550">
                 <a:tc>
                   <a:txBody>
                     <a:bodyPr/>
@@ -11236,7 +11236,7 @@
                   </a:tcPr>
                 </a:tc>
               </a:tr>
-              <a:tr h="609600">
+              <a:tr h="590550">
                 <a:tc>
                   <a:txBody>
                     <a:bodyPr/>
@@ -11510,7 +11510,7 @@
                   </a:tcPr>
                 </a:tc>
               </a:tr>
-              <a:tr h="609600">
+              <a:tr h="590550">
                 <a:tc>
                   <a:txBody>
                     <a:bodyPr/>
@@ -12384,7 +12384,7 @@
           </p:nvPr>
         </p:nvGraphicFramePr>
         <p:xfrm>
-          <a:off x="7483450" y="2042160"/>
+          <a:off x="7483450" y="2089785"/>
           <a:ext cx="4023360" cy="914400"/>
         </p:xfrm>
         <a:graphic>
@@ -12397,7 +12397,7 @@
                 <a:gridCol w="1005840"/>
                 <a:gridCol w="1005840"/>
               </a:tblGrid>
-              <a:tr h="609600">
+              <a:tr h="590550">
                 <a:tc>
                   <a:txBody>
                     <a:bodyPr/>
@@ -12660,7 +12660,7 @@
                   </a:tcPr>
                 </a:tc>
               </a:tr>
-              <a:tr h="609600">
+              <a:tr h="590550">
                 <a:tc>
                   <a:txBody>
                     <a:bodyPr/>
@@ -12912,7 +12912,7 @@
                   </a:tcPr>
                 </a:tc>
               </a:tr>
-              <a:tr h="609600">
+              <a:tr h="590550">
                 <a:tc>
                   <a:txBody>
                     <a:bodyPr/>
@@ -13175,7 +13175,7 @@
                   </a:tcPr>
                 </a:tc>
               </a:tr>
-              <a:tr h="609600">
+              <a:tr h="590550">
                 <a:tc>
                   <a:txBody>
                     <a:bodyPr/>
@@ -13449,7 +13449,7 @@
                   </a:tcPr>
                 </a:tc>
               </a:tr>
-              <a:tr h="609600">
+              <a:tr h="590550">
                 <a:tc>
                   <a:txBody>
                     <a:bodyPr/>
@@ -14306,7 +14306,7 @@
           </p:nvPr>
         </p:nvGraphicFramePr>
         <p:xfrm>
-          <a:off x="7483450" y="2103120"/>
+          <a:off x="7483450" y="2030730"/>
           <a:ext cx="4023360" cy="914400"/>
         </p:xfrm>
         <a:graphic>
@@ -14319,7 +14319,2144 @@
                 <a:gridCol w="1005840"/>
                 <a:gridCol w="1005840"/>
               </a:tblGrid>
-              <a:tr h="487680">
+              <a:tr h="511810">
+                <a:tc>
+                  <a:txBody>
+                    <a:bodyPr/>
+                    <a:lstStyle/>
+                    <a:p>
+                      <a:pPr eaLnBrk="0" algn="ctr" indent="0" marL="0">
+                        <a:buNone/>
+                      </a:pPr>
+                      <a:endParaRPr lang="en-US" sz="2600" dirty="0">
+                        <a:latin typeface="맑은 고딕" charset="0"/>
+                        <a:ea typeface="맑은 고딕" charset="0"/>
+                        <a:cs typeface="맑은 고딕" charset="0"/>
+                      </a:endParaRPr>
+                    </a:p>
+                  </a:txBody>
+                  <a:tcPr marL="38100" marR="38100" marT="38100" marB="38100" anchor="ctr">
+                    <a:lnL w="12700" cap="flat" cmpd="sng" algn="ctr">
+                      <a:solidFill>
+                        <a:srgbClr val="94A3B8"/>
+                      </a:solidFill>
+                      <a:prstDash val="solid"/>
+                      <a:round/>
+                      <a:headEnd type="none" w="med" len="med"/>
+                      <a:tailEnd type="none" w="med" len="med"/>
+                    </a:lnL>
+                    <a:lnR w="12700" cap="flat" cmpd="sng" algn="ctr">
+                      <a:solidFill>
+                        <a:srgbClr val="94A3B8"/>
+                      </a:solidFill>
+                      <a:prstDash val="solid"/>
+                      <a:round/>
+                      <a:headEnd type="none" w="med" len="med"/>
+                      <a:tailEnd type="none" w="med" len="med"/>
+                    </a:lnR>
+                    <a:lnT w="12700" cap="flat" cmpd="sng" algn="ctr">
+                      <a:solidFill>
+                        <a:srgbClr val="94A3B8"/>
+                      </a:solidFill>
+                      <a:prstDash val="solid"/>
+                      <a:round/>
+                      <a:headEnd type="none" w="med" len="med"/>
+                      <a:tailEnd type="none" w="med" len="med"/>
+                    </a:lnT>
+                    <a:lnB w="12700" cap="flat" cmpd="sng" algn="ctr">
+                      <a:solidFill>
+                        <a:srgbClr val="94A3B8"/>
+                      </a:solidFill>
+                      <a:prstDash val="solid"/>
+                      <a:round/>
+                      <a:headEnd type="none" w="med" len="med"/>
+                      <a:tailEnd type="none" w="med" len="med"/>
+                    </a:lnB>
+                    <a:solidFill>
+                      <a:srgbClr val="EAF3F1"/>
+                    </a:solidFill>
+                  </a:tcPr>
+                </a:tc>
+                <a:tc>
+                  <a:txBody>
+                    <a:bodyPr/>
+                    <a:lstStyle/>
+                    <a:p>
+                      <a:pPr eaLnBrk="0" algn="ctr" indent="0" marL="0">
+                        <a:buNone/>
+                      </a:pPr>
+                      <a:r>
+                        <a:rPr lang="en-US" sz="2600" b="1" dirty="0">
+                          <a:solidFill>
+                            <a:srgbClr val="1F2937"/>
+                          </a:solidFill>
+                          <a:latin typeface="맑은 고딕" pitchFamily="34" charset="0"/>
+                          <a:ea typeface="맑은 고딕" pitchFamily="34" charset="-122"/>
+                          <a:cs typeface="맑은 고딕" pitchFamily="34" charset="-120"/>
+                        </a:rPr>
+                        <a:t>백</a:t>
+                      </a:r>
+                      <a:endParaRPr lang="en-US" sz="2600" dirty="0">
+                        <a:latin typeface="맑은 고딕" charset="0"/>
+                        <a:ea typeface="맑은 고딕" charset="0"/>
+                        <a:cs typeface="맑은 고딕" charset="0"/>
+                      </a:endParaRPr>
+                    </a:p>
+                  </a:txBody>
+                  <a:tcPr marL="38100" marR="38100" marT="38100" marB="38100" anchor="ctr">
+                    <a:lnL w="12700" cap="flat" cmpd="sng" algn="ctr">
+                      <a:solidFill>
+                        <a:srgbClr val="94A3B8"/>
+                      </a:solidFill>
+                      <a:prstDash val="solid"/>
+                      <a:round/>
+                      <a:headEnd type="none" w="med" len="med"/>
+                      <a:tailEnd type="none" w="med" len="med"/>
+                    </a:lnL>
+                    <a:lnR w="12700" cap="flat" cmpd="sng" algn="ctr">
+                      <a:solidFill>
+                        <a:srgbClr val="94A3B8"/>
+                      </a:solidFill>
+                      <a:prstDash val="solid"/>
+                      <a:round/>
+                      <a:headEnd type="none" w="med" len="med"/>
+                      <a:tailEnd type="none" w="med" len="med"/>
+                    </a:lnR>
+                    <a:lnT w="12700" cap="flat" cmpd="sng" algn="ctr">
+                      <a:solidFill>
+                        <a:srgbClr val="94A3B8"/>
+                      </a:solidFill>
+                      <a:prstDash val="solid"/>
+                      <a:round/>
+                      <a:headEnd type="none" w="med" len="med"/>
+                      <a:tailEnd type="none" w="med" len="med"/>
+                    </a:lnT>
+                    <a:lnB w="12700" cap="flat" cmpd="sng" algn="ctr">
+                      <a:solidFill>
+                        <a:srgbClr val="94A3B8"/>
+                      </a:solidFill>
+                      <a:prstDash val="solid"/>
+                      <a:round/>
+                      <a:headEnd type="none" w="med" len="med"/>
+                      <a:tailEnd type="none" w="med" len="med"/>
+                    </a:lnB>
+                    <a:solidFill>
+                      <a:srgbClr val="EAF3F1"/>
+                    </a:solidFill>
+                  </a:tcPr>
+                </a:tc>
+                <a:tc>
+                  <a:txBody>
+                    <a:bodyPr/>
+                    <a:lstStyle/>
+                    <a:p>
+                      <a:pPr eaLnBrk="0" algn="ctr" indent="0" marL="0">
+                        <a:buNone/>
+                      </a:pPr>
+                      <a:r>
+                        <a:rPr lang="en-US" sz="2600" b="1" dirty="0">
+                          <a:solidFill>
+                            <a:srgbClr val="1F2937"/>
+                          </a:solidFill>
+                          <a:latin typeface="맑은 고딕" pitchFamily="34" charset="0"/>
+                          <a:ea typeface="맑은 고딕" pitchFamily="34" charset="-122"/>
+                          <a:cs typeface="맑은 고딕" pitchFamily="34" charset="-120"/>
+                        </a:rPr>
+                        <a:t>십</a:t>
+                      </a:r>
+                      <a:endParaRPr lang="en-US" sz="2600" dirty="0">
+                        <a:latin typeface="맑은 고딕" charset="0"/>
+                        <a:ea typeface="맑은 고딕" charset="0"/>
+                        <a:cs typeface="맑은 고딕" charset="0"/>
+                      </a:endParaRPr>
+                    </a:p>
+                  </a:txBody>
+                  <a:tcPr marL="38100" marR="38100" marT="38100" marB="38100" anchor="ctr">
+                    <a:lnL w="12700" cap="flat" cmpd="sng" algn="ctr">
+                      <a:solidFill>
+                        <a:srgbClr val="94A3B8"/>
+                      </a:solidFill>
+                      <a:prstDash val="solid"/>
+                      <a:round/>
+                      <a:headEnd type="none" w="med" len="med"/>
+                      <a:tailEnd type="none" w="med" len="med"/>
+                    </a:lnL>
+                    <a:lnR w="12700" cap="flat" cmpd="sng" algn="ctr">
+                      <a:solidFill>
+                        <a:srgbClr val="94A3B8"/>
+                      </a:solidFill>
+                      <a:prstDash val="solid"/>
+                      <a:round/>
+                      <a:headEnd type="none" w="med" len="med"/>
+                      <a:tailEnd type="none" w="med" len="med"/>
+                    </a:lnR>
+                    <a:lnT w="12700" cap="flat" cmpd="sng" algn="ctr">
+                      <a:solidFill>
+                        <a:srgbClr val="94A3B8"/>
+                      </a:solidFill>
+                      <a:prstDash val="solid"/>
+                      <a:round/>
+                      <a:headEnd type="none" w="med" len="med"/>
+                      <a:tailEnd type="none" w="med" len="med"/>
+                    </a:lnT>
+                    <a:lnB w="12700" cap="flat" cmpd="sng" algn="ctr">
+                      <a:solidFill>
+                        <a:srgbClr val="94A3B8"/>
+                      </a:solidFill>
+                      <a:prstDash val="solid"/>
+                      <a:round/>
+                      <a:headEnd type="none" w="med" len="med"/>
+                      <a:tailEnd type="none" w="med" len="med"/>
+                    </a:lnB>
+                    <a:solidFill>
+                      <a:srgbClr val="EAF3F1"/>
+                    </a:solidFill>
+                  </a:tcPr>
+                </a:tc>
+                <a:tc>
+                  <a:txBody>
+                    <a:bodyPr/>
+                    <a:lstStyle/>
+                    <a:p>
+                      <a:pPr eaLnBrk="0" algn="ctr" indent="0" marL="0">
+                        <a:buNone/>
+                      </a:pPr>
+                      <a:r>
+                        <a:rPr lang="en-US" sz="2600" b="1" dirty="0">
+                          <a:solidFill>
+                            <a:srgbClr val="1F2937"/>
+                          </a:solidFill>
+                          <a:latin typeface="맑은 고딕" pitchFamily="34" charset="0"/>
+                          <a:ea typeface="맑은 고딕" pitchFamily="34" charset="-122"/>
+                          <a:cs typeface="맑은 고딕" pitchFamily="34" charset="-120"/>
+                        </a:rPr>
+                        <a:t>일</a:t>
+                      </a:r>
+                      <a:endParaRPr lang="en-US" sz="2600" dirty="0">
+                        <a:latin typeface="맑은 고딕" charset="0"/>
+                        <a:ea typeface="맑은 고딕" charset="0"/>
+                        <a:cs typeface="맑은 고딕" charset="0"/>
+                      </a:endParaRPr>
+                    </a:p>
+                  </a:txBody>
+                  <a:tcPr marL="38100" marR="38100" marT="38100" marB="38100" anchor="ctr">
+                    <a:lnL w="12700" cap="flat" cmpd="sng" algn="ctr">
+                      <a:solidFill>
+                        <a:srgbClr val="94A3B8"/>
+                      </a:solidFill>
+                      <a:prstDash val="solid"/>
+                      <a:round/>
+                      <a:headEnd type="none" w="med" len="med"/>
+                      <a:tailEnd type="none" w="med" len="med"/>
+                    </a:lnL>
+                    <a:lnR w="12700" cap="flat" cmpd="sng" algn="ctr">
+                      <a:solidFill>
+                        <a:srgbClr val="94A3B8"/>
+                      </a:solidFill>
+                      <a:prstDash val="solid"/>
+                      <a:round/>
+                      <a:headEnd type="none" w="med" len="med"/>
+                      <a:tailEnd type="none" w="med" len="med"/>
+                    </a:lnR>
+                    <a:lnT w="12700" cap="flat" cmpd="sng" algn="ctr">
+                      <a:solidFill>
+                        <a:srgbClr val="94A3B8"/>
+                      </a:solidFill>
+                      <a:prstDash val="solid"/>
+                      <a:round/>
+                      <a:headEnd type="none" w="med" len="med"/>
+                      <a:tailEnd type="none" w="med" len="med"/>
+                    </a:lnT>
+                    <a:lnB w="12700" cap="flat" cmpd="sng" algn="ctr">
+                      <a:solidFill>
+                        <a:srgbClr val="94A3B8"/>
+                      </a:solidFill>
+                      <a:prstDash val="solid"/>
+                      <a:round/>
+                      <a:headEnd type="none" w="med" len="med"/>
+                      <a:tailEnd type="none" w="med" len="med"/>
+                    </a:lnB>
+                    <a:solidFill>
+                      <a:srgbClr val="EAF3F1"/>
+                    </a:solidFill>
+                  </a:tcPr>
+                </a:tc>
+              </a:tr>
+              <a:tr h="511810">
+                <a:tc>
+                  <a:txBody>
+                    <a:bodyPr/>
+                    <a:lstStyle/>
+                    <a:p>
+                      <a:pPr eaLnBrk="0" algn="ctr" indent="0" marL="0">
+                        <a:buNone/>
+                      </a:pPr>
+                      <a:endParaRPr lang="en-US" sz="2600" dirty="0">
+                        <a:latin typeface="맑은 고딕" charset="0"/>
+                        <a:ea typeface="맑은 고딕" charset="0"/>
+                        <a:cs typeface="맑은 고딕" charset="0"/>
+                      </a:endParaRPr>
+                    </a:p>
+                  </a:txBody>
+                  <a:tcPr marL="38100" marR="38100" marT="38100" marB="38100" anchor="ctr">
+                    <a:lnL w="12700" cap="flat" cmpd="sng" algn="ctr">
+                      <a:solidFill>
+                        <a:srgbClr val="94A3B8"/>
+                      </a:solidFill>
+                      <a:prstDash val="solid"/>
+                      <a:round/>
+                      <a:headEnd type="none" w="med" len="med"/>
+                      <a:tailEnd type="none" w="med" len="med"/>
+                    </a:lnL>
+                    <a:lnR w="12700" cap="flat" cmpd="sng" algn="ctr">
+                      <a:solidFill>
+                        <a:srgbClr val="94A3B8"/>
+                      </a:solidFill>
+                      <a:prstDash val="solid"/>
+                      <a:round/>
+                      <a:headEnd type="none" w="med" len="med"/>
+                      <a:tailEnd type="none" w="med" len="med"/>
+                    </a:lnR>
+                    <a:lnT w="12700" cap="flat" cmpd="sng" algn="ctr">
+                      <a:solidFill>
+                        <a:srgbClr val="94A3B8"/>
+                      </a:solidFill>
+                      <a:prstDash val="solid"/>
+                      <a:round/>
+                      <a:headEnd type="none" w="med" len="med"/>
+                      <a:tailEnd type="none" w="med" len="med"/>
+                    </a:lnT>
+                    <a:lnB w="12700" cap="flat" cmpd="sng" algn="ctr">
+                      <a:solidFill>
+                        <a:srgbClr val="94A3B8"/>
+                      </a:solidFill>
+                      <a:prstDash val="solid"/>
+                      <a:round/>
+                      <a:headEnd type="none" w="med" len="med"/>
+                      <a:tailEnd type="none" w="med" len="med"/>
+                    </a:lnB>
+                    <a:solidFill>
+                      <a:srgbClr val="FFFFFF"/>
+                    </a:solidFill>
+                  </a:tcPr>
+                </a:tc>
+                <a:tc>
+                  <a:txBody>
+                    <a:bodyPr/>
+                    <a:lstStyle/>
+                    <a:p>
+                      <a:pPr eaLnBrk="0" algn="ctr" indent="0" marL="0">
+                        <a:buNone/>
+                      </a:pPr>
+                      <a:r>
+                        <a:rPr lang="en-US" sz="2600" dirty="0">
+                          <a:solidFill>
+                            <a:srgbClr val="1F2937"/>
+                          </a:solidFill>
+                          <a:latin typeface="맑은 고딕" pitchFamily="34" charset="0"/>
+                          <a:ea typeface="맑은 고딕" pitchFamily="34" charset="-122"/>
+                          <a:cs typeface="맑은 고딕" pitchFamily="34" charset="-120"/>
+                        </a:rPr>
+                        <a:t>3</a:t>
+                      </a:r>
+                      <a:endParaRPr lang="en-US" sz="2600" dirty="0">
+                        <a:latin typeface="맑은 고딕" charset="0"/>
+                        <a:ea typeface="맑은 고딕" charset="0"/>
+                        <a:cs typeface="맑은 고딕" charset="0"/>
+                      </a:endParaRPr>
+                    </a:p>
+                  </a:txBody>
+                  <a:tcPr marL="38100" marR="38100" marT="38100" marB="38100" anchor="ctr">
+                    <a:lnL w="12700" cap="flat" cmpd="sng" algn="ctr">
+                      <a:solidFill>
+                        <a:srgbClr val="94A3B8"/>
+                      </a:solidFill>
+                      <a:prstDash val="solid"/>
+                      <a:round/>
+                      <a:headEnd type="none" w="med" len="med"/>
+                      <a:tailEnd type="none" w="med" len="med"/>
+                    </a:lnL>
+                    <a:lnR w="12700" cap="flat" cmpd="sng" algn="ctr">
+                      <a:solidFill>
+                        <a:srgbClr val="94A3B8"/>
+                      </a:solidFill>
+                      <a:prstDash val="solid"/>
+                      <a:round/>
+                      <a:headEnd type="none" w="med" len="med"/>
+                      <a:tailEnd type="none" w="med" len="med"/>
+                    </a:lnR>
+                    <a:lnT w="12700" cap="flat" cmpd="sng" algn="ctr">
+                      <a:solidFill>
+                        <a:srgbClr val="94A3B8"/>
+                      </a:solidFill>
+                      <a:prstDash val="solid"/>
+                      <a:round/>
+                      <a:headEnd type="none" w="med" len="med"/>
+                      <a:tailEnd type="none" w="med" len="med"/>
+                    </a:lnT>
+                    <a:lnB w="12700" cap="flat" cmpd="sng" algn="ctr">
+                      <a:solidFill>
+                        <a:srgbClr val="94A3B8"/>
+                      </a:solidFill>
+                      <a:prstDash val="solid"/>
+                      <a:round/>
+                      <a:headEnd type="none" w="med" len="med"/>
+                      <a:tailEnd type="none" w="med" len="med"/>
+                    </a:lnB>
+                    <a:solidFill>
+                      <a:srgbClr val="FFFFFF"/>
+                    </a:solidFill>
+                  </a:tcPr>
+                </a:tc>
+                <a:tc>
+                  <a:txBody>
+                    <a:bodyPr/>
+                    <a:lstStyle/>
+                    <a:p>
+                      <a:pPr eaLnBrk="0" algn="ctr" indent="0" marL="0">
+                        <a:buNone/>
+                      </a:pPr>
+                      <a:r>
+                        <a:rPr lang="en-US" sz="2600" dirty="0">
+                          <a:solidFill>
+                            <a:srgbClr val="1F2937"/>
+                          </a:solidFill>
+                          <a:latin typeface="맑은 고딕" pitchFamily="34" charset="0"/>
+                          <a:ea typeface="맑은 고딕" pitchFamily="34" charset="-122"/>
+                          <a:cs typeface="맑은 고딕" pitchFamily="34" charset="-120"/>
+                        </a:rPr>
+                        <a:t>10</a:t>
+                      </a:r>
+                      <a:endParaRPr lang="en-US" sz="2600" dirty="0">
+                        <a:latin typeface="맑은 고딕" charset="0"/>
+                        <a:ea typeface="맑은 고딕" charset="0"/>
+                        <a:cs typeface="맑은 고딕" charset="0"/>
+                      </a:endParaRPr>
+                    </a:p>
+                  </a:txBody>
+                  <a:tcPr marL="38100" marR="38100" marT="38100" marB="38100" anchor="ctr">
+                    <a:lnL w="12700" cap="flat" cmpd="sng" algn="ctr">
+                      <a:solidFill>
+                        <a:srgbClr val="94A3B8"/>
+                      </a:solidFill>
+                      <a:prstDash val="solid"/>
+                      <a:round/>
+                      <a:headEnd type="none" w="med" len="med"/>
+                      <a:tailEnd type="none" w="med" len="med"/>
+                    </a:lnL>
+                    <a:lnR w="12700" cap="flat" cmpd="sng" algn="ctr">
+                      <a:solidFill>
+                        <a:srgbClr val="94A3B8"/>
+                      </a:solidFill>
+                      <a:prstDash val="solid"/>
+                      <a:round/>
+                      <a:headEnd type="none" w="med" len="med"/>
+                      <a:tailEnd type="none" w="med" len="med"/>
+                    </a:lnR>
+                    <a:lnT w="12700" cap="flat" cmpd="sng" algn="ctr">
+                      <a:solidFill>
+                        <a:srgbClr val="94A3B8"/>
+                      </a:solidFill>
+                      <a:prstDash val="solid"/>
+                      <a:round/>
+                      <a:headEnd type="none" w="med" len="med"/>
+                      <a:tailEnd type="none" w="med" len="med"/>
+                    </a:lnT>
+                    <a:lnB w="12700" cap="flat" cmpd="sng" algn="ctr">
+                      <a:solidFill>
+                        <a:srgbClr val="94A3B8"/>
+                      </a:solidFill>
+                      <a:prstDash val="solid"/>
+                      <a:round/>
+                      <a:headEnd type="none" w="med" len="med"/>
+                      <a:tailEnd type="none" w="med" len="med"/>
+                    </a:lnB>
+                    <a:solidFill>
+                      <a:srgbClr val="FFFFFF"/>
+                    </a:solidFill>
+                  </a:tcPr>
+                </a:tc>
+                <a:tc>
+                  <a:txBody>
+                    <a:bodyPr/>
+                    <a:lstStyle/>
+                    <a:p>
+                      <a:pPr eaLnBrk="0" algn="ctr" indent="0" marL="0">
+                        <a:buNone/>
+                      </a:pPr>
+                      <a:endParaRPr lang="en-US" sz="2600" dirty="0">
+                        <a:latin typeface="맑은 고딕" charset="0"/>
+                        <a:ea typeface="맑은 고딕" charset="0"/>
+                        <a:cs typeface="맑은 고딕" charset="0"/>
+                      </a:endParaRPr>
+                    </a:p>
+                  </a:txBody>
+                  <a:tcPr marL="38100" marR="38100" marT="38100" marB="38100" anchor="ctr">
+                    <a:lnL w="12700" cap="flat" cmpd="sng" algn="ctr">
+                      <a:solidFill>
+                        <a:srgbClr val="94A3B8"/>
+                      </a:solidFill>
+                      <a:prstDash val="solid"/>
+                      <a:round/>
+                      <a:headEnd type="none" w="med" len="med"/>
+                      <a:tailEnd type="none" w="med" len="med"/>
+                    </a:lnL>
+                    <a:lnR w="12700" cap="flat" cmpd="sng" algn="ctr">
+                      <a:solidFill>
+                        <a:srgbClr val="94A3B8"/>
+                      </a:solidFill>
+                      <a:prstDash val="solid"/>
+                      <a:round/>
+                      <a:headEnd type="none" w="med" len="med"/>
+                      <a:tailEnd type="none" w="med" len="med"/>
+                    </a:lnR>
+                    <a:lnT w="12700" cap="flat" cmpd="sng" algn="ctr">
+                      <a:solidFill>
+                        <a:srgbClr val="94A3B8"/>
+                      </a:solidFill>
+                      <a:prstDash val="solid"/>
+                      <a:round/>
+                      <a:headEnd type="none" w="med" len="med"/>
+                      <a:tailEnd type="none" w="med" len="med"/>
+                    </a:lnT>
+                    <a:lnB w="12700" cap="flat" cmpd="sng" algn="ctr">
+                      <a:solidFill>
+                        <a:srgbClr val="94A3B8"/>
+                      </a:solidFill>
+                      <a:prstDash val="solid"/>
+                      <a:round/>
+                      <a:headEnd type="none" w="med" len="med"/>
+                      <a:tailEnd type="none" w="med" len="med"/>
+                    </a:lnB>
+                    <a:solidFill>
+                      <a:srgbClr val="FFFFFF"/>
+                    </a:solidFill>
+                  </a:tcPr>
+                </a:tc>
+              </a:tr>
+              <a:tr h="511810">
+                <a:tc>
+                  <a:txBody>
+                    <a:bodyPr/>
+                    <a:lstStyle/>
+                    <a:p>
+                      <a:pPr eaLnBrk="0" algn="ctr" indent="0" marL="0">
+                        <a:buNone/>
+                      </a:pPr>
+                      <a:endParaRPr lang="en-US" sz="2600" dirty="0">
+                        <a:latin typeface="맑은 고딕" charset="0"/>
+                        <a:ea typeface="맑은 고딕" charset="0"/>
+                        <a:cs typeface="맑은 고딕" charset="0"/>
+                      </a:endParaRPr>
+                    </a:p>
+                  </a:txBody>
+                  <a:tcPr marL="38100" marR="38100" marT="38100" marB="38100" anchor="ctr">
+                    <a:lnL w="12700" cap="flat" cmpd="sng" algn="ctr">
+                      <a:solidFill>
+                        <a:srgbClr val="94A3B8"/>
+                      </a:solidFill>
+                      <a:prstDash val="solid"/>
+                      <a:round/>
+                      <a:headEnd type="none" w="med" len="med"/>
+                      <a:tailEnd type="none" w="med" len="med"/>
+                    </a:lnL>
+                    <a:lnR w="12700" cap="flat" cmpd="sng" algn="ctr">
+                      <a:solidFill>
+                        <a:srgbClr val="94A3B8"/>
+                      </a:solidFill>
+                      <a:prstDash val="solid"/>
+                      <a:round/>
+                      <a:headEnd type="none" w="med" len="med"/>
+                      <a:tailEnd type="none" w="med" len="med"/>
+                    </a:lnR>
+                    <a:lnT w="12700" cap="flat" cmpd="sng" algn="ctr">
+                      <a:solidFill>
+                        <a:srgbClr val="94A3B8"/>
+                      </a:solidFill>
+                      <a:prstDash val="solid"/>
+                      <a:round/>
+                      <a:headEnd type="none" w="med" len="med"/>
+                      <a:tailEnd type="none" w="med" len="med"/>
+                    </a:lnT>
+                    <a:lnB w="12700" cap="flat" cmpd="sng" algn="ctr">
+                      <a:solidFill>
+                        <a:srgbClr val="94A3B8"/>
+                      </a:solidFill>
+                      <a:prstDash val="solid"/>
+                      <a:round/>
+                      <a:headEnd type="none" w="med" len="med"/>
+                      <a:tailEnd type="none" w="med" len="med"/>
+                    </a:lnB>
+                    <a:solidFill>
+                      <a:srgbClr val="FFFFFF"/>
+                    </a:solidFill>
+                  </a:tcPr>
+                </a:tc>
+                <a:tc>
+                  <a:txBody>
+                    <a:bodyPr/>
+                    <a:lstStyle/>
+                    <a:p>
+                      <a:pPr eaLnBrk="0" algn="ctr" indent="0" marL="0">
+                        <a:buNone/>
+                      </a:pPr>
+                      <a:endParaRPr lang="en-US" sz="2600" dirty="0">
+                        <a:latin typeface="맑은 고딕" charset="0"/>
+                        <a:ea typeface="맑은 고딕" charset="0"/>
+                        <a:cs typeface="맑은 고딕" charset="0"/>
+                      </a:endParaRPr>
+                    </a:p>
+                  </a:txBody>
+                  <a:tcPr marL="38100" marR="38100" marT="38100" marB="38100" anchor="ctr">
+                    <a:lnL w="12700" cap="flat" cmpd="sng" algn="ctr">
+                      <a:solidFill>
+                        <a:srgbClr val="94A3B8"/>
+                      </a:solidFill>
+                      <a:prstDash val="solid"/>
+                      <a:round/>
+                      <a:headEnd type="none" w="med" len="med"/>
+                      <a:tailEnd type="none" w="med" len="med"/>
+                    </a:lnL>
+                    <a:lnR w="12700" cap="flat" cmpd="sng" algn="ctr">
+                      <a:solidFill>
+                        <a:srgbClr val="94A3B8"/>
+                      </a:solidFill>
+                      <a:prstDash val="solid"/>
+                      <a:round/>
+                      <a:headEnd type="none" w="med" len="med"/>
+                      <a:tailEnd type="none" w="med" len="med"/>
+                    </a:lnR>
+                    <a:lnT w="12700" cap="flat" cmpd="sng" algn="ctr">
+                      <a:solidFill>
+                        <a:srgbClr val="94A3B8"/>
+                      </a:solidFill>
+                      <a:prstDash val="solid"/>
+                      <a:round/>
+                      <a:headEnd type="none" w="med" len="med"/>
+                      <a:tailEnd type="none" w="med" len="med"/>
+                    </a:lnT>
+                    <a:lnB w="12700" cap="flat" cmpd="sng" algn="ctr">
+                      <a:solidFill>
+                        <a:srgbClr val="94A3B8"/>
+                      </a:solidFill>
+                      <a:prstDash val="solid"/>
+                      <a:round/>
+                      <a:headEnd type="none" w="med" len="med"/>
+                      <a:tailEnd type="none" w="med" len="med"/>
+                    </a:lnB>
+                    <a:solidFill>
+                      <a:srgbClr val="FFFFFF"/>
+                    </a:solidFill>
+                  </a:tcPr>
+                </a:tc>
+                <a:tc>
+                  <a:txBody>
+                    <a:bodyPr/>
+                    <a:lstStyle/>
+                    <a:p>
+                      <a:pPr eaLnBrk="0" algn="ctr" indent="0" marL="0">
+                        <a:buNone/>
+                      </a:pPr>
+                      <a:r>
+                        <a:rPr lang="en-US" sz="2600" dirty="0">
+                          <a:solidFill>
+                            <a:srgbClr val="1F2937"/>
+                          </a:solidFill>
+                          <a:latin typeface="맑은 고딕" pitchFamily="34" charset="0"/>
+                          <a:ea typeface="맑은 고딕" pitchFamily="34" charset="-122"/>
+                          <a:cs typeface="맑은 고딕" pitchFamily="34" charset="-120"/>
+                        </a:rPr>
+                        <a:t>1</a:t>
+                      </a:r>
+                      <a:endParaRPr lang="en-US" sz="2600" dirty="0">
+                        <a:latin typeface="맑은 고딕" charset="0"/>
+                        <a:ea typeface="맑은 고딕" charset="0"/>
+                        <a:cs typeface="맑은 고딕" charset="0"/>
+                      </a:endParaRPr>
+                    </a:p>
+                  </a:txBody>
+                  <a:tcPr marL="38100" marR="38100" marT="38100" marB="38100" anchor="ctr">
+                    <a:lnL w="12700" cap="flat" cmpd="sng" algn="ctr">
+                      <a:solidFill>
+                        <a:srgbClr val="94A3B8"/>
+                      </a:solidFill>
+                      <a:prstDash val="solid"/>
+                      <a:round/>
+                      <a:headEnd type="none" w="med" len="med"/>
+                      <a:tailEnd type="none" w="med" len="med"/>
+                    </a:lnL>
+                    <a:lnR w="12700" cap="flat" cmpd="sng" algn="ctr">
+                      <a:solidFill>
+                        <a:srgbClr val="94A3B8"/>
+                      </a:solidFill>
+                      <a:prstDash val="solid"/>
+                      <a:round/>
+                      <a:headEnd type="none" w="med" len="med"/>
+                      <a:tailEnd type="none" w="med" len="med"/>
+                    </a:lnR>
+                    <a:lnT w="12700" cap="flat" cmpd="sng" algn="ctr">
+                      <a:solidFill>
+                        <a:srgbClr val="94A3B8"/>
+                      </a:solidFill>
+                      <a:prstDash val="solid"/>
+                      <a:round/>
+                      <a:headEnd type="none" w="med" len="med"/>
+                      <a:tailEnd type="none" w="med" len="med"/>
+                    </a:lnT>
+                    <a:lnB w="12700" cap="flat" cmpd="sng" algn="ctr">
+                      <a:solidFill>
+                        <a:srgbClr val="94A3B8"/>
+                      </a:solidFill>
+                      <a:prstDash val="solid"/>
+                      <a:round/>
+                      <a:headEnd type="none" w="med" len="med"/>
+                      <a:tailEnd type="none" w="med" len="med"/>
+                    </a:lnB>
+                    <a:solidFill>
+                      <a:srgbClr val="FFFFFF"/>
+                    </a:solidFill>
+                  </a:tcPr>
+                </a:tc>
+                <a:tc>
+                  <a:txBody>
+                    <a:bodyPr/>
+                    <a:lstStyle/>
+                    <a:p>
+                      <a:pPr eaLnBrk="0" algn="ctr" indent="0" marL="0">
+                        <a:buNone/>
+                      </a:pPr>
+                      <a:r>
+                        <a:rPr lang="en-US" sz="2600" dirty="0">
+                          <a:solidFill>
+                            <a:srgbClr val="1F2937"/>
+                          </a:solidFill>
+                          <a:latin typeface="맑은 고딕" pitchFamily="34" charset="0"/>
+                          <a:ea typeface="맑은 고딕" pitchFamily="34" charset="-122"/>
+                          <a:cs typeface="맑은 고딕" pitchFamily="34" charset="-120"/>
+                        </a:rPr>
+                        <a:t>10</a:t>
+                      </a:r>
+                      <a:endParaRPr lang="en-US" sz="2600" dirty="0">
+                        <a:latin typeface="맑은 고딕" charset="0"/>
+                        <a:ea typeface="맑은 고딕" charset="0"/>
+                        <a:cs typeface="맑은 고딕" charset="0"/>
+                      </a:endParaRPr>
+                    </a:p>
+                  </a:txBody>
+                  <a:tcPr marL="38100" marR="38100" marT="38100" marB="38100" anchor="ctr">
+                    <a:lnL w="12700" cap="flat" cmpd="sng" algn="ctr">
+                      <a:solidFill>
+                        <a:srgbClr val="94A3B8"/>
+                      </a:solidFill>
+                      <a:prstDash val="solid"/>
+                      <a:round/>
+                      <a:headEnd type="none" w="med" len="med"/>
+                      <a:tailEnd type="none" w="med" len="med"/>
+                    </a:lnL>
+                    <a:lnR w="12700" cap="flat" cmpd="sng" algn="ctr">
+                      <a:solidFill>
+                        <a:srgbClr val="94A3B8"/>
+                      </a:solidFill>
+                      <a:prstDash val="solid"/>
+                      <a:round/>
+                      <a:headEnd type="none" w="med" len="med"/>
+                      <a:tailEnd type="none" w="med" len="med"/>
+                    </a:lnR>
+                    <a:lnT w="12700" cap="flat" cmpd="sng" algn="ctr">
+                      <a:solidFill>
+                        <a:srgbClr val="94A3B8"/>
+                      </a:solidFill>
+                      <a:prstDash val="solid"/>
+                      <a:round/>
+                      <a:headEnd type="none" w="med" len="med"/>
+                      <a:tailEnd type="none" w="med" len="med"/>
+                    </a:lnT>
+                    <a:lnB w="12700" cap="flat" cmpd="sng" algn="ctr">
+                      <a:solidFill>
+                        <a:srgbClr val="94A3B8"/>
+                      </a:solidFill>
+                      <a:prstDash val="solid"/>
+                      <a:round/>
+                      <a:headEnd type="none" w="med" len="med"/>
+                      <a:tailEnd type="none" w="med" len="med"/>
+                    </a:lnB>
+                    <a:solidFill>
+                      <a:srgbClr val="FFFFFF"/>
+                    </a:solidFill>
+                  </a:tcPr>
+                </a:tc>
+              </a:tr>
+              <a:tr h="511810">
+                <a:tc>
+                  <a:txBody>
+                    <a:bodyPr/>
+                    <a:lstStyle/>
+                    <a:p>
+                      <a:pPr eaLnBrk="0" algn="ctr" indent="0" marL="0">
+                        <a:buNone/>
+                      </a:pPr>
+                      <a:endParaRPr lang="en-US" sz="2600" dirty="0">
+                        <a:latin typeface="맑은 고딕" charset="0"/>
+                        <a:ea typeface="맑은 고딕" charset="0"/>
+                        <a:cs typeface="맑은 고딕" charset="0"/>
+                      </a:endParaRPr>
+                    </a:p>
+                  </a:txBody>
+                  <a:tcPr marL="38100" marR="38100" marT="38100" marB="38100" anchor="ctr">
+                    <a:lnL w="12700" cap="flat" cmpd="sng" algn="ctr">
+                      <a:solidFill>
+                        <a:srgbClr val="94A3B8"/>
+                      </a:solidFill>
+                      <a:prstDash val="solid"/>
+                      <a:round/>
+                      <a:headEnd type="none" w="med" len="med"/>
+                      <a:tailEnd type="none" w="med" len="med"/>
+                    </a:lnL>
+                    <a:lnR w="12700" cap="flat" cmpd="sng" algn="ctr">
+                      <a:solidFill>
+                        <a:srgbClr val="94A3B8"/>
+                      </a:solidFill>
+                      <a:prstDash val="solid"/>
+                      <a:round/>
+                      <a:headEnd type="none" w="med" len="med"/>
+                      <a:tailEnd type="none" w="med" len="med"/>
+                    </a:lnR>
+                    <a:lnT w="12700" cap="flat" cmpd="sng" algn="ctr">
+                      <a:solidFill>
+                        <a:srgbClr val="94A3B8"/>
+                      </a:solidFill>
+                      <a:prstDash val="solid"/>
+                      <a:round/>
+                      <a:headEnd type="none" w="med" len="med"/>
+                      <a:tailEnd type="none" w="med" len="med"/>
+                    </a:lnT>
+                    <a:lnB w="12700" cap="flat" cmpd="sng" algn="ctr">
+                      <a:solidFill>
+                        <a:srgbClr val="94A3B8"/>
+                      </a:solidFill>
+                      <a:prstDash val="solid"/>
+                      <a:round/>
+                      <a:headEnd type="none" w="med" len="med"/>
+                      <a:tailEnd type="none" w="med" len="med"/>
+                    </a:lnB>
+                    <a:solidFill>
+                      <a:srgbClr val="FFFFFF"/>
+                    </a:solidFill>
+                  </a:tcPr>
+                </a:tc>
+                <a:tc>
+                  <a:txBody>
+                    <a:bodyPr/>
+                    <a:lstStyle/>
+                    <a:p>
+                      <a:pPr eaLnBrk="0" algn="ctr" indent="0" marL="0">
+                        <a:buNone/>
+                      </a:pPr>
+                      <a:r>
+                        <a:rPr lang="en-US" sz="2600" dirty="0">
+                          <a:solidFill>
+                            <a:srgbClr val="1F2937"/>
+                          </a:solidFill>
+                          <a:latin typeface="맑은 고딕" pitchFamily="34" charset="0"/>
+                          <a:ea typeface="맑은 고딕" pitchFamily="34" charset="-122"/>
+                          <a:cs typeface="맑은 고딕" pitchFamily="34" charset="-120"/>
+                        </a:rPr>
+                        <a:t>4</a:t>
+                      </a:r>
+                      <a:endParaRPr lang="en-US" sz="2600" dirty="0">
+                        <a:latin typeface="맑은 고딕" charset="0"/>
+                        <a:ea typeface="맑은 고딕" charset="0"/>
+                        <a:cs typeface="맑은 고딕" charset="0"/>
+                      </a:endParaRPr>
+                    </a:p>
+                  </a:txBody>
+                  <a:tcPr marL="38100" marR="38100" marT="38100" marB="38100" anchor="ctr">
+                    <a:lnL w="12700" cap="flat" cmpd="sng" algn="ctr">
+                      <a:solidFill>
+                        <a:srgbClr val="94A3B8"/>
+                      </a:solidFill>
+                      <a:prstDash val="solid"/>
+                      <a:round/>
+                      <a:headEnd type="none" w="med" len="med"/>
+                      <a:tailEnd type="none" w="med" len="med"/>
+                    </a:lnL>
+                    <a:lnR w="12700" cap="flat" cmpd="sng" algn="ctr">
+                      <a:solidFill>
+                        <a:srgbClr val="94A3B8"/>
+                      </a:solidFill>
+                      <a:prstDash val="solid"/>
+                      <a:round/>
+                      <a:headEnd type="none" w="med" len="med"/>
+                      <a:tailEnd type="none" w="med" len="med"/>
+                    </a:lnR>
+                    <a:lnT w="12700" cap="flat" cmpd="sng" algn="ctr">
+                      <a:solidFill>
+                        <a:srgbClr val="94A3B8"/>
+                      </a:solidFill>
+                      <a:prstDash val="solid"/>
+                      <a:round/>
+                      <a:headEnd type="none" w="med" len="med"/>
+                      <a:tailEnd type="none" w="med" len="med"/>
+                    </a:lnT>
+                    <a:lnB w="12700" cap="flat" cmpd="sng" algn="ctr">
+                      <a:solidFill>
+                        <a:srgbClr val="94A3B8"/>
+                      </a:solidFill>
+                      <a:prstDash val="solid"/>
+                      <a:round/>
+                      <a:headEnd type="none" w="med" len="med"/>
+                      <a:tailEnd type="none" w="med" len="med"/>
+                    </a:lnB>
+                    <a:solidFill>
+                      <a:srgbClr val="FFFFFF"/>
+                    </a:solidFill>
+                  </a:tcPr>
+                </a:tc>
+                <a:tc>
+                  <a:txBody>
+                    <a:bodyPr/>
+                    <a:lstStyle/>
+                    <a:p>
+                      <a:pPr eaLnBrk="0" algn="ctr" indent="0" marL="0">
+                        <a:buNone/>
+                      </a:pPr>
+                      <a:r>
+                        <a:rPr lang="en-US" sz="2600" dirty="0">
+                          <a:solidFill>
+                            <a:srgbClr val="1F2937"/>
+                          </a:solidFill>
+                          <a:latin typeface="맑은 고딕" pitchFamily="34" charset="0"/>
+                          <a:ea typeface="맑은 고딕" pitchFamily="34" charset="-122"/>
+                          <a:cs typeface="맑은 고딕" pitchFamily="34" charset="-120"/>
+                        </a:rPr>
+                        <a:t>2</a:t>
+                      </a:r>
+                      <a:endParaRPr lang="en-US" sz="2600" dirty="0">
+                        <a:latin typeface="맑은 고딕" charset="0"/>
+                        <a:ea typeface="맑은 고딕" charset="0"/>
+                        <a:cs typeface="맑은 고딕" charset="0"/>
+                      </a:endParaRPr>
+                    </a:p>
+                  </a:txBody>
+                  <a:tcPr marL="38100" marR="38100" marT="38100" marB="38100" anchor="ctr">
+                    <a:lnL w="12700" cap="flat" cmpd="sng" algn="ctr">
+                      <a:solidFill>
+                        <a:srgbClr val="94A3B8"/>
+                      </a:solidFill>
+                      <a:prstDash val="solid"/>
+                      <a:round/>
+                      <a:headEnd type="none" w="med" len="med"/>
+                      <a:tailEnd type="none" w="med" len="med"/>
+                    </a:lnL>
+                    <a:lnR w="12700" cap="flat" cmpd="sng" algn="ctr">
+                      <a:solidFill>
+                        <a:srgbClr val="94A3B8"/>
+                      </a:solidFill>
+                      <a:prstDash val="solid"/>
+                      <a:round/>
+                      <a:headEnd type="none" w="med" len="med"/>
+                      <a:tailEnd type="none" w="med" len="med"/>
+                    </a:lnR>
+                    <a:lnT w="12700" cap="flat" cmpd="sng" algn="ctr">
+                      <a:solidFill>
+                        <a:srgbClr val="94A3B8"/>
+                      </a:solidFill>
+                      <a:prstDash val="solid"/>
+                      <a:round/>
+                      <a:headEnd type="none" w="med" len="med"/>
+                      <a:tailEnd type="none" w="med" len="med"/>
+                    </a:lnT>
+                    <a:lnB w="12700" cap="flat" cmpd="sng" algn="ctr">
+                      <a:solidFill>
+                        <a:srgbClr val="94A3B8"/>
+                      </a:solidFill>
+                      <a:prstDash val="solid"/>
+                      <a:round/>
+                      <a:headEnd type="none" w="med" len="med"/>
+                      <a:tailEnd type="none" w="med" len="med"/>
+                    </a:lnB>
+                    <a:solidFill>
+                      <a:srgbClr val="FFFFFF"/>
+                    </a:solidFill>
+                  </a:tcPr>
+                </a:tc>
+                <a:tc>
+                  <a:txBody>
+                    <a:bodyPr/>
+                    <a:lstStyle/>
+                    <a:p>
+                      <a:pPr eaLnBrk="0" algn="ctr" indent="0" marL="0">
+                        <a:buNone/>
+                      </a:pPr>
+                      <a:r>
+                        <a:rPr lang="en-US" sz="2600" dirty="0">
+                          <a:solidFill>
+                            <a:srgbClr val="1F2937"/>
+                          </a:solidFill>
+                          <a:latin typeface="맑은 고딕" pitchFamily="34" charset="0"/>
+                          <a:ea typeface="맑은 고딕" pitchFamily="34" charset="-122"/>
+                          <a:cs typeface="맑은 고딕" pitchFamily="34" charset="-120"/>
+                        </a:rPr>
+                        <a:t>3</a:t>
+                      </a:r>
+                      <a:endParaRPr lang="en-US" sz="2600" dirty="0">
+                        <a:latin typeface="맑은 고딕" charset="0"/>
+                        <a:ea typeface="맑은 고딕" charset="0"/>
+                        <a:cs typeface="맑은 고딕" charset="0"/>
+                      </a:endParaRPr>
+                    </a:p>
+                  </a:txBody>
+                  <a:tcPr marL="38100" marR="38100" marT="38100" marB="38100" anchor="ctr">
+                    <a:lnL w="12700" cap="flat" cmpd="sng" algn="ctr">
+                      <a:solidFill>
+                        <a:srgbClr val="94A3B8"/>
+                      </a:solidFill>
+                      <a:prstDash val="solid"/>
+                      <a:round/>
+                      <a:headEnd type="none" w="med" len="med"/>
+                      <a:tailEnd type="none" w="med" len="med"/>
+                    </a:lnL>
+                    <a:lnR w="12700" cap="flat" cmpd="sng" algn="ctr">
+                      <a:solidFill>
+                        <a:srgbClr val="94A3B8"/>
+                      </a:solidFill>
+                      <a:prstDash val="solid"/>
+                      <a:round/>
+                      <a:headEnd type="none" w="med" len="med"/>
+                      <a:tailEnd type="none" w="med" len="med"/>
+                    </a:lnR>
+                    <a:lnT w="12700" cap="flat" cmpd="sng" algn="ctr">
+                      <a:solidFill>
+                        <a:srgbClr val="94A3B8"/>
+                      </a:solidFill>
+                      <a:prstDash val="solid"/>
+                      <a:round/>
+                      <a:headEnd type="none" w="med" len="med"/>
+                      <a:tailEnd type="none" w="med" len="med"/>
+                    </a:lnT>
+                    <a:lnB w="12700" cap="flat" cmpd="sng" algn="ctr">
+                      <a:solidFill>
+                        <a:srgbClr val="94A3B8"/>
+                      </a:solidFill>
+                      <a:prstDash val="solid"/>
+                      <a:round/>
+                      <a:headEnd type="none" w="med" len="med"/>
+                      <a:tailEnd type="none" w="med" len="med"/>
+                    </a:lnB>
+                    <a:solidFill>
+                      <a:srgbClr val="FFFFFF"/>
+                    </a:solidFill>
+                  </a:tcPr>
+                </a:tc>
+              </a:tr>
+              <a:tr h="511810">
+                <a:tc>
+                  <a:txBody>
+                    <a:bodyPr/>
+                    <a:lstStyle/>
+                    <a:p>
+                      <a:pPr eaLnBrk="0" algn="ctr" indent="0" marL="0">
+                        <a:buNone/>
+                      </a:pPr>
+                      <a:r>
+                        <a:rPr lang="en-US" sz="2600" dirty="0">
+                          <a:solidFill>
+                            <a:srgbClr val="1F2937"/>
+                          </a:solidFill>
+                          <a:latin typeface="맑은 고딕" pitchFamily="34" charset="0"/>
+                          <a:ea typeface="맑은 고딕" pitchFamily="34" charset="-122"/>
+                          <a:cs typeface="맑은 고딕" pitchFamily="34" charset="-120"/>
+                        </a:rPr>
+                        <a:t>−</a:t>
+                      </a:r>
+                      <a:endParaRPr lang="en-US" sz="2600" dirty="0">
+                        <a:latin typeface="맑은 고딕" charset="0"/>
+                        <a:ea typeface="맑은 고딕" charset="0"/>
+                        <a:cs typeface="맑은 고딕" charset="0"/>
+                      </a:endParaRPr>
+                    </a:p>
+                  </a:txBody>
+                  <a:tcPr marL="38100" marR="38100" marT="38100" marB="38100" anchor="ctr">
+                    <a:lnL w="12700" cap="flat" cmpd="sng" algn="ctr">
+                      <a:solidFill>
+                        <a:srgbClr val="94A3B8"/>
+                      </a:solidFill>
+                      <a:prstDash val="solid"/>
+                      <a:round/>
+                      <a:headEnd type="none" w="med" len="med"/>
+                      <a:tailEnd type="none" w="med" len="med"/>
+                    </a:lnL>
+                    <a:lnR w="12700" cap="flat" cmpd="sng" algn="ctr">
+                      <a:solidFill>
+                        <a:srgbClr val="94A3B8"/>
+                      </a:solidFill>
+                      <a:prstDash val="solid"/>
+                      <a:round/>
+                      <a:headEnd type="none" w="med" len="med"/>
+                      <a:tailEnd type="none" w="med" len="med"/>
+                    </a:lnR>
+                    <a:lnT w="12700" cap="flat" cmpd="sng" algn="ctr">
+                      <a:solidFill>
+                        <a:srgbClr val="94A3B8"/>
+                      </a:solidFill>
+                      <a:prstDash val="solid"/>
+                      <a:round/>
+                      <a:headEnd type="none" w="med" len="med"/>
+                      <a:tailEnd type="none" w="med" len="med"/>
+                    </a:lnT>
+                    <a:lnB w="12700" cap="flat" cmpd="sng" algn="ctr">
+                      <a:solidFill>
+                        <a:srgbClr val="94A3B8"/>
+                      </a:solidFill>
+                      <a:prstDash val="solid"/>
+                      <a:round/>
+                      <a:headEnd type="none" w="med" len="med"/>
+                      <a:tailEnd type="none" w="med" len="med"/>
+                    </a:lnB>
+                    <a:solidFill>
+                      <a:srgbClr val="FFFFFF"/>
+                    </a:solidFill>
+                  </a:tcPr>
+                </a:tc>
+                <a:tc>
+                  <a:txBody>
+                    <a:bodyPr/>
+                    <a:lstStyle/>
+                    <a:p>
+                      <a:pPr eaLnBrk="0" algn="ctr" indent="0" marL="0">
+                        <a:buNone/>
+                      </a:pPr>
+                      <a:r>
+                        <a:rPr lang="en-US" sz="2600" dirty="0">
+                          <a:solidFill>
+                            <a:srgbClr val="1F2937"/>
+                          </a:solidFill>
+                          <a:latin typeface="맑은 고딕" pitchFamily="34" charset="0"/>
+                          <a:ea typeface="맑은 고딕" pitchFamily="34" charset="-122"/>
+                          <a:cs typeface="맑은 고딕" pitchFamily="34" charset="-120"/>
+                        </a:rPr>
+                        <a:t>1</a:t>
+                      </a:r>
+                      <a:endParaRPr lang="en-US" sz="2600" dirty="0">
+                        <a:latin typeface="맑은 고딕" charset="0"/>
+                        <a:ea typeface="맑은 고딕" charset="0"/>
+                        <a:cs typeface="맑은 고딕" charset="0"/>
+                      </a:endParaRPr>
+                    </a:p>
+                  </a:txBody>
+                  <a:tcPr marL="38100" marR="38100" marT="38100" marB="38100" anchor="ctr">
+                    <a:lnL w="12700" cap="flat" cmpd="sng" algn="ctr">
+                      <a:solidFill>
+                        <a:srgbClr val="94A3B8"/>
+                      </a:solidFill>
+                      <a:prstDash val="solid"/>
+                      <a:round/>
+                      <a:headEnd type="none" w="med" len="med"/>
+                      <a:tailEnd type="none" w="med" len="med"/>
+                    </a:lnL>
+                    <a:lnR w="12700" cap="flat" cmpd="sng" algn="ctr">
+                      <a:solidFill>
+                        <a:srgbClr val="94A3B8"/>
+                      </a:solidFill>
+                      <a:prstDash val="solid"/>
+                      <a:round/>
+                      <a:headEnd type="none" w="med" len="med"/>
+                      <a:tailEnd type="none" w="med" len="med"/>
+                    </a:lnR>
+                    <a:lnT w="12700" cap="flat" cmpd="sng" algn="ctr">
+                      <a:solidFill>
+                        <a:srgbClr val="94A3B8"/>
+                      </a:solidFill>
+                      <a:prstDash val="solid"/>
+                      <a:round/>
+                      <a:headEnd type="none" w="med" len="med"/>
+                      <a:tailEnd type="none" w="med" len="med"/>
+                    </a:lnT>
+                    <a:lnB w="12700" cap="flat" cmpd="sng" algn="ctr">
+                      <a:solidFill>
+                        <a:srgbClr val="94A3B8"/>
+                      </a:solidFill>
+                      <a:prstDash val="solid"/>
+                      <a:round/>
+                      <a:headEnd type="none" w="med" len="med"/>
+                      <a:tailEnd type="none" w="med" len="med"/>
+                    </a:lnB>
+                    <a:solidFill>
+                      <a:srgbClr val="FFFFFF"/>
+                    </a:solidFill>
+                  </a:tcPr>
+                </a:tc>
+                <a:tc>
+                  <a:txBody>
+                    <a:bodyPr/>
+                    <a:lstStyle/>
+                    <a:p>
+                      <a:pPr eaLnBrk="0" algn="ctr" indent="0" marL="0">
+                        <a:buNone/>
+                      </a:pPr>
+                      <a:r>
+                        <a:rPr lang="en-US" sz="2600" dirty="0">
+                          <a:solidFill>
+                            <a:srgbClr val="1F2937"/>
+                          </a:solidFill>
+                          <a:latin typeface="맑은 고딕" pitchFamily="34" charset="0"/>
+                          <a:ea typeface="맑은 고딕" pitchFamily="34" charset="-122"/>
+                          <a:cs typeface="맑은 고딕" pitchFamily="34" charset="-120"/>
+                        </a:rPr>
+                        <a:t>5</a:t>
+                      </a:r>
+                      <a:endParaRPr lang="en-US" sz="2600" dirty="0">
+                        <a:latin typeface="맑은 고딕" charset="0"/>
+                        <a:ea typeface="맑은 고딕" charset="0"/>
+                        <a:cs typeface="맑은 고딕" charset="0"/>
+                      </a:endParaRPr>
+                    </a:p>
+                  </a:txBody>
+                  <a:tcPr marL="38100" marR="38100" marT="38100" marB="38100" anchor="ctr">
+                    <a:lnL w="12700" cap="flat" cmpd="sng" algn="ctr">
+                      <a:solidFill>
+                        <a:srgbClr val="94A3B8"/>
+                      </a:solidFill>
+                      <a:prstDash val="solid"/>
+                      <a:round/>
+                      <a:headEnd type="none" w="med" len="med"/>
+                      <a:tailEnd type="none" w="med" len="med"/>
+                    </a:lnL>
+                    <a:lnR w="12700" cap="flat" cmpd="sng" algn="ctr">
+                      <a:solidFill>
+                        <a:srgbClr val="94A3B8"/>
+                      </a:solidFill>
+                      <a:prstDash val="solid"/>
+                      <a:round/>
+                      <a:headEnd type="none" w="med" len="med"/>
+                      <a:tailEnd type="none" w="med" len="med"/>
+                    </a:lnR>
+                    <a:lnT w="12700" cap="flat" cmpd="sng" algn="ctr">
+                      <a:solidFill>
+                        <a:srgbClr val="94A3B8"/>
+                      </a:solidFill>
+                      <a:prstDash val="solid"/>
+                      <a:round/>
+                      <a:headEnd type="none" w="med" len="med"/>
+                      <a:tailEnd type="none" w="med" len="med"/>
+                    </a:lnT>
+                    <a:lnB w="12700" cap="flat" cmpd="sng" algn="ctr">
+                      <a:solidFill>
+                        <a:srgbClr val="94A3B8"/>
+                      </a:solidFill>
+                      <a:prstDash val="solid"/>
+                      <a:round/>
+                      <a:headEnd type="none" w="med" len="med"/>
+                      <a:tailEnd type="none" w="med" len="med"/>
+                    </a:lnB>
+                    <a:solidFill>
+                      <a:srgbClr val="FFFFFF"/>
+                    </a:solidFill>
+                  </a:tcPr>
+                </a:tc>
+                <a:tc>
+                  <a:txBody>
+                    <a:bodyPr/>
+                    <a:lstStyle/>
+                    <a:p>
+                      <a:pPr eaLnBrk="0" algn="ctr" indent="0" marL="0">
+                        <a:buNone/>
+                      </a:pPr>
+                      <a:r>
+                        <a:rPr lang="en-US" sz="2600" dirty="0">
+                          <a:solidFill>
+                            <a:srgbClr val="1F2937"/>
+                          </a:solidFill>
+                          <a:latin typeface="맑은 고딕" pitchFamily="34" charset="0"/>
+                          <a:ea typeface="맑은 고딕" pitchFamily="34" charset="-122"/>
+                          <a:cs typeface="맑은 고딕" pitchFamily="34" charset="-120"/>
+                        </a:rPr>
+                        <a:t>6</a:t>
+                      </a:r>
+                      <a:endParaRPr lang="en-US" sz="2600" dirty="0">
+                        <a:latin typeface="맑은 고딕" charset="0"/>
+                        <a:ea typeface="맑은 고딕" charset="0"/>
+                        <a:cs typeface="맑은 고딕" charset="0"/>
+                      </a:endParaRPr>
+                    </a:p>
+                  </a:txBody>
+                  <a:tcPr marL="38100" marR="38100" marT="38100" marB="38100" anchor="ctr">
+                    <a:lnL w="12700" cap="flat" cmpd="sng" algn="ctr">
+                      <a:solidFill>
+                        <a:srgbClr val="94A3B8"/>
+                      </a:solidFill>
+                      <a:prstDash val="solid"/>
+                      <a:round/>
+                      <a:headEnd type="none" w="med" len="med"/>
+                      <a:tailEnd type="none" w="med" len="med"/>
+                    </a:lnL>
+                    <a:lnR w="12700" cap="flat" cmpd="sng" algn="ctr">
+                      <a:solidFill>
+                        <a:srgbClr val="94A3B8"/>
+                      </a:solidFill>
+                      <a:prstDash val="solid"/>
+                      <a:round/>
+                      <a:headEnd type="none" w="med" len="med"/>
+                      <a:tailEnd type="none" w="med" len="med"/>
+                    </a:lnR>
+                    <a:lnT w="12700" cap="flat" cmpd="sng" algn="ctr">
+                      <a:solidFill>
+                        <a:srgbClr val="94A3B8"/>
+                      </a:solidFill>
+                      <a:prstDash val="solid"/>
+                      <a:round/>
+                      <a:headEnd type="none" w="med" len="med"/>
+                      <a:tailEnd type="none" w="med" len="med"/>
+                    </a:lnT>
+                    <a:lnB w="12700" cap="flat" cmpd="sng" algn="ctr">
+                      <a:solidFill>
+                        <a:srgbClr val="94A3B8"/>
+                      </a:solidFill>
+                      <a:prstDash val="solid"/>
+                      <a:round/>
+                      <a:headEnd type="none" w="med" len="med"/>
+                      <a:tailEnd type="none" w="med" len="med"/>
+                    </a:lnB>
+                    <a:solidFill>
+                      <a:srgbClr val="FFFFFF"/>
+                    </a:solidFill>
+                  </a:tcPr>
+                </a:tc>
+              </a:tr>
+              <a:tr h="511810">
+                <a:tc>
+                  <a:txBody>
+                    <a:bodyPr/>
+                    <a:lstStyle/>
+                    <a:p>
+                      <a:pPr eaLnBrk="0" algn="ctr" indent="0" marL="0">
+                        <a:buNone/>
+                      </a:pPr>
+                      <a:endParaRPr lang="en-US" sz="2600" dirty="0">
+                        <a:latin typeface="맑은 고딕" charset="0"/>
+                        <a:ea typeface="맑은 고딕" charset="0"/>
+                        <a:cs typeface="맑은 고딕" charset="0"/>
+                      </a:endParaRPr>
+                    </a:p>
+                  </a:txBody>
+                  <a:tcPr marL="38100" marR="38100" marT="38100" marB="38100" anchor="ctr">
+                    <a:lnL w="12700" cap="flat" cmpd="sng" algn="ctr">
+                      <a:solidFill>
+                        <a:srgbClr val="94A3B8"/>
+                      </a:solidFill>
+                      <a:prstDash val="solid"/>
+                      <a:round/>
+                      <a:headEnd type="none" w="med" len="med"/>
+                      <a:tailEnd type="none" w="med" len="med"/>
+                    </a:lnL>
+                    <a:lnR w="12700" cap="flat" cmpd="sng" algn="ctr">
+                      <a:solidFill>
+                        <a:srgbClr val="94A3B8"/>
+                      </a:solidFill>
+                      <a:prstDash val="solid"/>
+                      <a:round/>
+                      <a:headEnd type="none" w="med" len="med"/>
+                      <a:tailEnd type="none" w="med" len="med"/>
+                    </a:lnR>
+                    <a:lnT w="12700" cap="flat" cmpd="sng" algn="ctr">
+                      <a:solidFill>
+                        <a:srgbClr val="94A3B8"/>
+                      </a:solidFill>
+                      <a:prstDash val="solid"/>
+                      <a:round/>
+                      <a:headEnd type="none" w="med" len="med"/>
+                      <a:tailEnd type="none" w="med" len="med"/>
+                    </a:lnT>
+                    <a:lnB w="12700" cap="flat" cmpd="sng" algn="ctr">
+                      <a:solidFill>
+                        <a:srgbClr val="94A3B8"/>
+                      </a:solidFill>
+                      <a:prstDash val="solid"/>
+                      <a:round/>
+                      <a:headEnd type="none" w="med" len="med"/>
+                      <a:tailEnd type="none" w="med" len="med"/>
+                    </a:lnB>
+                    <a:solidFill>
+                      <a:srgbClr val="FFFFFF"/>
+                    </a:solidFill>
+                  </a:tcPr>
+                </a:tc>
+                <a:tc>
+                  <a:txBody>
+                    <a:bodyPr/>
+                    <a:lstStyle/>
+                    <a:p>
+                      <a:pPr eaLnBrk="0" algn="ctr" indent="0" marL="0">
+                        <a:buNone/>
+                      </a:pPr>
+                      <a:r>
+                        <a:rPr lang="en-US" sz="2600" dirty="0">
+                          <a:solidFill>
+                            <a:srgbClr val="1F2937"/>
+                          </a:solidFill>
+                          <a:latin typeface="맑은 고딕" pitchFamily="34" charset="0"/>
+                          <a:ea typeface="맑은 고딕" pitchFamily="34" charset="-122"/>
+                          <a:cs typeface="맑은 고딕" pitchFamily="34" charset="-120"/>
+                        </a:rPr>
+                        <a:t>2</a:t>
+                      </a:r>
+                      <a:endParaRPr lang="en-US" sz="2600" dirty="0">
+                        <a:latin typeface="맑은 고딕" charset="0"/>
+                        <a:ea typeface="맑은 고딕" charset="0"/>
+                        <a:cs typeface="맑은 고딕" charset="0"/>
+                      </a:endParaRPr>
+                    </a:p>
+                  </a:txBody>
+                  <a:tcPr marL="38100" marR="38100" marT="38100" marB="38100" anchor="ctr">
+                    <a:lnL w="12700" cap="flat" cmpd="sng" algn="ctr">
+                      <a:solidFill>
+                        <a:srgbClr val="94A3B8"/>
+                      </a:solidFill>
+                      <a:prstDash val="solid"/>
+                      <a:round/>
+                      <a:headEnd type="none" w="med" len="med"/>
+                      <a:tailEnd type="none" w="med" len="med"/>
+                    </a:lnL>
+                    <a:lnR w="12700" cap="flat" cmpd="sng" algn="ctr">
+                      <a:solidFill>
+                        <a:srgbClr val="94A3B8"/>
+                      </a:solidFill>
+                      <a:prstDash val="solid"/>
+                      <a:round/>
+                      <a:headEnd type="none" w="med" len="med"/>
+                      <a:tailEnd type="none" w="med" len="med"/>
+                    </a:lnR>
+                    <a:lnT w="12700" cap="flat" cmpd="sng" algn="ctr">
+                      <a:solidFill>
+                        <a:srgbClr val="94A3B8"/>
+                      </a:solidFill>
+                      <a:prstDash val="solid"/>
+                      <a:round/>
+                      <a:headEnd type="none" w="med" len="med"/>
+                      <a:tailEnd type="none" w="med" len="med"/>
+                    </a:lnT>
+                    <a:lnB w="12700" cap="flat" cmpd="sng" algn="ctr">
+                      <a:solidFill>
+                        <a:srgbClr val="94A3B8"/>
+                      </a:solidFill>
+                      <a:prstDash val="solid"/>
+                      <a:round/>
+                      <a:headEnd type="none" w="med" len="med"/>
+                      <a:tailEnd type="none" w="med" len="med"/>
+                    </a:lnB>
+                    <a:solidFill>
+                      <a:srgbClr val="FFFFFF"/>
+                    </a:solidFill>
+                  </a:tcPr>
+                </a:tc>
+                <a:tc>
+                  <a:txBody>
+                    <a:bodyPr/>
+                    <a:lstStyle/>
+                    <a:p>
+                      <a:pPr eaLnBrk="0" algn="ctr" indent="0" marL="0">
+                        <a:buNone/>
+                      </a:pPr>
+                      <a:r>
+                        <a:rPr lang="en-US" sz="2600" dirty="0">
+                          <a:solidFill>
+                            <a:srgbClr val="1F2937"/>
+                          </a:solidFill>
+                          <a:latin typeface="맑은 고딕" pitchFamily="34" charset="0"/>
+                          <a:ea typeface="맑은 고딕" pitchFamily="34" charset="-122"/>
+                          <a:cs typeface="맑은 고딕" pitchFamily="34" charset="-120"/>
+                        </a:rPr>
+                        <a:t>6</a:t>
+                      </a:r>
+                      <a:endParaRPr lang="en-US" sz="2600" dirty="0">
+                        <a:latin typeface="맑은 고딕" charset="0"/>
+                        <a:ea typeface="맑은 고딕" charset="0"/>
+                        <a:cs typeface="맑은 고딕" charset="0"/>
+                      </a:endParaRPr>
+                    </a:p>
+                  </a:txBody>
+                  <a:tcPr marL="38100" marR="38100" marT="38100" marB="38100" anchor="ctr">
+                    <a:lnL w="12700" cap="flat" cmpd="sng" algn="ctr">
+                      <a:solidFill>
+                        <a:srgbClr val="94A3B8"/>
+                      </a:solidFill>
+                      <a:prstDash val="solid"/>
+                      <a:round/>
+                      <a:headEnd type="none" w="med" len="med"/>
+                      <a:tailEnd type="none" w="med" len="med"/>
+                    </a:lnL>
+                    <a:lnR w="12700" cap="flat" cmpd="sng" algn="ctr">
+                      <a:solidFill>
+                        <a:srgbClr val="94A3B8"/>
+                      </a:solidFill>
+                      <a:prstDash val="solid"/>
+                      <a:round/>
+                      <a:headEnd type="none" w="med" len="med"/>
+                      <a:tailEnd type="none" w="med" len="med"/>
+                    </a:lnR>
+                    <a:lnT w="12700" cap="flat" cmpd="sng" algn="ctr">
+                      <a:solidFill>
+                        <a:srgbClr val="94A3B8"/>
+                      </a:solidFill>
+                      <a:prstDash val="solid"/>
+                      <a:round/>
+                      <a:headEnd type="none" w="med" len="med"/>
+                      <a:tailEnd type="none" w="med" len="med"/>
+                    </a:lnT>
+                    <a:lnB w="12700" cap="flat" cmpd="sng" algn="ctr">
+                      <a:solidFill>
+                        <a:srgbClr val="94A3B8"/>
+                      </a:solidFill>
+                      <a:prstDash val="solid"/>
+                      <a:round/>
+                      <a:headEnd type="none" w="med" len="med"/>
+                      <a:tailEnd type="none" w="med" len="med"/>
+                    </a:lnB>
+                    <a:solidFill>
+                      <a:srgbClr val="FFFFFF"/>
+                    </a:solidFill>
+                  </a:tcPr>
+                </a:tc>
+                <a:tc>
+                  <a:txBody>
+                    <a:bodyPr/>
+                    <a:lstStyle/>
+                    <a:p>
+                      <a:pPr eaLnBrk="0" algn="ctr" indent="0" marL="0">
+                        <a:buNone/>
+                      </a:pPr>
+                      <a:r>
+                        <a:rPr lang="en-US" sz="2600" dirty="0">
+                          <a:solidFill>
+                            <a:srgbClr val="1F2937"/>
+                          </a:solidFill>
+                          <a:latin typeface="맑은 고딕" pitchFamily="34" charset="0"/>
+                          <a:ea typeface="맑은 고딕" pitchFamily="34" charset="-122"/>
+                          <a:cs typeface="맑은 고딕" pitchFamily="34" charset="-120"/>
+                        </a:rPr>
+                        <a:t>7</a:t>
+                      </a:r>
+                      <a:endParaRPr lang="en-US" sz="2600" dirty="0">
+                        <a:latin typeface="맑은 고딕" charset="0"/>
+                        <a:ea typeface="맑은 고딕" charset="0"/>
+                        <a:cs typeface="맑은 고딕" charset="0"/>
+                      </a:endParaRPr>
+                    </a:p>
+                  </a:txBody>
+                  <a:tcPr marL="38100" marR="38100" marT="38100" marB="38100" anchor="ctr">
+                    <a:lnL w="12700" cap="flat" cmpd="sng" algn="ctr">
+                      <a:solidFill>
+                        <a:srgbClr val="94A3B8"/>
+                      </a:solidFill>
+                      <a:prstDash val="solid"/>
+                      <a:round/>
+                      <a:headEnd type="none" w="med" len="med"/>
+                      <a:tailEnd type="none" w="med" len="med"/>
+                    </a:lnL>
+                    <a:lnR w="12700" cap="flat" cmpd="sng" algn="ctr">
+                      <a:solidFill>
+                        <a:srgbClr val="94A3B8"/>
+                      </a:solidFill>
+                      <a:prstDash val="solid"/>
+                      <a:round/>
+                      <a:headEnd type="none" w="med" len="med"/>
+                      <a:tailEnd type="none" w="med" len="med"/>
+                    </a:lnR>
+                    <a:lnT w="12700" cap="flat" cmpd="sng" algn="ctr">
+                      <a:solidFill>
+                        <a:srgbClr val="94A3B8"/>
+                      </a:solidFill>
+                      <a:prstDash val="solid"/>
+                      <a:round/>
+                      <a:headEnd type="none" w="med" len="med"/>
+                      <a:tailEnd type="none" w="med" len="med"/>
+                    </a:lnT>
+                    <a:lnB w="12700" cap="flat" cmpd="sng" algn="ctr">
+                      <a:solidFill>
+                        <a:srgbClr val="94A3B8"/>
+                      </a:solidFill>
+                      <a:prstDash val="solid"/>
+                      <a:round/>
+                      <a:headEnd type="none" w="med" len="med"/>
+                      <a:tailEnd type="none" w="med" len="med"/>
+                    </a:lnB>
+                    <a:solidFill>
+                      <a:srgbClr val="FFFFFF"/>
+                    </a:solidFill>
+                  </a:tcPr>
+                </a:tc>
+              </a:tr>
+            </a:tbl>
+          </a:graphicData>
+        </a:graphic>
+      </p:graphicFrame>
+      <p:sp>
+        <p:nvSpPr>
+          <p:cNvPr id="7" name="S06-stepno42"/>
+          <p:cNvSpPr txBox="1"/>
+          <p:nvPr/>
+        </p:nvSpPr>
+        <p:spPr>
+          <a:xfrm>
+            <a:off x="548640" y="2243328"/>
+            <a:ext cx="548640" cy="548640"/>
+          </a:xfrm>
+          <a:prstGeom prst="ellipse">
+            <a:avLst/>
+          </a:prstGeom>
+          <a:solidFill>
+            <a:srgbClr val="264653"/>
+          </a:solidFill>
+          <a:ln>
+            <a:solidFill>
+              <a:srgbClr val="264653"/>
+            </a:solidFill>
+          </a:ln>
+        </p:spPr>
+        <p:txBody>
+          <a:bodyPr wrap="square" lIns="0" tIns="0" rIns="0" bIns="0" rtlCol="0" anchor="ctr"/>
+          <a:lstStyle/>
+          <a:p>
+            <a:pPr eaLnBrk="0" algn="ctr" indent="0" marL="0">
+              <a:buNone/>
+            </a:pPr>
+            <a:r>
+              <a:rPr lang="ko-KR" altLang="en-US" sz="2400" b="1" dirty="0">
+                <a:solidFill>
+                  <a:srgbClr val="FFFFFF"/>
+                </a:solidFill>
+                <a:latin typeface="맑은 고딕" pitchFamily="34" charset="0"/>
+                <a:ea typeface="맑은 고딕" pitchFamily="34" charset="-122"/>
+                <a:cs typeface="맑은 고딕" pitchFamily="34" charset="-120"/>
+              </a:rPr>
+              <a:t>1</a:t>
+            </a:r>
+            <a:endParaRPr lang="ko-KR" sz="2400" dirty="0"/>
+          </a:p>
+        </p:txBody>
+      </p:sp>
+      <p:sp>
+        <p:nvSpPr>
+          <p:cNvPr id="8" name="S06-text43"/>
+          <p:cNvSpPr txBox="1"/>
+          <p:nvPr/>
+        </p:nvSpPr>
+        <p:spPr>
+          <a:xfrm>
+            <a:off x="1325880" y="2197608"/>
+            <a:ext cx="5658307" cy="929640"/>
+          </a:xfrm>
+          <a:prstGeom prst="rect">
+            <a:avLst/>
+          </a:prstGeom>
+          <a:noFill/>
+          <a:ln/>
+        </p:spPr>
+        <p:txBody>
+          <a:bodyPr wrap="square" lIns="0" tIns="0" rIns="0" bIns="0" rtlCol="0" anchor="t"/>
+          <a:lstStyle/>
+          <a:p>
+            <a:pPr eaLnBrk="0" algn="l" indent="0" marL="0">
+              <a:buNone/>
+            </a:pPr>
+            <a:r>
+              <a:rPr lang="ko-KR" altLang="en-US" sz="3000" dirty="0">
+                <a:solidFill>
+                  <a:srgbClr val="1F2937"/>
+                </a:solidFill>
+                <a:latin typeface="맑은 고딕" pitchFamily="34" charset="0"/>
+                <a:ea typeface="맑은 고딕" pitchFamily="34" charset="-122"/>
+                <a:cs typeface="맑은 고딕" pitchFamily="34" charset="-120"/>
+              </a:rPr>
+              <a:t>일: 십에서 받아내려</a:t>
+            </a:r>
+            <a:endParaRPr lang="ko-KR" sz="3000" dirty="0"/>
+          </a:p>
+          <a:p>
+            <a:pPr eaLnBrk="0" algn="l" indent="0" marL="0">
+              <a:buNone/>
+            </a:pPr>
+            <a:r>
+              <a:rPr lang="ko-KR" altLang="en-US" sz="3000" dirty="0">
+                <a:solidFill>
+                  <a:srgbClr val="1F2937"/>
+                </a:solidFill>
+                <a:latin typeface="맑은 고딕" pitchFamily="34" charset="0"/>
+                <a:ea typeface="맑은 고딕" pitchFamily="34" charset="-122"/>
+                <a:cs typeface="맑은 고딕" pitchFamily="34" charset="-120"/>
+              </a:rPr>
+              <a:t>13 − 6 = 7</a:t>
+            </a:r>
+            <a:endParaRPr lang="ko-KR" sz="3000" dirty="0"/>
+          </a:p>
+        </p:txBody>
+      </p:sp>
+      <p:sp>
+        <p:nvSpPr>
+          <p:cNvPr id="9" name="S06-stepno44"/>
+          <p:cNvSpPr txBox="1"/>
+          <p:nvPr/>
+        </p:nvSpPr>
+        <p:spPr>
+          <a:xfrm>
+            <a:off x="548640" y="3337560"/>
+            <a:ext cx="548640" cy="548640"/>
+          </a:xfrm>
+          <a:prstGeom prst="ellipse">
+            <a:avLst/>
+          </a:prstGeom>
+          <a:solidFill>
+            <a:srgbClr val="264653"/>
+          </a:solidFill>
+          <a:ln>
+            <a:solidFill>
+              <a:srgbClr val="264653"/>
+            </a:solidFill>
+          </a:ln>
+        </p:spPr>
+        <p:txBody>
+          <a:bodyPr wrap="square" lIns="0" tIns="0" rIns="0" bIns="0" rtlCol="0" anchor="ctr"/>
+          <a:lstStyle/>
+          <a:p>
+            <a:pPr eaLnBrk="0" algn="ctr" indent="0" marL="0">
+              <a:buNone/>
+            </a:pPr>
+            <a:r>
+              <a:rPr lang="ko-KR" altLang="en-US" sz="2400" b="1" dirty="0">
+                <a:solidFill>
+                  <a:srgbClr val="FFFFFF"/>
+                </a:solidFill>
+                <a:latin typeface="맑은 고딕" pitchFamily="34" charset="0"/>
+                <a:ea typeface="맑은 고딕" pitchFamily="34" charset="-122"/>
+                <a:cs typeface="맑은 고딕" pitchFamily="34" charset="-120"/>
+              </a:rPr>
+              <a:t>2</a:t>
+            </a:r>
+            <a:endParaRPr lang="ko-KR" sz="2400" dirty="0"/>
+          </a:p>
+        </p:txBody>
+      </p:sp>
+      <p:sp>
+        <p:nvSpPr>
+          <p:cNvPr id="10" name="S06-text45"/>
+          <p:cNvSpPr txBox="1"/>
+          <p:nvPr/>
+        </p:nvSpPr>
+        <p:spPr>
+          <a:xfrm>
+            <a:off x="1325880" y="3291840"/>
+            <a:ext cx="5658307" cy="929640"/>
+          </a:xfrm>
+          <a:prstGeom prst="rect">
+            <a:avLst/>
+          </a:prstGeom>
+          <a:noFill/>
+          <a:ln/>
+        </p:spPr>
+        <p:txBody>
+          <a:bodyPr wrap="square" lIns="0" tIns="0" rIns="0" bIns="0" rtlCol="0" anchor="t"/>
+          <a:lstStyle/>
+          <a:p>
+            <a:pPr eaLnBrk="0" algn="l" indent="0" marL="0">
+              <a:buNone/>
+            </a:pPr>
+            <a:r>
+              <a:rPr lang="ko-KR" altLang="en-US" sz="3000" dirty="0">
+                <a:solidFill>
+                  <a:srgbClr val="1F2937"/>
+                </a:solidFill>
+                <a:latin typeface="맑은 고딕" pitchFamily="34" charset="0"/>
+                <a:ea typeface="맑은 고딕" pitchFamily="34" charset="-122"/>
+                <a:cs typeface="맑은 고딕" pitchFamily="34" charset="-120"/>
+              </a:rPr>
+              <a:t>십: 1에서 5를 뺄 수 없어요.</a:t>
+            </a:r>
+            <a:endParaRPr lang="ko-KR" sz="3000" dirty="0"/>
+          </a:p>
+          <a:p>
+            <a:pPr eaLnBrk="0" algn="l" indent="0" marL="0">
+              <a:buNone/>
+            </a:pPr>
+            <a:r>
+              <a:rPr lang="ko-KR" altLang="en-US" sz="3000" dirty="0">
+                <a:solidFill>
+                  <a:srgbClr val="1F2937"/>
+                </a:solidFill>
+                <a:latin typeface="맑은 고딕" pitchFamily="34" charset="0"/>
+                <a:ea typeface="맑은 고딕" pitchFamily="34" charset="-122"/>
+                <a:cs typeface="맑은 고딕" pitchFamily="34" charset="-120"/>
+              </a:rPr>
+              <a:t>백에서 받아내려 11 − 5 = 6</a:t>
+            </a:r>
+            <a:endParaRPr lang="ko-KR" sz="3000" dirty="0"/>
+          </a:p>
+        </p:txBody>
+      </p:sp>
+      <p:sp>
+        <p:nvSpPr>
+          <p:cNvPr id="11" name="S06-stepno46"/>
+          <p:cNvSpPr txBox="1"/>
+          <p:nvPr/>
+        </p:nvSpPr>
+        <p:spPr>
+          <a:xfrm>
+            <a:off x="548640" y="4386072"/>
+            <a:ext cx="548640" cy="548640"/>
+          </a:xfrm>
+          <a:prstGeom prst="ellipse">
+            <a:avLst/>
+          </a:prstGeom>
+          <a:solidFill>
+            <a:srgbClr val="264653"/>
+          </a:solidFill>
+          <a:ln>
+            <a:solidFill>
+              <a:srgbClr val="264653"/>
+            </a:solidFill>
+          </a:ln>
+        </p:spPr>
+        <p:txBody>
+          <a:bodyPr wrap="square" lIns="0" tIns="0" rIns="0" bIns="0" rtlCol="0" anchor="ctr"/>
+          <a:lstStyle/>
+          <a:p>
+            <a:pPr eaLnBrk="0" algn="ctr" indent="0" marL="0">
+              <a:buNone/>
+            </a:pPr>
+            <a:r>
+              <a:rPr lang="ko-KR" altLang="en-US" sz="2400" b="1" dirty="0">
+                <a:solidFill>
+                  <a:srgbClr val="FFFFFF"/>
+                </a:solidFill>
+                <a:latin typeface="맑은 고딕" pitchFamily="34" charset="0"/>
+                <a:ea typeface="맑은 고딕" pitchFamily="34" charset="-122"/>
+                <a:cs typeface="맑은 고딕" pitchFamily="34" charset="-120"/>
+              </a:rPr>
+              <a:t>3</a:t>
+            </a:r>
+            <a:endParaRPr lang="ko-KR" sz="2400" dirty="0"/>
+          </a:p>
+        </p:txBody>
+      </p:sp>
+      <p:sp>
+        <p:nvSpPr>
+          <p:cNvPr id="12" name="S06-text47"/>
+          <p:cNvSpPr txBox="1"/>
+          <p:nvPr/>
+        </p:nvSpPr>
+        <p:spPr>
+          <a:xfrm>
+            <a:off x="1325880" y="4386072"/>
+            <a:ext cx="5658307" cy="548640"/>
+          </a:xfrm>
+          <a:prstGeom prst="rect">
+            <a:avLst/>
+          </a:prstGeom>
+          <a:noFill/>
+          <a:ln/>
+        </p:spPr>
+        <p:txBody>
+          <a:bodyPr wrap="square" lIns="0" tIns="0" rIns="0" bIns="0" rtlCol="0" anchor="t"/>
+          <a:lstStyle/>
+          <a:p>
+            <a:pPr eaLnBrk="0" algn="l" indent="0" marL="0">
+              <a:buNone/>
+            </a:pPr>
+            <a:r>
+              <a:rPr lang="ko-KR" altLang="en-US" sz="3000" dirty="0">
+                <a:solidFill>
+                  <a:srgbClr val="1F2937"/>
+                </a:solidFill>
+                <a:latin typeface="맑은 고딕" pitchFamily="34" charset="0"/>
+                <a:ea typeface="맑은 고딕" pitchFamily="34" charset="-122"/>
+                <a:cs typeface="맑은 고딕" pitchFamily="34" charset="-120"/>
+              </a:rPr>
+              <a:t>백: 3 − 1 = 2</a:t>
+            </a:r>
+            <a:endParaRPr lang="ko-KR" sz="3000" dirty="0"/>
+          </a:p>
+        </p:txBody>
+      </p:sp>
+      <p:sp>
+        <p:nvSpPr>
+          <p:cNvPr id="25" name="Slide Number Placeholder 0"/>
+          <p:cNvSpPr>
+            <a:spLocks noGrp="1"/>
+          </p:cNvSpPr>
+          <p:nvPr>
+            <p:ph type="sldNum" sz="quarter" idx="4294967295"/>
+          </p:nvPr>
+        </p:nvSpPr>
+        <p:spPr>
+          <a:xfrm>
+            <a:off x="10881360" y="6382512"/>
+            <a:ext cx="731520" cy="320040"/>
+          </a:xfrm>
+          <a:prstGeom prst="rect">
+            <a:avLst/>
+          </a:prstGeom>
+          <a:extLst>
+            <a:ext uri="{C572A759-6A51-4108-AA02-DFA0A04FC94B}">
+              <ma14:wrappingTextBoxFlag xmlns:ma14="http://schemas.microsoft.com/office/mac/drawingml/2011/main" val="0"/>
+            </a:ext>
+          </a:extLst>
+        </p:spPr>
+        <p:txBody>
+          <a:bodyPr/>
+          <a:lstStyle>
+            <a:lvl1pPr>
+              <a:defRPr sz="1200">
+                <a:solidFill>
+                  <a:srgbClr val="4B5563"/>
+                </a:solidFill>
+                <a:latin typeface="맑은 고딕"/>
+                <a:ea typeface="맑은 고딕"/>
+                <a:cs typeface="맑은 고딕"/>
+              </a:defRPr>
+            </a:lvl1pPr>
+          </a:lstStyle>
+          <a:p>
+            <a:pPr eaLnBrk="0" algn="r"/>
+            <a:fld id="{F7021451-1387-4CA6-816F-3879F97B5CBC}" type="slidenum">
+              <a:rPr b="0" lang="en-US"/>
+              <a:t>6</a:t>
+            </a:fld>
+            <a:endParaRPr lang="en-US"/>
+          </a:p>
+        </p:txBody>
+      </p:sp>
+    </p:spTree>
+  </p:cSld>
+  <p:clrMapOvr>
+    <a:masterClrMapping/>
+  </p:clrMapOvr>
+</p:sld>
+</file>
+
+<file path=ppt/slides/slide7.xml><?xml version="1.0" encoding="utf-8"?>
+<p:sld xmlns:a="http://schemas.openxmlformats.org/drawingml/2006/main" xmlns:r="http://schemas.openxmlformats.org/officeDocument/2006/relationships" xmlns:p="http://schemas.openxmlformats.org/presentationml/2006/main">
+  <p:cSld name="Slide 7">
+    <p:spTree>
+      <p:nvGrpSpPr>
+        <p:cNvPr id="1" name=""/>
+        <p:cNvGrpSpPr/>
+        <p:nvPr/>
+      </p:nvGrpSpPr>
+      <p:grpSpPr>
+        <a:xfrm>
+          <a:off x="0" y="0"/>
+          <a:ext cx="0" cy="0"/>
+          <a:chOff x="0" y="0"/>
+          <a:chExt cx="0" cy="0"/>
+        </a:xfrm>
+      </p:grpSpPr>
+      <p:sp>
+        <p:nvSpPr>
+          <p:cNvPr id="2" name="Text 0"/>
+          <p:cNvSpPr/>
+          <p:nvPr>
+            <p:ph idx="100" type="title" hasCustomPrompt="1"/>
+          </p:nvPr>
+        </p:nvSpPr>
+        <p:spPr>
+          <a:xfrm>
+            <a:off x="548640" y="320040"/>
+            <a:ext cx="11064240" cy="868680"/>
+          </a:xfrm>
+          <a:prstGeom prst="rect">
+            <a:avLst/>
+          </a:prstGeom>
+          <a:noFill/>
+          <a:ln/>
+        </p:spPr>
+        <p:txBody>
+          <a:bodyPr wrap="square" lIns="0" tIns="0" rIns="0" bIns="0" rtlCol="0" anchor="ctr"/>
+          <a:lstStyle/>
+          <a:p>
+            <a:pPr eaLnBrk="0" algn="l" indent="0" marL="0">
+              <a:buNone/>
+            </a:pPr>
+            <a:r>
+              <a:rPr lang="ko-KR" altLang="en-US" sz="4000" b="1" dirty="0">
+                <a:solidFill>
+                  <a:srgbClr val="1F2937"/>
+                </a:solidFill>
+                <a:latin typeface="맑은 고딕" pitchFamily="34" charset="0"/>
+                <a:ea typeface="맑은 고딕" pitchFamily="34" charset="-122"/>
+                <a:cs typeface="맑은 고딕" pitchFamily="34" charset="-120"/>
+              </a:rPr>
+              <a:t>세로셈 해 보기</a:t>
+            </a:r>
+            <a:endParaRPr lang="ko-KR" sz="4000" dirty="0"/>
+          </a:p>
+        </p:txBody>
+      </p:sp>
+      <p:sp>
+        <p:nvSpPr>
+          <p:cNvPr id="3" name="S07-card48"/>
+          <p:cNvSpPr/>
+          <p:nvPr/>
+        </p:nvSpPr>
+        <p:spPr>
+          <a:xfrm>
+            <a:off x="548640" y="5349240"/>
+            <a:ext cx="11091672" cy="868680"/>
+          </a:xfrm>
+          <a:prstGeom prst="roundRect">
+            <a:avLst>
+              <a:gd name="adj" fmla="val 12632"/>
+            </a:avLst>
+          </a:prstGeom>
+          <a:solidFill>
+            <a:srgbClr val="E6ECF4"/>
+          </a:solidFill>
+          <a:ln w="12700">
+            <a:solidFill>
+              <a:srgbClr val="E6ECF4"/>
+            </a:solidFill>
+            <a:prstDash val="solid"/>
+          </a:ln>
+        </p:spPr>
+      </p:sp>
+      <p:sp>
+        <p:nvSpPr>
+          <p:cNvPr id="4" name="S07-cardtext49"/>
+          <p:cNvSpPr txBox="1"/>
+          <p:nvPr/>
+        </p:nvSpPr>
+        <p:spPr>
+          <a:xfrm>
+            <a:off x="822960" y="5486400"/>
+            <a:ext cx="10543032" cy="594360"/>
+          </a:xfrm>
+          <a:prstGeom prst="rect">
+            <a:avLst/>
+          </a:prstGeom>
+          <a:noFill/>
+          <a:ln/>
+        </p:spPr>
+        <p:txBody>
+          <a:bodyPr wrap="square" lIns="0" tIns="0" rIns="0" bIns="0" rtlCol="0" anchor="ctr"/>
+          <a:lstStyle/>
+          <a:p>
+            <a:pPr eaLnBrk="0" indent="0" marL="0">
+              <a:spcAft>
+                <a:spcPts val="600"/>
+              </a:spcAft>
+              <a:buNone/>
+            </a:pPr>
+            <a:r>
+              <a:rPr lang="ko-KR" altLang="en-US" sz="3000" dirty="0">
+                <a:solidFill>
+                  <a:srgbClr val="1F2937"/>
+                </a:solidFill>
+                <a:latin typeface="맑은 고딕" pitchFamily="34" charset="0"/>
+                <a:ea typeface="맑은 고딕" pitchFamily="34" charset="-122"/>
+                <a:cs typeface="맑은 고딕" pitchFamily="34" charset="-120"/>
+              </a:rPr>
+              <a:t>뺄 수 없으면 윗자리 숫자를 1 작게 고쳐요.</a:t>
+            </a:r>
+            <a:endParaRPr lang="ko-KR" sz="3000" dirty="0"/>
+          </a:p>
+        </p:txBody>
+      </p:sp>
+      <p:sp>
+        <p:nvSpPr>
+          <p:cNvPr id="5" name="S07-card50"/>
+          <p:cNvSpPr/>
+          <p:nvPr/>
+        </p:nvSpPr>
+        <p:spPr>
+          <a:xfrm>
+            <a:off x="6277356" y="1325880"/>
+            <a:ext cx="5362956" cy="3794760"/>
+          </a:xfrm>
+          <a:prstGeom prst="roundRect">
+            <a:avLst>
+              <a:gd name="adj" fmla="val 2892"/>
+            </a:avLst>
+          </a:prstGeom>
+          <a:solidFill>
+            <a:srgbClr val="EAF3F1"/>
+          </a:solidFill>
+          <a:ln w="12700">
+            <a:solidFill>
+              <a:srgbClr val="EAF3F1"/>
+            </a:solidFill>
+            <a:prstDash val="solid"/>
+          </a:ln>
+        </p:spPr>
+      </p:sp>
+      <p:sp>
+        <p:nvSpPr>
+          <p:cNvPr id="6" name="S07-cardtext51"/>
+          <p:cNvSpPr txBox="1"/>
+          <p:nvPr/>
+        </p:nvSpPr>
+        <p:spPr>
+          <a:xfrm>
+            <a:off x="6551676" y="1463040"/>
+            <a:ext cx="4814316" cy="3520440"/>
+          </a:xfrm>
+          <a:prstGeom prst="rect">
+            <a:avLst/>
+          </a:prstGeom>
+          <a:noFill/>
+          <a:ln/>
+        </p:spPr>
+        <p:txBody>
+          <a:bodyPr wrap="square" lIns="0" tIns="0" rIns="0" bIns="0" rtlCol="0" anchor="t"/>
+          <a:lstStyle/>
+          <a:p>
+            <a:pPr eaLnBrk="0" indent="0" marL="0">
+              <a:spcAft>
+                <a:spcPts val="600"/>
+              </a:spcAft>
+              <a:buNone/>
+            </a:pPr>
+            <a:r>
+              <a:rPr lang="ko-KR" altLang="en-US" sz="3000" b="1" dirty="0">
+                <a:solidFill>
+                  <a:srgbClr val="1F2937"/>
+                </a:solidFill>
+                <a:latin typeface="맑은 고딕" pitchFamily="34" charset="0"/>
+                <a:ea typeface="맑은 고딕" pitchFamily="34" charset="-122"/>
+                <a:cs typeface="맑은 고딕" pitchFamily="34" charset="-120"/>
+              </a:rPr>
+              <a:t>③을 세로셈으로 해요</a:t>
+            </a:r>
+            <a:endParaRPr lang="ko-KR" sz="3000" dirty="0"/>
+          </a:p>
+        </p:txBody>
+      </p:sp>
+      <p:graphicFrame>
+        <p:nvGraphicFramePr>
+          <p:cNvPr id="8" name="S07-table52"/>
+          <p:cNvGraphicFramePr>
+            <a:graphicFrameLocks noGrp="1"/>
+          </p:cNvGraphicFramePr>
+          <p:nvPr>
+            <p:extLst>
+              <p:ext uri="{D42A27DB-BD31-4B8C-83A1-F6EECF244321}">
+                <p14:modId xmlns:p14="http://schemas.microsoft.com/office/powerpoint/2010/main" val="1579011935"/>
+              </p:ext>
+            </p:extLst>
+          </p:nvPr>
+        </p:nvGraphicFramePr>
+        <p:xfrm>
+          <a:off x="6947154" y="2057400"/>
+          <a:ext cx="4023360" cy="914400"/>
+        </p:xfrm>
+        <a:graphic>
+          <a:graphicData uri="http://schemas.openxmlformats.org/drawingml/2006/table">
+            <a:tbl>
+              <a:tblPr/>
+              <a:tblGrid>
+                <a:gridCol w="1005840"/>
+                <a:gridCol w="1005840"/>
+                <a:gridCol w="1005840"/>
+                <a:gridCol w="1005840"/>
+              </a:tblGrid>
+              <a:tr h="472440">
                 <a:tc>
                   <a:txBody>
                     <a:bodyPr/>
@@ -14582,7 +16719,7 @@
                   </a:tcPr>
                 </a:tc>
               </a:tr>
-              <a:tr h="487680">
+              <a:tr h="472440">
                 <a:tc>
                   <a:txBody>
                     <a:bodyPr/>
@@ -14591,6 +16728,578 @@
                       <a:pPr eaLnBrk="0" algn="ctr" indent="0" marL="0">
                         <a:buNone/>
                       </a:pPr>
+                      <a:endParaRPr lang="en-US" sz="2400" dirty="0">
+                        <a:latin typeface="맑은 고딕" charset="0"/>
+                        <a:ea typeface="맑은 고딕" charset="0"/>
+                        <a:cs typeface="맑은 고딕" charset="0"/>
+                      </a:endParaRPr>
+                    </a:p>
+                  </a:txBody>
+                  <a:tcPr marL="38100" marR="38100" marT="38100" marB="38100" anchor="ctr">
+                    <a:lnL w="12700" cap="flat" cmpd="sng" algn="ctr">
+                      <a:solidFill>
+                        <a:srgbClr val="94A3B8"/>
+                      </a:solidFill>
+                      <a:prstDash val="solid"/>
+                      <a:round/>
+                      <a:headEnd type="none" w="med" len="med"/>
+                      <a:tailEnd type="none" w="med" len="med"/>
+                    </a:lnL>
+                    <a:lnR w="12700" cap="flat" cmpd="sng" algn="ctr">
+                      <a:solidFill>
+                        <a:srgbClr val="94A3B8"/>
+                      </a:solidFill>
+                      <a:prstDash val="solid"/>
+                      <a:round/>
+                      <a:headEnd type="none" w="med" len="med"/>
+                      <a:tailEnd type="none" w="med" len="med"/>
+                    </a:lnR>
+                    <a:lnT w="12700" cap="flat" cmpd="sng" algn="ctr">
+                      <a:solidFill>
+                        <a:srgbClr val="94A3B8"/>
+                      </a:solidFill>
+                      <a:prstDash val="solid"/>
+                      <a:round/>
+                      <a:headEnd type="none" w="med" len="med"/>
+                      <a:tailEnd type="none" w="med" len="med"/>
+                    </a:lnT>
+                    <a:lnB w="12700" cap="flat" cmpd="sng" algn="ctr">
+                      <a:solidFill>
+                        <a:srgbClr val="94A3B8"/>
+                      </a:solidFill>
+                      <a:prstDash val="solid"/>
+                      <a:round/>
+                      <a:headEnd type="none" w="med" len="med"/>
+                      <a:tailEnd type="none" w="med" len="med"/>
+                    </a:lnB>
+                    <a:solidFill>
+                      <a:srgbClr val="FFFFFF"/>
+                    </a:solidFill>
+                  </a:tcPr>
+                </a:tc>
+                <a:tc>
+                  <a:txBody>
+                    <a:bodyPr/>
+                    <a:lstStyle/>
+                    <a:p>
+                      <a:pPr eaLnBrk="0" algn="ctr" indent="0" marL="0">
+                        <a:buNone/>
+                      </a:pPr>
+                      <a:r>
+                        <a:rPr lang="en-US" sz="2400" dirty="0">
+                          <a:solidFill>
+                            <a:srgbClr val="1F2937"/>
+                          </a:solidFill>
+                          <a:latin typeface="맑은 고딕" pitchFamily="34" charset="0"/>
+                          <a:ea typeface="맑은 고딕" pitchFamily="34" charset="-122"/>
+                          <a:cs typeface="맑은 고딕" pitchFamily="34" charset="-120"/>
+                        </a:rPr>
+                        <a:t>□</a:t>
+                      </a:r>
+                      <a:endParaRPr lang="en-US" sz="2400" dirty="0">
+                        <a:latin typeface="맑은 고딕" charset="0"/>
+                        <a:ea typeface="맑은 고딕" charset="0"/>
+                        <a:cs typeface="맑은 고딕" charset="0"/>
+                      </a:endParaRPr>
+                    </a:p>
+                  </a:txBody>
+                  <a:tcPr marL="38100" marR="38100" marT="38100" marB="38100" anchor="ctr">
+                    <a:lnL w="12700" cap="flat" cmpd="sng" algn="ctr">
+                      <a:solidFill>
+                        <a:srgbClr val="94A3B8"/>
+                      </a:solidFill>
+                      <a:prstDash val="solid"/>
+                      <a:round/>
+                      <a:headEnd type="none" w="med" len="med"/>
+                      <a:tailEnd type="none" w="med" len="med"/>
+                    </a:lnL>
+                    <a:lnR w="12700" cap="flat" cmpd="sng" algn="ctr">
+                      <a:solidFill>
+                        <a:srgbClr val="94A3B8"/>
+                      </a:solidFill>
+                      <a:prstDash val="solid"/>
+                      <a:round/>
+                      <a:headEnd type="none" w="med" len="med"/>
+                      <a:tailEnd type="none" w="med" len="med"/>
+                    </a:lnR>
+                    <a:lnT w="12700" cap="flat" cmpd="sng" algn="ctr">
+                      <a:solidFill>
+                        <a:srgbClr val="94A3B8"/>
+                      </a:solidFill>
+                      <a:prstDash val="solid"/>
+                      <a:round/>
+                      <a:headEnd type="none" w="med" len="med"/>
+                      <a:tailEnd type="none" w="med" len="med"/>
+                    </a:lnT>
+                    <a:lnB w="12700" cap="flat" cmpd="sng" algn="ctr">
+                      <a:solidFill>
+                        <a:srgbClr val="94A3B8"/>
+                      </a:solidFill>
+                      <a:prstDash val="solid"/>
+                      <a:round/>
+                      <a:headEnd type="none" w="med" len="med"/>
+                      <a:tailEnd type="none" w="med" len="med"/>
+                    </a:lnB>
+                    <a:solidFill>
+                      <a:srgbClr val="FFFFFF"/>
+                    </a:solidFill>
+                  </a:tcPr>
+                </a:tc>
+                <a:tc>
+                  <a:txBody>
+                    <a:bodyPr/>
+                    <a:lstStyle/>
+                    <a:p>
+                      <a:pPr eaLnBrk="0" algn="ctr" indent="0" marL="0">
+                        <a:buNone/>
+                      </a:pPr>
+                      <a:r>
+                        <a:rPr lang="en-US" sz="2400" dirty="0">
+                          <a:solidFill>
+                            <a:srgbClr val="1F2937"/>
+                          </a:solidFill>
+                          <a:latin typeface="맑은 고딕" pitchFamily="34" charset="0"/>
+                          <a:ea typeface="맑은 고딕" pitchFamily="34" charset="-122"/>
+                          <a:cs typeface="맑은 고딕" pitchFamily="34" charset="-120"/>
+                        </a:rPr>
+                        <a:t>□</a:t>
+                      </a:r>
+                      <a:endParaRPr lang="en-US" sz="2400" dirty="0">
+                        <a:latin typeface="맑은 고딕" charset="0"/>
+                        <a:ea typeface="맑은 고딕" charset="0"/>
+                        <a:cs typeface="맑은 고딕" charset="0"/>
+                      </a:endParaRPr>
+                    </a:p>
+                  </a:txBody>
+                  <a:tcPr marL="38100" marR="38100" marT="38100" marB="38100" anchor="ctr">
+                    <a:lnL w="12700" cap="flat" cmpd="sng" algn="ctr">
+                      <a:solidFill>
+                        <a:srgbClr val="94A3B8"/>
+                      </a:solidFill>
+                      <a:prstDash val="solid"/>
+                      <a:round/>
+                      <a:headEnd type="none" w="med" len="med"/>
+                      <a:tailEnd type="none" w="med" len="med"/>
+                    </a:lnL>
+                    <a:lnR w="12700" cap="flat" cmpd="sng" algn="ctr">
+                      <a:solidFill>
+                        <a:srgbClr val="94A3B8"/>
+                      </a:solidFill>
+                      <a:prstDash val="solid"/>
+                      <a:round/>
+                      <a:headEnd type="none" w="med" len="med"/>
+                      <a:tailEnd type="none" w="med" len="med"/>
+                    </a:lnR>
+                    <a:lnT w="12700" cap="flat" cmpd="sng" algn="ctr">
+                      <a:solidFill>
+                        <a:srgbClr val="94A3B8"/>
+                      </a:solidFill>
+                      <a:prstDash val="solid"/>
+                      <a:round/>
+                      <a:headEnd type="none" w="med" len="med"/>
+                      <a:tailEnd type="none" w="med" len="med"/>
+                    </a:lnT>
+                    <a:lnB w="12700" cap="flat" cmpd="sng" algn="ctr">
+                      <a:solidFill>
+                        <a:srgbClr val="94A3B8"/>
+                      </a:solidFill>
+                      <a:prstDash val="solid"/>
+                      <a:round/>
+                      <a:headEnd type="none" w="med" len="med"/>
+                      <a:tailEnd type="none" w="med" len="med"/>
+                    </a:lnB>
+                    <a:solidFill>
+                      <a:srgbClr val="FFFFFF"/>
+                    </a:solidFill>
+                  </a:tcPr>
+                </a:tc>
+                <a:tc>
+                  <a:txBody>
+                    <a:bodyPr/>
+                    <a:lstStyle/>
+                    <a:p>
+                      <a:pPr eaLnBrk="0" algn="ctr" indent="0" marL="0">
+                        <a:buNone/>
+                      </a:pPr>
+                      <a:endParaRPr lang="en-US" sz="2400" dirty="0">
+                        <a:latin typeface="맑은 고딕" charset="0"/>
+                        <a:ea typeface="맑은 고딕" charset="0"/>
+                        <a:cs typeface="맑은 고딕" charset="0"/>
+                      </a:endParaRPr>
+                    </a:p>
+                  </a:txBody>
+                  <a:tcPr marL="38100" marR="38100" marT="38100" marB="38100" anchor="ctr">
+                    <a:lnL w="12700" cap="flat" cmpd="sng" algn="ctr">
+                      <a:solidFill>
+                        <a:srgbClr val="94A3B8"/>
+                      </a:solidFill>
+                      <a:prstDash val="solid"/>
+                      <a:round/>
+                      <a:headEnd type="none" w="med" len="med"/>
+                      <a:tailEnd type="none" w="med" len="med"/>
+                    </a:lnL>
+                    <a:lnR w="12700" cap="flat" cmpd="sng" algn="ctr">
+                      <a:solidFill>
+                        <a:srgbClr val="94A3B8"/>
+                      </a:solidFill>
+                      <a:prstDash val="solid"/>
+                      <a:round/>
+                      <a:headEnd type="none" w="med" len="med"/>
+                      <a:tailEnd type="none" w="med" len="med"/>
+                    </a:lnR>
+                    <a:lnT w="12700" cap="flat" cmpd="sng" algn="ctr">
+                      <a:solidFill>
+                        <a:srgbClr val="94A3B8"/>
+                      </a:solidFill>
+                      <a:prstDash val="solid"/>
+                      <a:round/>
+                      <a:headEnd type="none" w="med" len="med"/>
+                      <a:tailEnd type="none" w="med" len="med"/>
+                    </a:lnT>
+                    <a:lnB w="12700" cap="flat" cmpd="sng" algn="ctr">
+                      <a:solidFill>
+                        <a:srgbClr val="94A3B8"/>
+                      </a:solidFill>
+                      <a:prstDash val="solid"/>
+                      <a:round/>
+                      <a:headEnd type="none" w="med" len="med"/>
+                      <a:tailEnd type="none" w="med" len="med"/>
+                    </a:lnB>
+                    <a:solidFill>
+                      <a:srgbClr val="FFFFFF"/>
+                    </a:solidFill>
+                  </a:tcPr>
+                </a:tc>
+              </a:tr>
+              <a:tr h="472440">
+                <a:tc>
+                  <a:txBody>
+                    <a:bodyPr/>
+                    <a:lstStyle/>
+                    <a:p>
+                      <a:pPr eaLnBrk="0" algn="ctr" indent="0" marL="0">
+                        <a:buNone/>
+                      </a:pPr>
+                      <a:endParaRPr lang="en-US" sz="2400" dirty="0">
+                        <a:latin typeface="맑은 고딕" charset="0"/>
+                        <a:ea typeface="맑은 고딕" charset="0"/>
+                        <a:cs typeface="맑은 고딕" charset="0"/>
+                      </a:endParaRPr>
+                    </a:p>
+                  </a:txBody>
+                  <a:tcPr marL="38100" marR="38100" marT="38100" marB="38100" anchor="ctr">
+                    <a:lnL w="12700" cap="flat" cmpd="sng" algn="ctr">
+                      <a:solidFill>
+                        <a:srgbClr val="94A3B8"/>
+                      </a:solidFill>
+                      <a:prstDash val="solid"/>
+                      <a:round/>
+                      <a:headEnd type="none" w="med" len="med"/>
+                      <a:tailEnd type="none" w="med" len="med"/>
+                    </a:lnL>
+                    <a:lnR w="12700" cap="flat" cmpd="sng" algn="ctr">
+                      <a:solidFill>
+                        <a:srgbClr val="94A3B8"/>
+                      </a:solidFill>
+                      <a:prstDash val="solid"/>
+                      <a:round/>
+                      <a:headEnd type="none" w="med" len="med"/>
+                      <a:tailEnd type="none" w="med" len="med"/>
+                    </a:lnR>
+                    <a:lnT w="12700" cap="flat" cmpd="sng" algn="ctr">
+                      <a:solidFill>
+                        <a:srgbClr val="94A3B8"/>
+                      </a:solidFill>
+                      <a:prstDash val="solid"/>
+                      <a:round/>
+                      <a:headEnd type="none" w="med" len="med"/>
+                      <a:tailEnd type="none" w="med" len="med"/>
+                    </a:lnT>
+                    <a:lnB w="12700" cap="flat" cmpd="sng" algn="ctr">
+                      <a:solidFill>
+                        <a:srgbClr val="94A3B8"/>
+                      </a:solidFill>
+                      <a:prstDash val="solid"/>
+                      <a:round/>
+                      <a:headEnd type="none" w="med" len="med"/>
+                      <a:tailEnd type="none" w="med" len="med"/>
+                    </a:lnB>
+                    <a:solidFill>
+                      <a:srgbClr val="FFFFFF"/>
+                    </a:solidFill>
+                  </a:tcPr>
+                </a:tc>
+                <a:tc>
+                  <a:txBody>
+                    <a:bodyPr/>
+                    <a:lstStyle/>
+                    <a:p>
+                      <a:pPr eaLnBrk="0" algn="ctr" indent="0" marL="0">
+                        <a:buNone/>
+                      </a:pPr>
+                      <a:endParaRPr lang="en-US" sz="2400" dirty="0">
+                        <a:latin typeface="맑은 고딕" charset="0"/>
+                        <a:ea typeface="맑은 고딕" charset="0"/>
+                        <a:cs typeface="맑은 고딕" charset="0"/>
+                      </a:endParaRPr>
+                    </a:p>
+                  </a:txBody>
+                  <a:tcPr marL="38100" marR="38100" marT="38100" marB="38100" anchor="ctr">
+                    <a:lnL w="12700" cap="flat" cmpd="sng" algn="ctr">
+                      <a:solidFill>
+                        <a:srgbClr val="94A3B8"/>
+                      </a:solidFill>
+                      <a:prstDash val="solid"/>
+                      <a:round/>
+                      <a:headEnd type="none" w="med" len="med"/>
+                      <a:tailEnd type="none" w="med" len="med"/>
+                    </a:lnL>
+                    <a:lnR w="12700" cap="flat" cmpd="sng" algn="ctr">
+                      <a:solidFill>
+                        <a:srgbClr val="94A3B8"/>
+                      </a:solidFill>
+                      <a:prstDash val="solid"/>
+                      <a:round/>
+                      <a:headEnd type="none" w="med" len="med"/>
+                      <a:tailEnd type="none" w="med" len="med"/>
+                    </a:lnR>
+                    <a:lnT w="12700" cap="flat" cmpd="sng" algn="ctr">
+                      <a:solidFill>
+                        <a:srgbClr val="94A3B8"/>
+                      </a:solidFill>
+                      <a:prstDash val="solid"/>
+                      <a:round/>
+                      <a:headEnd type="none" w="med" len="med"/>
+                      <a:tailEnd type="none" w="med" len="med"/>
+                    </a:lnT>
+                    <a:lnB w="12700" cap="flat" cmpd="sng" algn="ctr">
+                      <a:solidFill>
+                        <a:srgbClr val="94A3B8"/>
+                      </a:solidFill>
+                      <a:prstDash val="solid"/>
+                      <a:round/>
+                      <a:headEnd type="none" w="med" len="med"/>
+                      <a:tailEnd type="none" w="med" len="med"/>
+                    </a:lnB>
+                    <a:solidFill>
+                      <a:srgbClr val="FFFFFF"/>
+                    </a:solidFill>
+                  </a:tcPr>
+                </a:tc>
+                <a:tc>
+                  <a:txBody>
+                    <a:bodyPr/>
+                    <a:lstStyle/>
+                    <a:p>
+                      <a:pPr eaLnBrk="0" algn="ctr" indent="0" marL="0">
+                        <a:buNone/>
+                      </a:pPr>
+                      <a:r>
+                        <a:rPr lang="en-US" sz="2400" dirty="0">
+                          <a:solidFill>
+                            <a:srgbClr val="1F2937"/>
+                          </a:solidFill>
+                          <a:latin typeface="맑은 고딕" pitchFamily="34" charset="0"/>
+                          <a:ea typeface="맑은 고딕" pitchFamily="34" charset="-122"/>
+                          <a:cs typeface="맑은 고딕" pitchFamily="34" charset="-120"/>
+                        </a:rPr>
+                        <a:t>□</a:t>
+                      </a:r>
+                      <a:endParaRPr lang="en-US" sz="2400" dirty="0">
+                        <a:latin typeface="맑은 고딕" charset="0"/>
+                        <a:ea typeface="맑은 고딕" charset="0"/>
+                        <a:cs typeface="맑은 고딕" charset="0"/>
+                      </a:endParaRPr>
+                    </a:p>
+                  </a:txBody>
+                  <a:tcPr marL="38100" marR="38100" marT="38100" marB="38100" anchor="ctr">
+                    <a:lnL w="12700" cap="flat" cmpd="sng" algn="ctr">
+                      <a:solidFill>
+                        <a:srgbClr val="94A3B8"/>
+                      </a:solidFill>
+                      <a:prstDash val="solid"/>
+                      <a:round/>
+                      <a:headEnd type="none" w="med" len="med"/>
+                      <a:tailEnd type="none" w="med" len="med"/>
+                    </a:lnL>
+                    <a:lnR w="12700" cap="flat" cmpd="sng" algn="ctr">
+                      <a:solidFill>
+                        <a:srgbClr val="94A3B8"/>
+                      </a:solidFill>
+                      <a:prstDash val="solid"/>
+                      <a:round/>
+                      <a:headEnd type="none" w="med" len="med"/>
+                      <a:tailEnd type="none" w="med" len="med"/>
+                    </a:lnR>
+                    <a:lnT w="12700" cap="flat" cmpd="sng" algn="ctr">
+                      <a:solidFill>
+                        <a:srgbClr val="94A3B8"/>
+                      </a:solidFill>
+                      <a:prstDash val="solid"/>
+                      <a:round/>
+                      <a:headEnd type="none" w="med" len="med"/>
+                      <a:tailEnd type="none" w="med" len="med"/>
+                    </a:lnT>
+                    <a:lnB w="12700" cap="flat" cmpd="sng" algn="ctr">
+                      <a:solidFill>
+                        <a:srgbClr val="94A3B8"/>
+                      </a:solidFill>
+                      <a:prstDash val="solid"/>
+                      <a:round/>
+                      <a:headEnd type="none" w="med" len="med"/>
+                      <a:tailEnd type="none" w="med" len="med"/>
+                    </a:lnB>
+                    <a:solidFill>
+                      <a:srgbClr val="FFFFFF"/>
+                    </a:solidFill>
+                  </a:tcPr>
+                </a:tc>
+                <a:tc>
+                  <a:txBody>
+                    <a:bodyPr/>
+                    <a:lstStyle/>
+                    <a:p>
+                      <a:pPr eaLnBrk="0" algn="ctr" indent="0" marL="0">
+                        <a:buNone/>
+                      </a:pPr>
+                      <a:r>
+                        <a:rPr lang="en-US" sz="2400" dirty="0">
+                          <a:solidFill>
+                            <a:srgbClr val="1F2937"/>
+                          </a:solidFill>
+                          <a:latin typeface="맑은 고딕" pitchFamily="34" charset="0"/>
+                          <a:ea typeface="맑은 고딕" pitchFamily="34" charset="-122"/>
+                          <a:cs typeface="맑은 고딕" pitchFamily="34" charset="-120"/>
+                        </a:rPr>
+                        <a:t>□</a:t>
+                      </a:r>
+                      <a:endParaRPr lang="en-US" sz="2400" dirty="0">
+                        <a:latin typeface="맑은 고딕" charset="0"/>
+                        <a:ea typeface="맑은 고딕" charset="0"/>
+                        <a:cs typeface="맑은 고딕" charset="0"/>
+                      </a:endParaRPr>
+                    </a:p>
+                  </a:txBody>
+                  <a:tcPr marL="38100" marR="38100" marT="38100" marB="38100" anchor="ctr">
+                    <a:lnL w="12700" cap="flat" cmpd="sng" algn="ctr">
+                      <a:solidFill>
+                        <a:srgbClr val="94A3B8"/>
+                      </a:solidFill>
+                      <a:prstDash val="solid"/>
+                      <a:round/>
+                      <a:headEnd type="none" w="med" len="med"/>
+                      <a:tailEnd type="none" w="med" len="med"/>
+                    </a:lnL>
+                    <a:lnR w="12700" cap="flat" cmpd="sng" algn="ctr">
+                      <a:solidFill>
+                        <a:srgbClr val="94A3B8"/>
+                      </a:solidFill>
+                      <a:prstDash val="solid"/>
+                      <a:round/>
+                      <a:headEnd type="none" w="med" len="med"/>
+                      <a:tailEnd type="none" w="med" len="med"/>
+                    </a:lnR>
+                    <a:lnT w="12700" cap="flat" cmpd="sng" algn="ctr">
+                      <a:solidFill>
+                        <a:srgbClr val="94A3B8"/>
+                      </a:solidFill>
+                      <a:prstDash val="solid"/>
+                      <a:round/>
+                      <a:headEnd type="none" w="med" len="med"/>
+                      <a:tailEnd type="none" w="med" len="med"/>
+                    </a:lnT>
+                    <a:lnB w="12700" cap="flat" cmpd="sng" algn="ctr">
+                      <a:solidFill>
+                        <a:srgbClr val="94A3B8"/>
+                      </a:solidFill>
+                      <a:prstDash val="solid"/>
+                      <a:round/>
+                      <a:headEnd type="none" w="med" len="med"/>
+                      <a:tailEnd type="none" w="med" len="med"/>
+                    </a:lnB>
+                    <a:solidFill>
+                      <a:srgbClr val="FFFFFF"/>
+                    </a:solidFill>
+                  </a:tcPr>
+                </a:tc>
+              </a:tr>
+              <a:tr h="472440">
+                <a:tc>
+                  <a:txBody>
+                    <a:bodyPr/>
+                    <a:lstStyle/>
+                    <a:p>
+                      <a:pPr eaLnBrk="0" algn="ctr" indent="0" marL="0">
+                        <a:buNone/>
+                      </a:pPr>
+                      <a:endParaRPr lang="en-US" sz="2400" dirty="0">
+                        <a:latin typeface="맑은 고딕" charset="0"/>
+                        <a:ea typeface="맑은 고딕" charset="0"/>
+                        <a:cs typeface="맑은 고딕" charset="0"/>
+                      </a:endParaRPr>
+                    </a:p>
+                  </a:txBody>
+                  <a:tcPr marL="38100" marR="38100" marT="38100" marB="38100" anchor="ctr">
+                    <a:lnL w="12700" cap="flat" cmpd="sng" algn="ctr">
+                      <a:solidFill>
+                        <a:srgbClr val="94A3B8"/>
+                      </a:solidFill>
+                      <a:prstDash val="solid"/>
+                      <a:round/>
+                      <a:headEnd type="none" w="med" len="med"/>
+                      <a:tailEnd type="none" w="med" len="med"/>
+                    </a:lnL>
+                    <a:lnR w="12700" cap="flat" cmpd="sng" algn="ctr">
+                      <a:solidFill>
+                        <a:srgbClr val="94A3B8"/>
+                      </a:solidFill>
+                      <a:prstDash val="solid"/>
+                      <a:round/>
+                      <a:headEnd type="none" w="med" len="med"/>
+                      <a:tailEnd type="none" w="med" len="med"/>
+                    </a:lnR>
+                    <a:lnT w="12700" cap="flat" cmpd="sng" algn="ctr">
+                      <a:solidFill>
+                        <a:srgbClr val="94A3B8"/>
+                      </a:solidFill>
+                      <a:prstDash val="solid"/>
+                      <a:round/>
+                      <a:headEnd type="none" w="med" len="med"/>
+                      <a:tailEnd type="none" w="med" len="med"/>
+                    </a:lnT>
+                    <a:lnB w="12700" cap="flat" cmpd="sng" algn="ctr">
+                      <a:solidFill>
+                        <a:srgbClr val="94A3B8"/>
+                      </a:solidFill>
+                      <a:prstDash val="solid"/>
+                      <a:round/>
+                      <a:headEnd type="none" w="med" len="med"/>
+                      <a:tailEnd type="none" w="med" len="med"/>
+                    </a:lnB>
+                    <a:solidFill>
+                      <a:srgbClr val="FFFFFF"/>
+                    </a:solidFill>
+                  </a:tcPr>
+                </a:tc>
+                <a:tc>
+                  <a:txBody>
+                    <a:bodyPr/>
+                    <a:lstStyle/>
+                    <a:p>
+                      <a:pPr eaLnBrk="0" algn="ctr" indent="0" marL="0">
+                        <a:buNone/>
+                      </a:pPr>
+                      <a:r>
+                        <a:rPr lang="en-US" sz="2400" dirty="0">
+                          <a:solidFill>
+                            <a:srgbClr val="1F2937"/>
+                          </a:solidFill>
+                          <a:latin typeface="맑은 고딕" pitchFamily="34" charset="0"/>
+                          <a:ea typeface="맑은 고딕" pitchFamily="34" charset="-122"/>
+                          <a:cs typeface="맑은 고딕" pitchFamily="34" charset="-120"/>
+                        </a:rPr>
+                        <a:t>7</a:t>
+                      </a:r>
                       <a:endParaRPr lang="en-US" sz="2400" dirty="0">
                         <a:latin typeface="맑은 고딕" charset="0"/>
                         <a:ea typeface="맑은 고딕" charset="0"/>
@@ -14725,7 +17434,7 @@
                           <a:ea typeface="맑은 고딕" pitchFamily="34" charset="-122"/>
                           <a:cs typeface="맑은 고딕" pitchFamily="34" charset="-120"/>
                         </a:rPr>
-                        <a:t>10</a:t>
+                        <a:t>2</a:t>
                       </a:r>
                       <a:endParaRPr lang="en-US" sz="2400" dirty="0">
                         <a:latin typeface="맑은 고딕" charset="0"/>
@@ -14776,179 +17485,8 @@
                     </a:solidFill>
                   </a:tcPr>
                 </a:tc>
-                <a:tc>
-                  <a:txBody>
-                    <a:bodyPr/>
-                    <a:lstStyle/>
-                    <a:p>
-                      <a:pPr eaLnBrk="0" algn="ctr" indent="0" marL="0">
-                        <a:buNone/>
-                      </a:pPr>
-                      <a:endParaRPr lang="en-US" sz="2400" dirty="0">
-                        <a:latin typeface="맑은 고딕" charset="0"/>
-                        <a:ea typeface="맑은 고딕" charset="0"/>
-                        <a:cs typeface="맑은 고딕" charset="0"/>
-                      </a:endParaRPr>
-                    </a:p>
-                  </a:txBody>
-                  <a:tcPr marL="38100" marR="38100" marT="38100" marB="38100" anchor="ctr">
-                    <a:lnL w="12700" cap="flat" cmpd="sng" algn="ctr">
-                      <a:solidFill>
-                        <a:srgbClr val="94A3B8"/>
-                      </a:solidFill>
-                      <a:prstDash val="solid"/>
-                      <a:round/>
-                      <a:headEnd type="none" w="med" len="med"/>
-                      <a:tailEnd type="none" w="med" len="med"/>
-                    </a:lnL>
-                    <a:lnR w="12700" cap="flat" cmpd="sng" algn="ctr">
-                      <a:solidFill>
-                        <a:srgbClr val="94A3B8"/>
-                      </a:solidFill>
-                      <a:prstDash val="solid"/>
-                      <a:round/>
-                      <a:headEnd type="none" w="med" len="med"/>
-                      <a:tailEnd type="none" w="med" len="med"/>
-                    </a:lnR>
-                    <a:lnT w="12700" cap="flat" cmpd="sng" algn="ctr">
-                      <a:solidFill>
-                        <a:srgbClr val="94A3B8"/>
-                      </a:solidFill>
-                      <a:prstDash val="solid"/>
-                      <a:round/>
-                      <a:headEnd type="none" w="med" len="med"/>
-                      <a:tailEnd type="none" w="med" len="med"/>
-                    </a:lnT>
-                    <a:lnB w="12700" cap="flat" cmpd="sng" algn="ctr">
-                      <a:solidFill>
-                        <a:srgbClr val="94A3B8"/>
-                      </a:solidFill>
-                      <a:prstDash val="solid"/>
-                      <a:round/>
-                      <a:headEnd type="none" w="med" len="med"/>
-                      <a:tailEnd type="none" w="med" len="med"/>
-                    </a:lnB>
-                    <a:solidFill>
-                      <a:srgbClr val="FFFFFF"/>
-                    </a:solidFill>
-                  </a:tcPr>
-                </a:tc>
               </a:tr>
-              <a:tr h="487680">
-                <a:tc>
-                  <a:txBody>
-                    <a:bodyPr/>
-                    <a:lstStyle/>
-                    <a:p>
-                      <a:pPr eaLnBrk="0" algn="ctr" indent="0" marL="0">
-                        <a:buNone/>
-                      </a:pPr>
-                      <a:endParaRPr lang="en-US" sz="2400" dirty="0">
-                        <a:latin typeface="맑은 고딕" charset="0"/>
-                        <a:ea typeface="맑은 고딕" charset="0"/>
-                        <a:cs typeface="맑은 고딕" charset="0"/>
-                      </a:endParaRPr>
-                    </a:p>
-                  </a:txBody>
-                  <a:tcPr marL="38100" marR="38100" marT="38100" marB="38100" anchor="ctr">
-                    <a:lnL w="12700" cap="flat" cmpd="sng" algn="ctr">
-                      <a:solidFill>
-                        <a:srgbClr val="94A3B8"/>
-                      </a:solidFill>
-                      <a:prstDash val="solid"/>
-                      <a:round/>
-                      <a:headEnd type="none" w="med" len="med"/>
-                      <a:tailEnd type="none" w="med" len="med"/>
-                    </a:lnL>
-                    <a:lnR w="12700" cap="flat" cmpd="sng" algn="ctr">
-                      <a:solidFill>
-                        <a:srgbClr val="94A3B8"/>
-                      </a:solidFill>
-                      <a:prstDash val="solid"/>
-                      <a:round/>
-                      <a:headEnd type="none" w="med" len="med"/>
-                      <a:tailEnd type="none" w="med" len="med"/>
-                    </a:lnR>
-                    <a:lnT w="12700" cap="flat" cmpd="sng" algn="ctr">
-                      <a:solidFill>
-                        <a:srgbClr val="94A3B8"/>
-                      </a:solidFill>
-                      <a:prstDash val="solid"/>
-                      <a:round/>
-                      <a:headEnd type="none" w="med" len="med"/>
-                      <a:tailEnd type="none" w="med" len="med"/>
-                    </a:lnT>
-                    <a:lnB w="12700" cap="flat" cmpd="sng" algn="ctr">
-                      <a:solidFill>
-                        <a:srgbClr val="94A3B8"/>
-                      </a:solidFill>
-                      <a:prstDash val="solid"/>
-                      <a:round/>
-                      <a:headEnd type="none" w="med" len="med"/>
-                      <a:tailEnd type="none" w="med" len="med"/>
-                    </a:lnB>
-                    <a:solidFill>
-                      <a:srgbClr val="FFFFFF"/>
-                    </a:solidFill>
-                  </a:tcPr>
-                </a:tc>
-                <a:tc>
-                  <a:txBody>
-                    <a:bodyPr/>
-                    <a:lstStyle/>
-                    <a:p>
-                      <a:pPr eaLnBrk="0" algn="ctr" indent="0" marL="0">
-                        <a:buNone/>
-                      </a:pPr>
-                      <a:endParaRPr lang="en-US" sz="2400" dirty="0">
-                        <a:latin typeface="맑은 고딕" charset="0"/>
-                        <a:ea typeface="맑은 고딕" charset="0"/>
-                        <a:cs typeface="맑은 고딕" charset="0"/>
-                      </a:endParaRPr>
-                    </a:p>
-                  </a:txBody>
-                  <a:tcPr marL="38100" marR="38100" marT="38100" marB="38100" anchor="ctr">
-                    <a:lnL w="12700" cap="flat" cmpd="sng" algn="ctr">
-                      <a:solidFill>
-                        <a:srgbClr val="94A3B8"/>
-                      </a:solidFill>
-                      <a:prstDash val="solid"/>
-                      <a:round/>
-                      <a:headEnd type="none" w="med" len="med"/>
-                      <a:tailEnd type="none" w="med" len="med"/>
-                    </a:lnL>
-                    <a:lnR w="12700" cap="flat" cmpd="sng" algn="ctr">
-                      <a:solidFill>
-                        <a:srgbClr val="94A3B8"/>
-                      </a:solidFill>
-                      <a:prstDash val="solid"/>
-                      <a:round/>
-                      <a:headEnd type="none" w="med" len="med"/>
-                      <a:tailEnd type="none" w="med" len="med"/>
-                    </a:lnR>
-                    <a:lnT w="12700" cap="flat" cmpd="sng" algn="ctr">
-                      <a:solidFill>
-                        <a:srgbClr val="94A3B8"/>
-                      </a:solidFill>
-                      <a:prstDash val="solid"/>
-                      <a:round/>
-                      <a:headEnd type="none" w="med" len="med"/>
-                      <a:tailEnd type="none" w="med" len="med"/>
-                    </a:lnT>
-                    <a:lnB w="12700" cap="flat" cmpd="sng" algn="ctr">
-                      <a:solidFill>
-                        <a:srgbClr val="94A3B8"/>
-                      </a:solidFill>
-                      <a:prstDash val="solid"/>
-                      <a:round/>
-                      <a:headEnd type="none" w="med" len="med"/>
-                      <a:tailEnd type="none" w="med" len="med"/>
-                    </a:lnB>
-                    <a:solidFill>
-                      <a:srgbClr val="FFFFFF"/>
-                    </a:solidFill>
-                  </a:tcPr>
-                </a:tc>
+              <a:tr h="472440">
                 <a:tc>
                   <a:txBody>
                     <a:bodyPr/>
@@ -14966,135 +17504,8 @@
                           <a:ea typeface="맑은 고딕" pitchFamily="34" charset="-122"/>
                           <a:cs typeface="맑은 고딕" pitchFamily="34" charset="-120"/>
                         </a:rPr>
-                        <a:t>1</a:t>
+                        <a:t>−</a:t>
                       </a:r>
-                      <a:endParaRPr lang="en-US" sz="2400" dirty="0">
-                        <a:latin typeface="맑은 고딕" charset="0"/>
-                        <a:ea typeface="맑은 고딕" charset="0"/>
-                        <a:cs typeface="맑은 고딕" charset="0"/>
-                      </a:endParaRPr>
-                    </a:p>
-                  </a:txBody>
-                  <a:tcPr marL="38100" marR="38100" marT="38100" marB="38100" anchor="ctr">
-                    <a:lnL w="12700" cap="flat" cmpd="sng" algn="ctr">
-                      <a:solidFill>
-                        <a:srgbClr val="94A3B8"/>
-                      </a:solidFill>
-                      <a:prstDash val="solid"/>
-                      <a:round/>
-                      <a:headEnd type="none" w="med" len="med"/>
-                      <a:tailEnd type="none" w="med" len="med"/>
-                    </a:lnL>
-                    <a:lnR w="12700" cap="flat" cmpd="sng" algn="ctr">
-                      <a:solidFill>
-                        <a:srgbClr val="94A3B8"/>
-                      </a:solidFill>
-                      <a:prstDash val="solid"/>
-                      <a:round/>
-                      <a:headEnd type="none" w="med" len="med"/>
-                      <a:tailEnd type="none" w="med" len="med"/>
-                    </a:lnR>
-                    <a:lnT w="12700" cap="flat" cmpd="sng" algn="ctr">
-                      <a:solidFill>
-                        <a:srgbClr val="94A3B8"/>
-                      </a:solidFill>
-                      <a:prstDash val="solid"/>
-                      <a:round/>
-                      <a:headEnd type="none" w="med" len="med"/>
-                      <a:tailEnd type="none" w="med" len="med"/>
-                    </a:lnT>
-                    <a:lnB w="12700" cap="flat" cmpd="sng" algn="ctr">
-                      <a:solidFill>
-                        <a:srgbClr val="94A3B8"/>
-                      </a:solidFill>
-                      <a:prstDash val="solid"/>
-                      <a:round/>
-                      <a:headEnd type="none" w="med" len="med"/>
-                      <a:tailEnd type="none" w="med" len="med"/>
-                    </a:lnB>
-                    <a:solidFill>
-                      <a:srgbClr val="FFFFFF"/>
-                    </a:solidFill>
-                  </a:tcPr>
-                </a:tc>
-                <a:tc>
-                  <a:txBody>
-                    <a:bodyPr/>
-                    <a:lstStyle/>
-                    <a:p>
-                      <a:pPr eaLnBrk="0" algn="ctr" indent="0" marL="0">
-                        <a:buNone/>
-                      </a:pPr>
-                      <a:r>
-                        <a:rPr lang="en-US" sz="2400" dirty="0">
-                          <a:solidFill>
-                            <a:srgbClr val="1F2937"/>
-                          </a:solidFill>
-                          <a:latin typeface="맑은 고딕" pitchFamily="34" charset="0"/>
-                          <a:ea typeface="맑은 고딕" pitchFamily="34" charset="-122"/>
-                          <a:cs typeface="맑은 고딕" pitchFamily="34" charset="-120"/>
-                        </a:rPr>
-                        <a:t>10</a:t>
-                      </a:r>
-                      <a:endParaRPr lang="en-US" sz="2400" dirty="0">
-                        <a:latin typeface="맑은 고딕" charset="0"/>
-                        <a:ea typeface="맑은 고딕" charset="0"/>
-                        <a:cs typeface="맑은 고딕" charset="0"/>
-                      </a:endParaRPr>
-                    </a:p>
-                  </a:txBody>
-                  <a:tcPr marL="38100" marR="38100" marT="38100" marB="38100" anchor="ctr">
-                    <a:lnL w="12700" cap="flat" cmpd="sng" algn="ctr">
-                      <a:solidFill>
-                        <a:srgbClr val="94A3B8"/>
-                      </a:solidFill>
-                      <a:prstDash val="solid"/>
-                      <a:round/>
-                      <a:headEnd type="none" w="med" len="med"/>
-                      <a:tailEnd type="none" w="med" len="med"/>
-                    </a:lnL>
-                    <a:lnR w="12700" cap="flat" cmpd="sng" algn="ctr">
-                      <a:solidFill>
-                        <a:srgbClr val="94A3B8"/>
-                      </a:solidFill>
-                      <a:prstDash val="solid"/>
-                      <a:round/>
-                      <a:headEnd type="none" w="med" len="med"/>
-                      <a:tailEnd type="none" w="med" len="med"/>
-                    </a:lnR>
-                    <a:lnT w="12700" cap="flat" cmpd="sng" algn="ctr">
-                      <a:solidFill>
-                        <a:srgbClr val="94A3B8"/>
-                      </a:solidFill>
-                      <a:prstDash val="solid"/>
-                      <a:round/>
-                      <a:headEnd type="none" w="med" len="med"/>
-                      <a:tailEnd type="none" w="med" len="med"/>
-                    </a:lnT>
-                    <a:lnB w="12700" cap="flat" cmpd="sng" algn="ctr">
-                      <a:solidFill>
-                        <a:srgbClr val="94A3B8"/>
-                      </a:solidFill>
-                      <a:prstDash val="solid"/>
-                      <a:round/>
-                      <a:headEnd type="none" w="med" len="med"/>
-                      <a:tailEnd type="none" w="med" len="med"/>
-                    </a:lnB>
-                    <a:solidFill>
-                      <a:srgbClr val="FFFFFF"/>
-                    </a:solidFill>
-                  </a:tcPr>
-                </a:tc>
-              </a:tr>
-              <a:tr h="487680">
-                <a:tc>
-                  <a:txBody>
-                    <a:bodyPr/>
-                    <a:lstStyle/>
-                    <a:p>
-                      <a:pPr eaLnBrk="0" algn="ctr" indent="0" marL="0">
-                        <a:buNone/>
-                      </a:pPr>
                       <a:endParaRPr lang="en-US" sz="2400" dirty="0">
                         <a:latin typeface="맑은 고딕" charset="0"/>
                         <a:ea typeface="맑은 고딕" charset="0"/>
@@ -15229,7 +17640,7 @@
                           <a:ea typeface="맑은 고딕" pitchFamily="34" charset="-122"/>
                           <a:cs typeface="맑은 고딕" pitchFamily="34" charset="-120"/>
                         </a:rPr>
-                        <a:t>2</a:t>
+                        <a:t>5</a:t>
                       </a:r>
                       <a:endParaRPr lang="en-US" sz="2400" dirty="0">
                         <a:latin typeface="맑은 고딕" charset="0"/>
@@ -15297,7 +17708,7 @@
                           <a:ea typeface="맑은 고딕" pitchFamily="34" charset="-122"/>
                           <a:cs typeface="맑은 고딕" pitchFamily="34" charset="-120"/>
                         </a:rPr>
-                        <a:t>3</a:t>
+                        <a:t>8</a:t>
                       </a:r>
                       <a:endParaRPr lang="en-US" sz="2400" dirty="0">
                         <a:latin typeface="맑은 고딕" charset="0"/>
@@ -15349,7 +17760,7 @@
                   </a:tcPr>
                 </a:tc>
               </a:tr>
-              <a:tr h="487680">
+              <a:tr h="472440">
                 <a:tc>
                   <a:txBody>
                     <a:bodyPr/>
@@ -15358,17 +17769,6 @@
                       <a:pPr eaLnBrk="0" algn="ctr" indent="0" marL="0">
                         <a:buNone/>
                       </a:pPr>
-                      <a:r>
-                        <a:rPr lang="en-US" sz="2400" dirty="0">
-                          <a:solidFill>
-                            <a:srgbClr val="1F2937"/>
-                          </a:solidFill>
-                          <a:latin typeface="맑은 고딕" pitchFamily="34" charset="0"/>
-                          <a:ea typeface="맑은 고딕" pitchFamily="34" charset="-122"/>
-                          <a:cs typeface="맑은 고딕" pitchFamily="34" charset="-120"/>
-                        </a:rPr>
-                        <a:t>−</a:t>
-                      </a:r>
                       <a:endParaRPr lang="en-US" sz="2400" dirty="0">
                         <a:latin typeface="맑은 고딕" charset="0"/>
                         <a:ea typeface="맑은 고딕" charset="0"/>
@@ -15435,7 +17835,7 @@
                           <a:ea typeface="맑은 고딕" pitchFamily="34" charset="-122"/>
                           <a:cs typeface="맑은 고딕" pitchFamily="34" charset="-120"/>
                         </a:rPr>
-                        <a:t>1</a:t>
+                        <a:t>□</a:t>
                       </a:r>
                       <a:endParaRPr lang="en-US" sz="2400" dirty="0">
                         <a:latin typeface="맑은 고딕" charset="0"/>
@@ -15503,7 +17903,7 @@
                           <a:ea typeface="맑은 고딕" pitchFamily="34" charset="-122"/>
                           <a:cs typeface="맑은 고딕" pitchFamily="34" charset="-120"/>
                         </a:rPr>
-                        <a:t>5</a:t>
+                        <a:t>□</a:t>
                       </a:r>
                       <a:endParaRPr lang="en-US" sz="2400" dirty="0">
                         <a:latin typeface="맑은 고딕" charset="0"/>
@@ -15571,270 +17971,7 @@
                           <a:ea typeface="맑은 고딕" pitchFamily="34" charset="-122"/>
                           <a:cs typeface="맑은 고딕" pitchFamily="34" charset="-120"/>
                         </a:rPr>
-                        <a:t>6</a:t>
-                      </a:r>
-                      <a:endParaRPr lang="en-US" sz="2400" dirty="0">
-                        <a:latin typeface="맑은 고딕" charset="0"/>
-                        <a:ea typeface="맑은 고딕" charset="0"/>
-                        <a:cs typeface="맑은 고딕" charset="0"/>
-                      </a:endParaRPr>
-                    </a:p>
-                  </a:txBody>
-                  <a:tcPr marL="38100" marR="38100" marT="38100" marB="38100" anchor="ctr">
-                    <a:lnL w="12700" cap="flat" cmpd="sng" algn="ctr">
-                      <a:solidFill>
-                        <a:srgbClr val="94A3B8"/>
-                      </a:solidFill>
-                      <a:prstDash val="solid"/>
-                      <a:round/>
-                      <a:headEnd type="none" w="med" len="med"/>
-                      <a:tailEnd type="none" w="med" len="med"/>
-                    </a:lnL>
-                    <a:lnR w="12700" cap="flat" cmpd="sng" algn="ctr">
-                      <a:solidFill>
-                        <a:srgbClr val="94A3B8"/>
-                      </a:solidFill>
-                      <a:prstDash val="solid"/>
-                      <a:round/>
-                      <a:headEnd type="none" w="med" len="med"/>
-                      <a:tailEnd type="none" w="med" len="med"/>
-                    </a:lnR>
-                    <a:lnT w="12700" cap="flat" cmpd="sng" algn="ctr">
-                      <a:solidFill>
-                        <a:srgbClr val="94A3B8"/>
-                      </a:solidFill>
-                      <a:prstDash val="solid"/>
-                      <a:round/>
-                      <a:headEnd type="none" w="med" len="med"/>
-                      <a:tailEnd type="none" w="med" len="med"/>
-                    </a:lnT>
-                    <a:lnB w="12700" cap="flat" cmpd="sng" algn="ctr">
-                      <a:solidFill>
-                        <a:srgbClr val="94A3B8"/>
-                      </a:solidFill>
-                      <a:prstDash val="solid"/>
-                      <a:round/>
-                      <a:headEnd type="none" w="med" len="med"/>
-                      <a:tailEnd type="none" w="med" len="med"/>
-                    </a:lnB>
-                    <a:solidFill>
-                      <a:srgbClr val="FFFFFF"/>
-                    </a:solidFill>
-                  </a:tcPr>
-                </a:tc>
-              </a:tr>
-              <a:tr h="487680">
-                <a:tc>
-                  <a:txBody>
-                    <a:bodyPr/>
-                    <a:lstStyle/>
-                    <a:p>
-                      <a:pPr eaLnBrk="0" algn="ctr" indent="0" marL="0">
-                        <a:buNone/>
-                      </a:pPr>
-                      <a:endParaRPr lang="en-US" sz="2400" dirty="0">
-                        <a:latin typeface="맑은 고딕" charset="0"/>
-                        <a:ea typeface="맑은 고딕" charset="0"/>
-                        <a:cs typeface="맑은 고딕" charset="0"/>
-                      </a:endParaRPr>
-                    </a:p>
-                  </a:txBody>
-                  <a:tcPr marL="38100" marR="38100" marT="38100" marB="38100" anchor="ctr">
-                    <a:lnL w="12700" cap="flat" cmpd="sng" algn="ctr">
-                      <a:solidFill>
-                        <a:srgbClr val="94A3B8"/>
-                      </a:solidFill>
-                      <a:prstDash val="solid"/>
-                      <a:round/>
-                      <a:headEnd type="none" w="med" len="med"/>
-                      <a:tailEnd type="none" w="med" len="med"/>
-                    </a:lnL>
-                    <a:lnR w="12700" cap="flat" cmpd="sng" algn="ctr">
-                      <a:solidFill>
-                        <a:srgbClr val="94A3B8"/>
-                      </a:solidFill>
-                      <a:prstDash val="solid"/>
-                      <a:round/>
-                      <a:headEnd type="none" w="med" len="med"/>
-                      <a:tailEnd type="none" w="med" len="med"/>
-                    </a:lnR>
-                    <a:lnT w="12700" cap="flat" cmpd="sng" algn="ctr">
-                      <a:solidFill>
-                        <a:srgbClr val="94A3B8"/>
-                      </a:solidFill>
-                      <a:prstDash val="solid"/>
-                      <a:round/>
-                      <a:headEnd type="none" w="med" len="med"/>
-                      <a:tailEnd type="none" w="med" len="med"/>
-                    </a:lnT>
-                    <a:lnB w="12700" cap="flat" cmpd="sng" algn="ctr">
-                      <a:solidFill>
-                        <a:srgbClr val="94A3B8"/>
-                      </a:solidFill>
-                      <a:prstDash val="solid"/>
-                      <a:round/>
-                      <a:headEnd type="none" w="med" len="med"/>
-                      <a:tailEnd type="none" w="med" len="med"/>
-                    </a:lnB>
-                    <a:solidFill>
-                      <a:srgbClr val="FFFFFF"/>
-                    </a:solidFill>
-                  </a:tcPr>
-                </a:tc>
-                <a:tc>
-                  <a:txBody>
-                    <a:bodyPr/>
-                    <a:lstStyle/>
-                    <a:p>
-                      <a:pPr eaLnBrk="0" algn="ctr" indent="0" marL="0">
-                        <a:buNone/>
-                      </a:pPr>
-                      <a:r>
-                        <a:rPr lang="en-US" sz="2400" dirty="0">
-                          <a:solidFill>
-                            <a:srgbClr val="1F2937"/>
-                          </a:solidFill>
-                          <a:latin typeface="맑은 고딕" pitchFamily="34" charset="0"/>
-                          <a:ea typeface="맑은 고딕" pitchFamily="34" charset="-122"/>
-                          <a:cs typeface="맑은 고딕" pitchFamily="34" charset="-120"/>
-                        </a:rPr>
-                        <a:t>2</a:t>
-                      </a:r>
-                      <a:endParaRPr lang="en-US" sz="2400" dirty="0">
-                        <a:latin typeface="맑은 고딕" charset="0"/>
-                        <a:ea typeface="맑은 고딕" charset="0"/>
-                        <a:cs typeface="맑은 고딕" charset="0"/>
-                      </a:endParaRPr>
-                    </a:p>
-                  </a:txBody>
-                  <a:tcPr marL="38100" marR="38100" marT="38100" marB="38100" anchor="ctr">
-                    <a:lnL w="12700" cap="flat" cmpd="sng" algn="ctr">
-                      <a:solidFill>
-                        <a:srgbClr val="94A3B8"/>
-                      </a:solidFill>
-                      <a:prstDash val="solid"/>
-                      <a:round/>
-                      <a:headEnd type="none" w="med" len="med"/>
-                      <a:tailEnd type="none" w="med" len="med"/>
-                    </a:lnL>
-                    <a:lnR w="12700" cap="flat" cmpd="sng" algn="ctr">
-                      <a:solidFill>
-                        <a:srgbClr val="94A3B8"/>
-                      </a:solidFill>
-                      <a:prstDash val="solid"/>
-                      <a:round/>
-                      <a:headEnd type="none" w="med" len="med"/>
-                      <a:tailEnd type="none" w="med" len="med"/>
-                    </a:lnR>
-                    <a:lnT w="12700" cap="flat" cmpd="sng" algn="ctr">
-                      <a:solidFill>
-                        <a:srgbClr val="94A3B8"/>
-                      </a:solidFill>
-                      <a:prstDash val="solid"/>
-                      <a:round/>
-                      <a:headEnd type="none" w="med" len="med"/>
-                      <a:tailEnd type="none" w="med" len="med"/>
-                    </a:lnT>
-                    <a:lnB w="12700" cap="flat" cmpd="sng" algn="ctr">
-                      <a:solidFill>
-                        <a:srgbClr val="94A3B8"/>
-                      </a:solidFill>
-                      <a:prstDash val="solid"/>
-                      <a:round/>
-                      <a:headEnd type="none" w="med" len="med"/>
-                      <a:tailEnd type="none" w="med" len="med"/>
-                    </a:lnB>
-                    <a:solidFill>
-                      <a:srgbClr val="FFFFFF"/>
-                    </a:solidFill>
-                  </a:tcPr>
-                </a:tc>
-                <a:tc>
-                  <a:txBody>
-                    <a:bodyPr/>
-                    <a:lstStyle/>
-                    <a:p>
-                      <a:pPr eaLnBrk="0" algn="ctr" indent="0" marL="0">
-                        <a:buNone/>
-                      </a:pPr>
-                      <a:r>
-                        <a:rPr lang="en-US" sz="2400" dirty="0">
-                          <a:solidFill>
-                            <a:srgbClr val="1F2937"/>
-                          </a:solidFill>
-                          <a:latin typeface="맑은 고딕" pitchFamily="34" charset="0"/>
-                          <a:ea typeface="맑은 고딕" pitchFamily="34" charset="-122"/>
-                          <a:cs typeface="맑은 고딕" pitchFamily="34" charset="-120"/>
-                        </a:rPr>
-                        <a:t>6</a:t>
-                      </a:r>
-                      <a:endParaRPr lang="en-US" sz="2400" dirty="0">
-                        <a:latin typeface="맑은 고딕" charset="0"/>
-                        <a:ea typeface="맑은 고딕" charset="0"/>
-                        <a:cs typeface="맑은 고딕" charset="0"/>
-                      </a:endParaRPr>
-                    </a:p>
-                  </a:txBody>
-                  <a:tcPr marL="38100" marR="38100" marT="38100" marB="38100" anchor="ctr">
-                    <a:lnL w="12700" cap="flat" cmpd="sng" algn="ctr">
-                      <a:solidFill>
-                        <a:srgbClr val="94A3B8"/>
-                      </a:solidFill>
-                      <a:prstDash val="solid"/>
-                      <a:round/>
-                      <a:headEnd type="none" w="med" len="med"/>
-                      <a:tailEnd type="none" w="med" len="med"/>
-                    </a:lnL>
-                    <a:lnR w="12700" cap="flat" cmpd="sng" algn="ctr">
-                      <a:solidFill>
-                        <a:srgbClr val="94A3B8"/>
-                      </a:solidFill>
-                      <a:prstDash val="solid"/>
-                      <a:round/>
-                      <a:headEnd type="none" w="med" len="med"/>
-                      <a:tailEnd type="none" w="med" len="med"/>
-                    </a:lnR>
-                    <a:lnT w="12700" cap="flat" cmpd="sng" algn="ctr">
-                      <a:solidFill>
-                        <a:srgbClr val="94A3B8"/>
-                      </a:solidFill>
-                      <a:prstDash val="solid"/>
-                      <a:round/>
-                      <a:headEnd type="none" w="med" len="med"/>
-                      <a:tailEnd type="none" w="med" len="med"/>
-                    </a:lnT>
-                    <a:lnB w="12700" cap="flat" cmpd="sng" algn="ctr">
-                      <a:solidFill>
-                        <a:srgbClr val="94A3B8"/>
-                      </a:solidFill>
-                      <a:prstDash val="solid"/>
-                      <a:round/>
-                      <a:headEnd type="none" w="med" len="med"/>
-                      <a:tailEnd type="none" w="med" len="med"/>
-                    </a:lnB>
-                    <a:solidFill>
-                      <a:srgbClr val="FFFFFF"/>
-                    </a:solidFill>
-                  </a:tcPr>
-                </a:tc>
-                <a:tc>
-                  <a:txBody>
-                    <a:bodyPr/>
-                    <a:lstStyle/>
-                    <a:p>
-                      <a:pPr eaLnBrk="0" algn="ctr" indent="0" marL="0">
-                        <a:buNone/>
-                      </a:pPr>
-                      <a:r>
-                        <a:rPr lang="en-US" sz="2400" dirty="0">
-                          <a:solidFill>
-                            <a:srgbClr val="1F2937"/>
-                          </a:solidFill>
-                          <a:latin typeface="맑은 고딕" pitchFamily="34" charset="0"/>
-                          <a:ea typeface="맑은 고딕" pitchFamily="34" charset="-122"/>
-                          <a:cs typeface="맑은 고딕" pitchFamily="34" charset="-120"/>
-                        </a:rPr>
-                        <a:t>7</a:t>
+                        <a:t>□</a:t>
                       </a:r>
                       <a:endParaRPr lang="en-US" sz="2400" dirty="0">
                         <a:latin typeface="맑은 고딕" charset="0"/>
@@ -15892,17 +18029,19 @@
       </p:graphicFrame>
       <p:sp>
         <p:nvSpPr>
-          <p:cNvPr id="7" name="S06-stepno42"/>
+          <p:cNvPr id="8" name="S07-chip53"/>
           <p:cNvSpPr txBox="1"/>
           <p:nvPr/>
         </p:nvSpPr>
         <p:spPr>
           <a:xfrm>
-            <a:off x="548640" y="2243328"/>
-            <a:ext cx="548640" cy="548640"/>
+            <a:off x="548640" y="1613916"/>
+            <a:ext cx="566928" cy="566928"/>
           </a:xfrm>
-          <a:prstGeom prst="ellipse">
-            <a:avLst/>
+          <a:prstGeom prst="roundRect">
+            <a:avLst>
+              <a:gd name="adj" fmla="val 25806"/>
+            </a:avLst>
           </a:prstGeom>
           <a:solidFill>
             <a:srgbClr val="264653"/>
@@ -15929,7 +18068,7 @@
                 <a:ea typeface="맑은 고딕" pitchFamily="34" charset="-122"/>
                 <a:cs typeface="맑은 고딕" pitchFamily="34" charset="-120"/>
               </a:rPr>
-              <a:t>1</a:t>
+              <a:t>①</a:t>
             </a:r>
             <a:endParaRPr lang="ko-KR" sz="2400" dirty="0"/>
           </a:p>
@@ -15937,14 +18076,14 @@
       </p:sp>
       <p:sp>
         <p:nvSpPr>
-          <p:cNvPr id="8" name="S06-text43"/>
+          <p:cNvPr id="9" name="S07-eqtext54"/>
           <p:cNvSpPr txBox="1"/>
           <p:nvPr/>
         </p:nvSpPr>
         <p:spPr>
           <a:xfrm>
-            <a:off x="1325880" y="2197608"/>
-            <a:ext cx="5658307" cy="929640"/>
+            <a:off x="1344168" y="1325880"/>
+            <a:ext cx="4567428" cy="1143000"/>
           </a:xfrm>
           <a:prstGeom prst="rect">
             <a:avLst/>
@@ -15953,14 +18092,14 @@
           <a:ln/>
         </p:spPr>
         <p:txBody>
-          <a:bodyPr wrap="square" lIns="0" tIns="0" rIns="0" bIns="0" rtlCol="0" anchor="t"/>
+          <a:bodyPr wrap="square" lIns="0" tIns="0" rIns="0" bIns="0" rtlCol="0" anchor="ctr"/>
           <a:lstStyle/>
           <a:p>
             <a:pPr eaLnBrk="0" algn="l" indent="0" marL="0">
               <a:buNone/>
             </a:pPr>
             <a:r>
-              <a:rPr lang="ko-KR" altLang="en-US" sz="3000" dirty="0">
+              <a:rPr lang="ko-KR" altLang="en-US" sz="3400" b="1" dirty="0">
                 <a:solidFill>
                   <a:srgbClr val="1F2937"/>
                 </a:solidFill>
@@ -15968,42 +18107,27 @@
                 <a:ea typeface="맑은 고딕" pitchFamily="34" charset="-122"/>
                 <a:cs typeface="맑은 고딕" pitchFamily="34" charset="-120"/>
               </a:rPr>
-              <a:t>일: 십에서 받아내려</a:t>
+              <a:t>463 − 128 = □</a:t>
             </a:r>
-            <a:endParaRPr lang="ko-KR" sz="3000" dirty="0"/>
-          </a:p>
-          <a:p>
-            <a:pPr eaLnBrk="0" algn="l" indent="0" marL="0">
-              <a:buNone/>
-            </a:pPr>
-            <a:r>
-              <a:rPr lang="ko-KR" altLang="en-US" sz="3000" dirty="0">
-                <a:solidFill>
-                  <a:srgbClr val="1F2937"/>
-                </a:solidFill>
-                <a:latin typeface="맑은 고딕" pitchFamily="34" charset="0"/>
-                <a:ea typeface="맑은 고딕" pitchFamily="34" charset="-122"/>
-                <a:cs typeface="맑은 고딕" pitchFamily="34" charset="-120"/>
-              </a:rPr>
-              <a:t>13 − 6 = 7</a:t>
-            </a:r>
-            <a:endParaRPr lang="ko-KR" sz="3000" dirty="0"/>
+            <a:endParaRPr lang="ko-KR" sz="3400" dirty="0"/>
           </a:p>
         </p:txBody>
       </p:sp>
       <p:sp>
         <p:nvSpPr>
-          <p:cNvPr id="9" name="S06-stepno44"/>
+          <p:cNvPr id="10" name="S07-chip55"/>
           <p:cNvSpPr txBox="1"/>
           <p:nvPr/>
         </p:nvSpPr>
         <p:spPr>
           <a:xfrm>
-            <a:off x="548640" y="3337560"/>
-            <a:ext cx="548640" cy="548640"/>
+            <a:off x="548640" y="2939796"/>
+            <a:ext cx="566928" cy="566928"/>
           </a:xfrm>
-          <a:prstGeom prst="ellipse">
-            <a:avLst/>
+          <a:prstGeom prst="roundRect">
+            <a:avLst>
+              <a:gd name="adj" fmla="val 25806"/>
+            </a:avLst>
           </a:prstGeom>
           <a:solidFill>
             <a:srgbClr val="264653"/>
@@ -16030,7 +18154,7 @@
                 <a:ea typeface="맑은 고딕" pitchFamily="34" charset="-122"/>
                 <a:cs typeface="맑은 고딕" pitchFamily="34" charset="-120"/>
               </a:rPr>
-              <a:t>2</a:t>
+              <a:t>②</a:t>
             </a:r>
             <a:endParaRPr lang="ko-KR" sz="2400" dirty="0"/>
           </a:p>
@@ -16038,14 +18162,14 @@
       </p:sp>
       <p:sp>
         <p:nvSpPr>
-          <p:cNvPr id="10" name="S06-text45"/>
+          <p:cNvPr id="11" name="S07-eqtext56"/>
           <p:cNvSpPr txBox="1"/>
           <p:nvPr/>
         </p:nvSpPr>
         <p:spPr>
           <a:xfrm>
-            <a:off x="1325880" y="3291840"/>
-            <a:ext cx="5658307" cy="929640"/>
+            <a:off x="1344168" y="2651760"/>
+            <a:ext cx="4567428" cy="1143000"/>
           </a:xfrm>
           <a:prstGeom prst="rect">
             <a:avLst/>
@@ -16054,14 +18178,14 @@
           <a:ln/>
         </p:spPr>
         <p:txBody>
-          <a:bodyPr wrap="square" lIns="0" tIns="0" rIns="0" bIns="0" rtlCol="0" anchor="t"/>
+          <a:bodyPr wrap="square" lIns="0" tIns="0" rIns="0" bIns="0" rtlCol="0" anchor="ctr"/>
           <a:lstStyle/>
           <a:p>
             <a:pPr eaLnBrk="0" algn="l" indent="0" marL="0">
               <a:buNone/>
             </a:pPr>
             <a:r>
-              <a:rPr lang="ko-KR" altLang="en-US" sz="3000" dirty="0">
+              <a:rPr lang="ko-KR" altLang="en-US" sz="3400" b="1" dirty="0">
                 <a:solidFill>
                   <a:srgbClr val="1F2937"/>
                 </a:solidFill>
@@ -16069,42 +18193,27 @@
                 <a:ea typeface="맑은 고딕" pitchFamily="34" charset="-122"/>
                 <a:cs typeface="맑은 고딕" pitchFamily="34" charset="-120"/>
               </a:rPr>
-              <a:t>십: 1에서 5를 뺄 수 없어요.</a:t>
+              <a:t>617 − 254 = □</a:t>
             </a:r>
-            <a:endParaRPr lang="ko-KR" sz="3000" dirty="0"/>
-          </a:p>
-          <a:p>
-            <a:pPr eaLnBrk="0" algn="l" indent="0" marL="0">
-              <a:buNone/>
-            </a:pPr>
-            <a:r>
-              <a:rPr lang="ko-KR" altLang="en-US" sz="3000" dirty="0">
-                <a:solidFill>
-                  <a:srgbClr val="1F2937"/>
-                </a:solidFill>
-                <a:latin typeface="맑은 고딕" pitchFamily="34" charset="0"/>
-                <a:ea typeface="맑은 고딕" pitchFamily="34" charset="-122"/>
-                <a:cs typeface="맑은 고딕" pitchFamily="34" charset="-120"/>
-              </a:rPr>
-              <a:t>백에서 받아내려 11 − 5 = 6</a:t>
-            </a:r>
-            <a:endParaRPr lang="ko-KR" sz="3000" dirty="0"/>
+            <a:endParaRPr lang="ko-KR" sz="3400" dirty="0"/>
           </a:p>
         </p:txBody>
       </p:sp>
       <p:sp>
         <p:nvSpPr>
-          <p:cNvPr id="11" name="S06-stepno46"/>
+          <p:cNvPr id="12" name="S07-chip57"/>
           <p:cNvSpPr txBox="1"/>
           <p:nvPr/>
         </p:nvSpPr>
         <p:spPr>
           <a:xfrm>
-            <a:off x="548640" y="4386072"/>
-            <a:ext cx="548640" cy="548640"/>
+            <a:off x="548640" y="4265676"/>
+            <a:ext cx="566928" cy="566928"/>
           </a:xfrm>
-          <a:prstGeom prst="ellipse">
-            <a:avLst/>
+          <a:prstGeom prst="roundRect">
+            <a:avLst>
+              <a:gd name="adj" fmla="val 25806"/>
+            </a:avLst>
           </a:prstGeom>
           <a:solidFill>
             <a:srgbClr val="264653"/>
@@ -16131,7 +18240,7 @@
                 <a:ea typeface="맑은 고딕" pitchFamily="34" charset="-122"/>
                 <a:cs typeface="맑은 고딕" pitchFamily="34" charset="-120"/>
               </a:rPr>
-              <a:t>3</a:t>
+              <a:t>③</a:t>
             </a:r>
             <a:endParaRPr lang="ko-KR" sz="2400" dirty="0"/>
           </a:p>
@@ -16139,14 +18248,14 @@
       </p:sp>
       <p:sp>
         <p:nvSpPr>
-          <p:cNvPr id="12" name="S06-text47"/>
+          <p:cNvPr id="13" name="S07-eqtext58"/>
           <p:cNvSpPr txBox="1"/>
           <p:nvPr/>
         </p:nvSpPr>
         <p:spPr>
           <a:xfrm>
-            <a:off x="1325880" y="4386072"/>
-            <a:ext cx="5658307" cy="548640"/>
+            <a:off x="1344168" y="3977640"/>
+            <a:ext cx="4567428" cy="1143000"/>
           </a:xfrm>
           <a:prstGeom prst="rect">
             <a:avLst/>
@@ -16155,14 +18264,14 @@
           <a:ln/>
         </p:spPr>
         <p:txBody>
-          <a:bodyPr wrap="square" lIns="0" tIns="0" rIns="0" bIns="0" rtlCol="0" anchor="t"/>
+          <a:bodyPr wrap="square" lIns="0" tIns="0" rIns="0" bIns="0" rtlCol="0" anchor="ctr"/>
           <a:lstStyle/>
           <a:p>
             <a:pPr eaLnBrk="0" algn="l" indent="0" marL="0">
               <a:buNone/>
             </a:pPr>
             <a:r>
-              <a:rPr lang="ko-KR" altLang="en-US" sz="3000" dirty="0">
+              <a:rPr lang="ko-KR" altLang="en-US" sz="3400" b="1" dirty="0">
                 <a:solidFill>
                   <a:srgbClr val="1F2937"/>
                 </a:solidFill>
@@ -16170,9 +18279,9 @@
                 <a:ea typeface="맑은 고딕" pitchFamily="34" charset="-122"/>
                 <a:cs typeface="맑은 고딕" pitchFamily="34" charset="-120"/>
               </a:rPr>
-              <a:t>백: 3 − 1 = 2</a:t>
+              <a:t>732 − 458 = □</a:t>
             </a:r>
-            <a:endParaRPr lang="ko-KR" sz="3000" dirty="0"/>
+            <a:endParaRPr lang="ko-KR" sz="3400" dirty="0"/>
           </a:p>
         </p:txBody>
       </p:sp>
@@ -16218,2115 +18327,6 @@
             <a:pPr eaLnBrk="0" algn="r"/>
             <a:fld id="{F7021451-1387-4CA6-816F-3879F97B5CBC}" type="slidenum">
               <a:rPr b="0" lang="en-US"/>
-              <a:t>6</a:t>
-            </a:fld>
-            <a:endParaRPr lang="en-US"/>
-          </a:p>
-        </p:txBody>
-      </p:sp>
-    </p:spTree>
-  </p:cSld>
-  <p:clrMapOvr>
-    <a:masterClrMapping/>
-  </p:clrMapOvr>
-</p:sld>
-</file>
-
-<file path=ppt/slides/slide7.xml><?xml version="1.0" encoding="utf-8"?>
-<p:sld xmlns:a="http://schemas.openxmlformats.org/drawingml/2006/main" xmlns:r="http://schemas.openxmlformats.org/officeDocument/2006/relationships" xmlns:p="http://schemas.openxmlformats.org/presentationml/2006/main">
-  <p:cSld name="Slide 7">
-    <p:spTree>
-      <p:nvGrpSpPr>
-        <p:cNvPr id="1" name=""/>
-        <p:cNvGrpSpPr/>
-        <p:nvPr/>
-      </p:nvGrpSpPr>
-      <p:grpSpPr>
-        <a:xfrm>
-          <a:off x="0" y="0"/>
-          <a:ext cx="0" cy="0"/>
-          <a:chOff x="0" y="0"/>
-          <a:chExt cx="0" cy="0"/>
-        </a:xfrm>
-      </p:grpSpPr>
-      <p:sp>
-        <p:nvSpPr>
-          <p:cNvPr id="2" name="Text 0"/>
-          <p:cNvSpPr/>
-          <p:nvPr>
-            <p:ph idx="100" type="title" hasCustomPrompt="1"/>
-          </p:nvPr>
-        </p:nvSpPr>
-        <p:spPr>
-          <a:xfrm>
-            <a:off x="548640" y="320040"/>
-            <a:ext cx="11064240" cy="868680"/>
-          </a:xfrm>
-          <a:prstGeom prst="rect">
-            <a:avLst/>
-          </a:prstGeom>
-          <a:noFill/>
-          <a:ln/>
-        </p:spPr>
-        <p:txBody>
-          <a:bodyPr wrap="square" lIns="0" tIns="0" rIns="0" bIns="0" rtlCol="0" anchor="ctr"/>
-          <a:lstStyle/>
-          <a:p>
-            <a:pPr eaLnBrk="0" algn="l" indent="0" marL="0">
-              <a:buNone/>
-            </a:pPr>
-            <a:r>
-              <a:rPr lang="ko-KR" altLang="en-US" sz="4000" b="1" dirty="0">
-                <a:solidFill>
-                  <a:srgbClr val="1F2937"/>
-                </a:solidFill>
-                <a:latin typeface="맑은 고딕" pitchFamily="34" charset="0"/>
-                <a:ea typeface="맑은 고딕" pitchFamily="34" charset="-122"/>
-                <a:cs typeface="맑은 고딕" pitchFamily="34" charset="-120"/>
-              </a:rPr>
-              <a:t>세로셈 해 보기</a:t>
-            </a:r>
-            <a:endParaRPr lang="ko-KR" sz="4000" dirty="0"/>
-          </a:p>
-        </p:txBody>
-      </p:sp>
-      <p:sp>
-        <p:nvSpPr>
-          <p:cNvPr id="3" name="S07-card48"/>
-          <p:cNvSpPr/>
-          <p:nvPr/>
-        </p:nvSpPr>
-        <p:spPr>
-          <a:xfrm>
-            <a:off x="548640" y="5349240"/>
-            <a:ext cx="11091672" cy="868680"/>
-          </a:xfrm>
-          <a:prstGeom prst="roundRect">
-            <a:avLst>
-              <a:gd name="adj" fmla="val 12632"/>
-            </a:avLst>
-          </a:prstGeom>
-          <a:solidFill>
-            <a:srgbClr val="E6ECF4"/>
-          </a:solidFill>
-          <a:ln w="12700">
-            <a:solidFill>
-              <a:srgbClr val="E6ECF4"/>
-            </a:solidFill>
-            <a:prstDash val="solid"/>
-          </a:ln>
-        </p:spPr>
-      </p:sp>
-      <p:sp>
-        <p:nvSpPr>
-          <p:cNvPr id="4" name="S07-cardtext49"/>
-          <p:cNvSpPr txBox="1"/>
-          <p:nvPr/>
-        </p:nvSpPr>
-        <p:spPr>
-          <a:xfrm>
-            <a:off x="822960" y="5486400"/>
-            <a:ext cx="10543032" cy="594360"/>
-          </a:xfrm>
-          <a:prstGeom prst="rect">
-            <a:avLst/>
-          </a:prstGeom>
-          <a:noFill/>
-          <a:ln/>
-        </p:spPr>
-        <p:txBody>
-          <a:bodyPr wrap="square" lIns="0" tIns="0" rIns="0" bIns="0" rtlCol="0" anchor="ctr"/>
-          <a:lstStyle/>
-          <a:p>
-            <a:pPr eaLnBrk="0" indent="0" marL="0">
-              <a:spcAft>
-                <a:spcPts val="600"/>
-              </a:spcAft>
-              <a:buNone/>
-            </a:pPr>
-            <a:r>
-              <a:rPr lang="ko-KR" altLang="en-US" sz="3000" dirty="0">
-                <a:solidFill>
-                  <a:srgbClr val="1F2937"/>
-                </a:solidFill>
-                <a:latin typeface="맑은 고딕" pitchFamily="34" charset="0"/>
-                <a:ea typeface="맑은 고딕" pitchFamily="34" charset="-122"/>
-                <a:cs typeface="맑은 고딕" pitchFamily="34" charset="-120"/>
-              </a:rPr>
-              <a:t>뺄 수 없으면 윗자리 숫자를 1 작게 고쳐요.</a:t>
-            </a:r>
-            <a:endParaRPr lang="ko-KR" sz="3000" dirty="0"/>
-          </a:p>
-        </p:txBody>
-      </p:sp>
-      <p:sp>
-        <p:nvSpPr>
-          <p:cNvPr id="5" name="S07-card50"/>
-          <p:cNvSpPr/>
-          <p:nvPr/>
-        </p:nvSpPr>
-        <p:spPr>
-          <a:xfrm>
-            <a:off x="6277356" y="1325880"/>
-            <a:ext cx="5362956" cy="3794760"/>
-          </a:xfrm>
-          <a:prstGeom prst="roundRect">
-            <a:avLst>
-              <a:gd name="adj" fmla="val 2892"/>
-            </a:avLst>
-          </a:prstGeom>
-          <a:solidFill>
-            <a:srgbClr val="EAF3F1"/>
-          </a:solidFill>
-          <a:ln w="12700">
-            <a:solidFill>
-              <a:srgbClr val="EAF3F1"/>
-            </a:solidFill>
-            <a:prstDash val="solid"/>
-          </a:ln>
-        </p:spPr>
-      </p:sp>
-      <p:sp>
-        <p:nvSpPr>
-          <p:cNvPr id="6" name="S07-cardtext51"/>
-          <p:cNvSpPr txBox="1"/>
-          <p:nvPr/>
-        </p:nvSpPr>
-        <p:spPr>
-          <a:xfrm>
-            <a:off x="6551676" y="1463040"/>
-            <a:ext cx="4814316" cy="3520440"/>
-          </a:xfrm>
-          <a:prstGeom prst="rect">
-            <a:avLst/>
-          </a:prstGeom>
-          <a:noFill/>
-          <a:ln/>
-        </p:spPr>
-        <p:txBody>
-          <a:bodyPr wrap="square" lIns="0" tIns="0" rIns="0" bIns="0" rtlCol="0" anchor="t"/>
-          <a:lstStyle/>
-          <a:p>
-            <a:pPr eaLnBrk="0" indent="0" marL="0">
-              <a:spcAft>
-                <a:spcPts val="600"/>
-              </a:spcAft>
-              <a:buNone/>
-            </a:pPr>
-            <a:r>
-              <a:rPr lang="ko-KR" altLang="en-US" sz="3000" b="1" dirty="0">
-                <a:solidFill>
-                  <a:srgbClr val="1F2937"/>
-                </a:solidFill>
-                <a:latin typeface="맑은 고딕" pitchFamily="34" charset="0"/>
-                <a:ea typeface="맑은 고딕" pitchFamily="34" charset="-122"/>
-                <a:cs typeface="맑은 고딕" pitchFamily="34" charset="-120"/>
-              </a:rPr>
-              <a:t>③을 세로셈으로 해요</a:t>
-            </a:r>
-            <a:endParaRPr lang="ko-KR" sz="3000" dirty="0"/>
-          </a:p>
-        </p:txBody>
-      </p:sp>
-      <p:graphicFrame>
-        <p:nvGraphicFramePr>
-          <p:cNvPr id="8" name="S07-table52"/>
-          <p:cNvGraphicFramePr>
-            <a:graphicFrameLocks noGrp="1"/>
-          </p:cNvGraphicFramePr>
-          <p:nvPr>
-            <p:extLst>
-              <p:ext uri="{D42A27DB-BD31-4B8C-83A1-F6EECF244321}">
-                <p14:modId xmlns:p14="http://schemas.microsoft.com/office/powerpoint/2010/main" val="1579011935"/>
-              </p:ext>
-            </p:extLst>
-          </p:nvPr>
-        </p:nvGraphicFramePr>
-        <p:xfrm>
-          <a:off x="6947154" y="2103120"/>
-          <a:ext cx="4023360" cy="914400"/>
-        </p:xfrm>
-        <a:graphic>
-          <a:graphicData uri="http://schemas.openxmlformats.org/drawingml/2006/table">
-            <a:tbl>
-              <a:tblPr/>
-              <a:tblGrid>
-                <a:gridCol w="1005840"/>
-                <a:gridCol w="1005840"/>
-                <a:gridCol w="1005840"/>
-                <a:gridCol w="1005840"/>
-              </a:tblGrid>
-              <a:tr h="457200">
-                <a:tc>
-                  <a:txBody>
-                    <a:bodyPr/>
-                    <a:lstStyle/>
-                    <a:p>
-                      <a:pPr eaLnBrk="0" algn="ctr" indent="0" marL="0">
-                        <a:buNone/>
-                      </a:pPr>
-                      <a:endParaRPr lang="en-US" sz="2200" dirty="0">
-                        <a:latin typeface="맑은 고딕" charset="0"/>
-                        <a:ea typeface="맑은 고딕" charset="0"/>
-                        <a:cs typeface="맑은 고딕" charset="0"/>
-                      </a:endParaRPr>
-                    </a:p>
-                  </a:txBody>
-                  <a:tcPr marL="38100" marR="38100" marT="38100" marB="38100" anchor="ctr">
-                    <a:lnL w="12700" cap="flat" cmpd="sng" algn="ctr">
-                      <a:solidFill>
-                        <a:srgbClr val="94A3B8"/>
-                      </a:solidFill>
-                      <a:prstDash val="solid"/>
-                      <a:round/>
-                      <a:headEnd type="none" w="med" len="med"/>
-                      <a:tailEnd type="none" w="med" len="med"/>
-                    </a:lnL>
-                    <a:lnR w="12700" cap="flat" cmpd="sng" algn="ctr">
-                      <a:solidFill>
-                        <a:srgbClr val="94A3B8"/>
-                      </a:solidFill>
-                      <a:prstDash val="solid"/>
-                      <a:round/>
-                      <a:headEnd type="none" w="med" len="med"/>
-                      <a:tailEnd type="none" w="med" len="med"/>
-                    </a:lnR>
-                    <a:lnT w="12700" cap="flat" cmpd="sng" algn="ctr">
-                      <a:solidFill>
-                        <a:srgbClr val="94A3B8"/>
-                      </a:solidFill>
-                      <a:prstDash val="solid"/>
-                      <a:round/>
-                      <a:headEnd type="none" w="med" len="med"/>
-                      <a:tailEnd type="none" w="med" len="med"/>
-                    </a:lnT>
-                    <a:lnB w="12700" cap="flat" cmpd="sng" algn="ctr">
-                      <a:solidFill>
-                        <a:srgbClr val="94A3B8"/>
-                      </a:solidFill>
-                      <a:prstDash val="solid"/>
-                      <a:round/>
-                      <a:headEnd type="none" w="med" len="med"/>
-                      <a:tailEnd type="none" w="med" len="med"/>
-                    </a:lnB>
-                    <a:solidFill>
-                      <a:srgbClr val="EAF3F1"/>
-                    </a:solidFill>
-                  </a:tcPr>
-                </a:tc>
-                <a:tc>
-                  <a:txBody>
-                    <a:bodyPr/>
-                    <a:lstStyle/>
-                    <a:p>
-                      <a:pPr eaLnBrk="0" algn="ctr" indent="0" marL="0">
-                        <a:buNone/>
-                      </a:pPr>
-                      <a:r>
-                        <a:rPr lang="en-US" sz="2200" b="1" dirty="0">
-                          <a:solidFill>
-                            <a:srgbClr val="1F2937"/>
-                          </a:solidFill>
-                          <a:latin typeface="맑은 고딕" pitchFamily="34" charset="0"/>
-                          <a:ea typeface="맑은 고딕" pitchFamily="34" charset="-122"/>
-                          <a:cs typeface="맑은 고딕" pitchFamily="34" charset="-120"/>
-                        </a:rPr>
-                        <a:t>백</a:t>
-                      </a:r>
-                      <a:endParaRPr lang="en-US" sz="2200" dirty="0">
-                        <a:latin typeface="맑은 고딕" charset="0"/>
-                        <a:ea typeface="맑은 고딕" charset="0"/>
-                        <a:cs typeface="맑은 고딕" charset="0"/>
-                      </a:endParaRPr>
-                    </a:p>
-                  </a:txBody>
-                  <a:tcPr marL="38100" marR="38100" marT="38100" marB="38100" anchor="ctr">
-                    <a:lnL w="12700" cap="flat" cmpd="sng" algn="ctr">
-                      <a:solidFill>
-                        <a:srgbClr val="94A3B8"/>
-                      </a:solidFill>
-                      <a:prstDash val="solid"/>
-                      <a:round/>
-                      <a:headEnd type="none" w="med" len="med"/>
-                      <a:tailEnd type="none" w="med" len="med"/>
-                    </a:lnL>
-                    <a:lnR w="12700" cap="flat" cmpd="sng" algn="ctr">
-                      <a:solidFill>
-                        <a:srgbClr val="94A3B8"/>
-                      </a:solidFill>
-                      <a:prstDash val="solid"/>
-                      <a:round/>
-                      <a:headEnd type="none" w="med" len="med"/>
-                      <a:tailEnd type="none" w="med" len="med"/>
-                    </a:lnR>
-                    <a:lnT w="12700" cap="flat" cmpd="sng" algn="ctr">
-                      <a:solidFill>
-                        <a:srgbClr val="94A3B8"/>
-                      </a:solidFill>
-                      <a:prstDash val="solid"/>
-                      <a:round/>
-                      <a:headEnd type="none" w="med" len="med"/>
-                      <a:tailEnd type="none" w="med" len="med"/>
-                    </a:lnT>
-                    <a:lnB w="12700" cap="flat" cmpd="sng" algn="ctr">
-                      <a:solidFill>
-                        <a:srgbClr val="94A3B8"/>
-                      </a:solidFill>
-                      <a:prstDash val="solid"/>
-                      <a:round/>
-                      <a:headEnd type="none" w="med" len="med"/>
-                      <a:tailEnd type="none" w="med" len="med"/>
-                    </a:lnB>
-                    <a:solidFill>
-                      <a:srgbClr val="EAF3F1"/>
-                    </a:solidFill>
-                  </a:tcPr>
-                </a:tc>
-                <a:tc>
-                  <a:txBody>
-                    <a:bodyPr/>
-                    <a:lstStyle/>
-                    <a:p>
-                      <a:pPr eaLnBrk="0" algn="ctr" indent="0" marL="0">
-                        <a:buNone/>
-                      </a:pPr>
-                      <a:r>
-                        <a:rPr lang="en-US" sz="2200" b="1" dirty="0">
-                          <a:solidFill>
-                            <a:srgbClr val="1F2937"/>
-                          </a:solidFill>
-                          <a:latin typeface="맑은 고딕" pitchFamily="34" charset="0"/>
-                          <a:ea typeface="맑은 고딕" pitchFamily="34" charset="-122"/>
-                          <a:cs typeface="맑은 고딕" pitchFamily="34" charset="-120"/>
-                        </a:rPr>
-                        <a:t>십</a:t>
-                      </a:r>
-                      <a:endParaRPr lang="en-US" sz="2200" dirty="0">
-                        <a:latin typeface="맑은 고딕" charset="0"/>
-                        <a:ea typeface="맑은 고딕" charset="0"/>
-                        <a:cs typeface="맑은 고딕" charset="0"/>
-                      </a:endParaRPr>
-                    </a:p>
-                  </a:txBody>
-                  <a:tcPr marL="38100" marR="38100" marT="38100" marB="38100" anchor="ctr">
-                    <a:lnL w="12700" cap="flat" cmpd="sng" algn="ctr">
-                      <a:solidFill>
-                        <a:srgbClr val="94A3B8"/>
-                      </a:solidFill>
-                      <a:prstDash val="solid"/>
-                      <a:round/>
-                      <a:headEnd type="none" w="med" len="med"/>
-                      <a:tailEnd type="none" w="med" len="med"/>
-                    </a:lnL>
-                    <a:lnR w="12700" cap="flat" cmpd="sng" algn="ctr">
-                      <a:solidFill>
-                        <a:srgbClr val="94A3B8"/>
-                      </a:solidFill>
-                      <a:prstDash val="solid"/>
-                      <a:round/>
-                      <a:headEnd type="none" w="med" len="med"/>
-                      <a:tailEnd type="none" w="med" len="med"/>
-                    </a:lnR>
-                    <a:lnT w="12700" cap="flat" cmpd="sng" algn="ctr">
-                      <a:solidFill>
-                        <a:srgbClr val="94A3B8"/>
-                      </a:solidFill>
-                      <a:prstDash val="solid"/>
-                      <a:round/>
-                      <a:headEnd type="none" w="med" len="med"/>
-                      <a:tailEnd type="none" w="med" len="med"/>
-                    </a:lnT>
-                    <a:lnB w="12700" cap="flat" cmpd="sng" algn="ctr">
-                      <a:solidFill>
-                        <a:srgbClr val="94A3B8"/>
-                      </a:solidFill>
-                      <a:prstDash val="solid"/>
-                      <a:round/>
-                      <a:headEnd type="none" w="med" len="med"/>
-                      <a:tailEnd type="none" w="med" len="med"/>
-                    </a:lnB>
-                    <a:solidFill>
-                      <a:srgbClr val="EAF3F1"/>
-                    </a:solidFill>
-                  </a:tcPr>
-                </a:tc>
-                <a:tc>
-                  <a:txBody>
-                    <a:bodyPr/>
-                    <a:lstStyle/>
-                    <a:p>
-                      <a:pPr eaLnBrk="0" algn="ctr" indent="0" marL="0">
-                        <a:buNone/>
-                      </a:pPr>
-                      <a:r>
-                        <a:rPr lang="en-US" sz="2200" b="1" dirty="0">
-                          <a:solidFill>
-                            <a:srgbClr val="1F2937"/>
-                          </a:solidFill>
-                          <a:latin typeface="맑은 고딕" pitchFamily="34" charset="0"/>
-                          <a:ea typeface="맑은 고딕" pitchFamily="34" charset="-122"/>
-                          <a:cs typeface="맑은 고딕" pitchFamily="34" charset="-120"/>
-                        </a:rPr>
-                        <a:t>일</a:t>
-                      </a:r>
-                      <a:endParaRPr lang="en-US" sz="2200" dirty="0">
-                        <a:latin typeface="맑은 고딕" charset="0"/>
-                        <a:ea typeface="맑은 고딕" charset="0"/>
-                        <a:cs typeface="맑은 고딕" charset="0"/>
-                      </a:endParaRPr>
-                    </a:p>
-                  </a:txBody>
-                  <a:tcPr marL="38100" marR="38100" marT="38100" marB="38100" anchor="ctr">
-                    <a:lnL w="12700" cap="flat" cmpd="sng" algn="ctr">
-                      <a:solidFill>
-                        <a:srgbClr val="94A3B8"/>
-                      </a:solidFill>
-                      <a:prstDash val="solid"/>
-                      <a:round/>
-                      <a:headEnd type="none" w="med" len="med"/>
-                      <a:tailEnd type="none" w="med" len="med"/>
-                    </a:lnL>
-                    <a:lnR w="12700" cap="flat" cmpd="sng" algn="ctr">
-                      <a:solidFill>
-                        <a:srgbClr val="94A3B8"/>
-                      </a:solidFill>
-                      <a:prstDash val="solid"/>
-                      <a:round/>
-                      <a:headEnd type="none" w="med" len="med"/>
-                      <a:tailEnd type="none" w="med" len="med"/>
-                    </a:lnR>
-                    <a:lnT w="12700" cap="flat" cmpd="sng" algn="ctr">
-                      <a:solidFill>
-                        <a:srgbClr val="94A3B8"/>
-                      </a:solidFill>
-                      <a:prstDash val="solid"/>
-                      <a:round/>
-                      <a:headEnd type="none" w="med" len="med"/>
-                      <a:tailEnd type="none" w="med" len="med"/>
-                    </a:lnT>
-                    <a:lnB w="12700" cap="flat" cmpd="sng" algn="ctr">
-                      <a:solidFill>
-                        <a:srgbClr val="94A3B8"/>
-                      </a:solidFill>
-                      <a:prstDash val="solid"/>
-                      <a:round/>
-                      <a:headEnd type="none" w="med" len="med"/>
-                      <a:tailEnd type="none" w="med" len="med"/>
-                    </a:lnB>
-                    <a:solidFill>
-                      <a:srgbClr val="EAF3F1"/>
-                    </a:solidFill>
-                  </a:tcPr>
-                </a:tc>
-              </a:tr>
-              <a:tr h="457200">
-                <a:tc>
-                  <a:txBody>
-                    <a:bodyPr/>
-                    <a:lstStyle/>
-                    <a:p>
-                      <a:pPr eaLnBrk="0" algn="ctr" indent="0" marL="0">
-                        <a:buNone/>
-                      </a:pPr>
-                      <a:endParaRPr lang="en-US" sz="2200" dirty="0">
-                        <a:latin typeface="맑은 고딕" charset="0"/>
-                        <a:ea typeface="맑은 고딕" charset="0"/>
-                        <a:cs typeface="맑은 고딕" charset="0"/>
-                      </a:endParaRPr>
-                    </a:p>
-                  </a:txBody>
-                  <a:tcPr marL="38100" marR="38100" marT="38100" marB="38100" anchor="ctr">
-                    <a:lnL w="12700" cap="flat" cmpd="sng" algn="ctr">
-                      <a:solidFill>
-                        <a:srgbClr val="94A3B8"/>
-                      </a:solidFill>
-                      <a:prstDash val="solid"/>
-                      <a:round/>
-                      <a:headEnd type="none" w="med" len="med"/>
-                      <a:tailEnd type="none" w="med" len="med"/>
-                    </a:lnL>
-                    <a:lnR w="12700" cap="flat" cmpd="sng" algn="ctr">
-                      <a:solidFill>
-                        <a:srgbClr val="94A3B8"/>
-                      </a:solidFill>
-                      <a:prstDash val="solid"/>
-                      <a:round/>
-                      <a:headEnd type="none" w="med" len="med"/>
-                      <a:tailEnd type="none" w="med" len="med"/>
-                    </a:lnR>
-                    <a:lnT w="12700" cap="flat" cmpd="sng" algn="ctr">
-                      <a:solidFill>
-                        <a:srgbClr val="94A3B8"/>
-                      </a:solidFill>
-                      <a:prstDash val="solid"/>
-                      <a:round/>
-                      <a:headEnd type="none" w="med" len="med"/>
-                      <a:tailEnd type="none" w="med" len="med"/>
-                    </a:lnT>
-                    <a:lnB w="12700" cap="flat" cmpd="sng" algn="ctr">
-                      <a:solidFill>
-                        <a:srgbClr val="94A3B8"/>
-                      </a:solidFill>
-                      <a:prstDash val="solid"/>
-                      <a:round/>
-                      <a:headEnd type="none" w="med" len="med"/>
-                      <a:tailEnd type="none" w="med" len="med"/>
-                    </a:lnB>
-                    <a:solidFill>
-                      <a:srgbClr val="FFFFFF"/>
-                    </a:solidFill>
-                  </a:tcPr>
-                </a:tc>
-                <a:tc>
-                  <a:txBody>
-                    <a:bodyPr/>
-                    <a:lstStyle/>
-                    <a:p>
-                      <a:pPr eaLnBrk="0" algn="ctr" indent="0" marL="0">
-                        <a:buNone/>
-                      </a:pPr>
-                      <a:r>
-                        <a:rPr lang="en-US" sz="2200" dirty="0">
-                          <a:solidFill>
-                            <a:srgbClr val="1F2937"/>
-                          </a:solidFill>
-                          <a:latin typeface="맑은 고딕" pitchFamily="34" charset="0"/>
-                          <a:ea typeface="맑은 고딕" pitchFamily="34" charset="-122"/>
-                          <a:cs typeface="맑은 고딕" pitchFamily="34" charset="-120"/>
-                        </a:rPr>
-                        <a:t>□</a:t>
-                      </a:r>
-                      <a:endParaRPr lang="en-US" sz="2200" dirty="0">
-                        <a:latin typeface="맑은 고딕" charset="0"/>
-                        <a:ea typeface="맑은 고딕" charset="0"/>
-                        <a:cs typeface="맑은 고딕" charset="0"/>
-                      </a:endParaRPr>
-                    </a:p>
-                  </a:txBody>
-                  <a:tcPr marL="38100" marR="38100" marT="38100" marB="38100" anchor="ctr">
-                    <a:lnL w="12700" cap="flat" cmpd="sng" algn="ctr">
-                      <a:solidFill>
-                        <a:srgbClr val="94A3B8"/>
-                      </a:solidFill>
-                      <a:prstDash val="solid"/>
-                      <a:round/>
-                      <a:headEnd type="none" w="med" len="med"/>
-                      <a:tailEnd type="none" w="med" len="med"/>
-                    </a:lnL>
-                    <a:lnR w="12700" cap="flat" cmpd="sng" algn="ctr">
-                      <a:solidFill>
-                        <a:srgbClr val="94A3B8"/>
-                      </a:solidFill>
-                      <a:prstDash val="solid"/>
-                      <a:round/>
-                      <a:headEnd type="none" w="med" len="med"/>
-                      <a:tailEnd type="none" w="med" len="med"/>
-                    </a:lnR>
-                    <a:lnT w="12700" cap="flat" cmpd="sng" algn="ctr">
-                      <a:solidFill>
-                        <a:srgbClr val="94A3B8"/>
-                      </a:solidFill>
-                      <a:prstDash val="solid"/>
-                      <a:round/>
-                      <a:headEnd type="none" w="med" len="med"/>
-                      <a:tailEnd type="none" w="med" len="med"/>
-                    </a:lnT>
-                    <a:lnB w="12700" cap="flat" cmpd="sng" algn="ctr">
-                      <a:solidFill>
-                        <a:srgbClr val="94A3B8"/>
-                      </a:solidFill>
-                      <a:prstDash val="solid"/>
-                      <a:round/>
-                      <a:headEnd type="none" w="med" len="med"/>
-                      <a:tailEnd type="none" w="med" len="med"/>
-                    </a:lnB>
-                    <a:solidFill>
-                      <a:srgbClr val="FFFFFF"/>
-                    </a:solidFill>
-                  </a:tcPr>
-                </a:tc>
-                <a:tc>
-                  <a:txBody>
-                    <a:bodyPr/>
-                    <a:lstStyle/>
-                    <a:p>
-                      <a:pPr eaLnBrk="0" algn="ctr" indent="0" marL="0">
-                        <a:buNone/>
-                      </a:pPr>
-                      <a:r>
-                        <a:rPr lang="en-US" sz="2200" dirty="0">
-                          <a:solidFill>
-                            <a:srgbClr val="1F2937"/>
-                          </a:solidFill>
-                          <a:latin typeface="맑은 고딕" pitchFamily="34" charset="0"/>
-                          <a:ea typeface="맑은 고딕" pitchFamily="34" charset="-122"/>
-                          <a:cs typeface="맑은 고딕" pitchFamily="34" charset="-120"/>
-                        </a:rPr>
-                        <a:t>□</a:t>
-                      </a:r>
-                      <a:endParaRPr lang="en-US" sz="2200" dirty="0">
-                        <a:latin typeface="맑은 고딕" charset="0"/>
-                        <a:ea typeface="맑은 고딕" charset="0"/>
-                        <a:cs typeface="맑은 고딕" charset="0"/>
-                      </a:endParaRPr>
-                    </a:p>
-                  </a:txBody>
-                  <a:tcPr marL="38100" marR="38100" marT="38100" marB="38100" anchor="ctr">
-                    <a:lnL w="12700" cap="flat" cmpd="sng" algn="ctr">
-                      <a:solidFill>
-                        <a:srgbClr val="94A3B8"/>
-                      </a:solidFill>
-                      <a:prstDash val="solid"/>
-                      <a:round/>
-                      <a:headEnd type="none" w="med" len="med"/>
-                      <a:tailEnd type="none" w="med" len="med"/>
-                    </a:lnL>
-                    <a:lnR w="12700" cap="flat" cmpd="sng" algn="ctr">
-                      <a:solidFill>
-                        <a:srgbClr val="94A3B8"/>
-                      </a:solidFill>
-                      <a:prstDash val="solid"/>
-                      <a:round/>
-                      <a:headEnd type="none" w="med" len="med"/>
-                      <a:tailEnd type="none" w="med" len="med"/>
-                    </a:lnR>
-                    <a:lnT w="12700" cap="flat" cmpd="sng" algn="ctr">
-                      <a:solidFill>
-                        <a:srgbClr val="94A3B8"/>
-                      </a:solidFill>
-                      <a:prstDash val="solid"/>
-                      <a:round/>
-                      <a:headEnd type="none" w="med" len="med"/>
-                      <a:tailEnd type="none" w="med" len="med"/>
-                    </a:lnT>
-                    <a:lnB w="12700" cap="flat" cmpd="sng" algn="ctr">
-                      <a:solidFill>
-                        <a:srgbClr val="94A3B8"/>
-                      </a:solidFill>
-                      <a:prstDash val="solid"/>
-                      <a:round/>
-                      <a:headEnd type="none" w="med" len="med"/>
-                      <a:tailEnd type="none" w="med" len="med"/>
-                    </a:lnB>
-                    <a:solidFill>
-                      <a:srgbClr val="FFFFFF"/>
-                    </a:solidFill>
-                  </a:tcPr>
-                </a:tc>
-                <a:tc>
-                  <a:txBody>
-                    <a:bodyPr/>
-                    <a:lstStyle/>
-                    <a:p>
-                      <a:pPr eaLnBrk="0" algn="ctr" indent="0" marL="0">
-                        <a:buNone/>
-                      </a:pPr>
-                      <a:endParaRPr lang="en-US" sz="2200" dirty="0">
-                        <a:latin typeface="맑은 고딕" charset="0"/>
-                        <a:ea typeface="맑은 고딕" charset="0"/>
-                        <a:cs typeface="맑은 고딕" charset="0"/>
-                      </a:endParaRPr>
-                    </a:p>
-                  </a:txBody>
-                  <a:tcPr marL="38100" marR="38100" marT="38100" marB="38100" anchor="ctr">
-                    <a:lnL w="12700" cap="flat" cmpd="sng" algn="ctr">
-                      <a:solidFill>
-                        <a:srgbClr val="94A3B8"/>
-                      </a:solidFill>
-                      <a:prstDash val="solid"/>
-                      <a:round/>
-                      <a:headEnd type="none" w="med" len="med"/>
-                      <a:tailEnd type="none" w="med" len="med"/>
-                    </a:lnL>
-                    <a:lnR w="12700" cap="flat" cmpd="sng" algn="ctr">
-                      <a:solidFill>
-                        <a:srgbClr val="94A3B8"/>
-                      </a:solidFill>
-                      <a:prstDash val="solid"/>
-                      <a:round/>
-                      <a:headEnd type="none" w="med" len="med"/>
-                      <a:tailEnd type="none" w="med" len="med"/>
-                    </a:lnR>
-                    <a:lnT w="12700" cap="flat" cmpd="sng" algn="ctr">
-                      <a:solidFill>
-                        <a:srgbClr val="94A3B8"/>
-                      </a:solidFill>
-                      <a:prstDash val="solid"/>
-                      <a:round/>
-                      <a:headEnd type="none" w="med" len="med"/>
-                      <a:tailEnd type="none" w="med" len="med"/>
-                    </a:lnT>
-                    <a:lnB w="12700" cap="flat" cmpd="sng" algn="ctr">
-                      <a:solidFill>
-                        <a:srgbClr val="94A3B8"/>
-                      </a:solidFill>
-                      <a:prstDash val="solid"/>
-                      <a:round/>
-                      <a:headEnd type="none" w="med" len="med"/>
-                      <a:tailEnd type="none" w="med" len="med"/>
-                    </a:lnB>
-                    <a:solidFill>
-                      <a:srgbClr val="FFFFFF"/>
-                    </a:solidFill>
-                  </a:tcPr>
-                </a:tc>
-              </a:tr>
-              <a:tr h="457200">
-                <a:tc>
-                  <a:txBody>
-                    <a:bodyPr/>
-                    <a:lstStyle/>
-                    <a:p>
-                      <a:pPr eaLnBrk="0" algn="ctr" indent="0" marL="0">
-                        <a:buNone/>
-                      </a:pPr>
-                      <a:endParaRPr lang="en-US" sz="2200" dirty="0">
-                        <a:latin typeface="맑은 고딕" charset="0"/>
-                        <a:ea typeface="맑은 고딕" charset="0"/>
-                        <a:cs typeface="맑은 고딕" charset="0"/>
-                      </a:endParaRPr>
-                    </a:p>
-                  </a:txBody>
-                  <a:tcPr marL="38100" marR="38100" marT="38100" marB="38100" anchor="ctr">
-                    <a:lnL w="12700" cap="flat" cmpd="sng" algn="ctr">
-                      <a:solidFill>
-                        <a:srgbClr val="94A3B8"/>
-                      </a:solidFill>
-                      <a:prstDash val="solid"/>
-                      <a:round/>
-                      <a:headEnd type="none" w="med" len="med"/>
-                      <a:tailEnd type="none" w="med" len="med"/>
-                    </a:lnL>
-                    <a:lnR w="12700" cap="flat" cmpd="sng" algn="ctr">
-                      <a:solidFill>
-                        <a:srgbClr val="94A3B8"/>
-                      </a:solidFill>
-                      <a:prstDash val="solid"/>
-                      <a:round/>
-                      <a:headEnd type="none" w="med" len="med"/>
-                      <a:tailEnd type="none" w="med" len="med"/>
-                    </a:lnR>
-                    <a:lnT w="12700" cap="flat" cmpd="sng" algn="ctr">
-                      <a:solidFill>
-                        <a:srgbClr val="94A3B8"/>
-                      </a:solidFill>
-                      <a:prstDash val="solid"/>
-                      <a:round/>
-                      <a:headEnd type="none" w="med" len="med"/>
-                      <a:tailEnd type="none" w="med" len="med"/>
-                    </a:lnT>
-                    <a:lnB w="12700" cap="flat" cmpd="sng" algn="ctr">
-                      <a:solidFill>
-                        <a:srgbClr val="94A3B8"/>
-                      </a:solidFill>
-                      <a:prstDash val="solid"/>
-                      <a:round/>
-                      <a:headEnd type="none" w="med" len="med"/>
-                      <a:tailEnd type="none" w="med" len="med"/>
-                    </a:lnB>
-                    <a:solidFill>
-                      <a:srgbClr val="FFFFFF"/>
-                    </a:solidFill>
-                  </a:tcPr>
-                </a:tc>
-                <a:tc>
-                  <a:txBody>
-                    <a:bodyPr/>
-                    <a:lstStyle/>
-                    <a:p>
-                      <a:pPr eaLnBrk="0" algn="ctr" indent="0" marL="0">
-                        <a:buNone/>
-                      </a:pPr>
-                      <a:endParaRPr lang="en-US" sz="2200" dirty="0">
-                        <a:latin typeface="맑은 고딕" charset="0"/>
-                        <a:ea typeface="맑은 고딕" charset="0"/>
-                        <a:cs typeface="맑은 고딕" charset="0"/>
-                      </a:endParaRPr>
-                    </a:p>
-                  </a:txBody>
-                  <a:tcPr marL="38100" marR="38100" marT="38100" marB="38100" anchor="ctr">
-                    <a:lnL w="12700" cap="flat" cmpd="sng" algn="ctr">
-                      <a:solidFill>
-                        <a:srgbClr val="94A3B8"/>
-                      </a:solidFill>
-                      <a:prstDash val="solid"/>
-                      <a:round/>
-                      <a:headEnd type="none" w="med" len="med"/>
-                      <a:tailEnd type="none" w="med" len="med"/>
-                    </a:lnL>
-                    <a:lnR w="12700" cap="flat" cmpd="sng" algn="ctr">
-                      <a:solidFill>
-                        <a:srgbClr val="94A3B8"/>
-                      </a:solidFill>
-                      <a:prstDash val="solid"/>
-                      <a:round/>
-                      <a:headEnd type="none" w="med" len="med"/>
-                      <a:tailEnd type="none" w="med" len="med"/>
-                    </a:lnR>
-                    <a:lnT w="12700" cap="flat" cmpd="sng" algn="ctr">
-                      <a:solidFill>
-                        <a:srgbClr val="94A3B8"/>
-                      </a:solidFill>
-                      <a:prstDash val="solid"/>
-                      <a:round/>
-                      <a:headEnd type="none" w="med" len="med"/>
-                      <a:tailEnd type="none" w="med" len="med"/>
-                    </a:lnT>
-                    <a:lnB w="12700" cap="flat" cmpd="sng" algn="ctr">
-                      <a:solidFill>
-                        <a:srgbClr val="94A3B8"/>
-                      </a:solidFill>
-                      <a:prstDash val="solid"/>
-                      <a:round/>
-                      <a:headEnd type="none" w="med" len="med"/>
-                      <a:tailEnd type="none" w="med" len="med"/>
-                    </a:lnB>
-                    <a:solidFill>
-                      <a:srgbClr val="FFFFFF"/>
-                    </a:solidFill>
-                  </a:tcPr>
-                </a:tc>
-                <a:tc>
-                  <a:txBody>
-                    <a:bodyPr/>
-                    <a:lstStyle/>
-                    <a:p>
-                      <a:pPr eaLnBrk="0" algn="ctr" indent="0" marL="0">
-                        <a:buNone/>
-                      </a:pPr>
-                      <a:r>
-                        <a:rPr lang="en-US" sz="2200" dirty="0">
-                          <a:solidFill>
-                            <a:srgbClr val="1F2937"/>
-                          </a:solidFill>
-                          <a:latin typeface="맑은 고딕" pitchFamily="34" charset="0"/>
-                          <a:ea typeface="맑은 고딕" pitchFamily="34" charset="-122"/>
-                          <a:cs typeface="맑은 고딕" pitchFamily="34" charset="-120"/>
-                        </a:rPr>
-                        <a:t>□</a:t>
-                      </a:r>
-                      <a:endParaRPr lang="en-US" sz="2200" dirty="0">
-                        <a:latin typeface="맑은 고딕" charset="0"/>
-                        <a:ea typeface="맑은 고딕" charset="0"/>
-                        <a:cs typeface="맑은 고딕" charset="0"/>
-                      </a:endParaRPr>
-                    </a:p>
-                  </a:txBody>
-                  <a:tcPr marL="38100" marR="38100" marT="38100" marB="38100" anchor="ctr">
-                    <a:lnL w="12700" cap="flat" cmpd="sng" algn="ctr">
-                      <a:solidFill>
-                        <a:srgbClr val="94A3B8"/>
-                      </a:solidFill>
-                      <a:prstDash val="solid"/>
-                      <a:round/>
-                      <a:headEnd type="none" w="med" len="med"/>
-                      <a:tailEnd type="none" w="med" len="med"/>
-                    </a:lnL>
-                    <a:lnR w="12700" cap="flat" cmpd="sng" algn="ctr">
-                      <a:solidFill>
-                        <a:srgbClr val="94A3B8"/>
-                      </a:solidFill>
-                      <a:prstDash val="solid"/>
-                      <a:round/>
-                      <a:headEnd type="none" w="med" len="med"/>
-                      <a:tailEnd type="none" w="med" len="med"/>
-                    </a:lnR>
-                    <a:lnT w="12700" cap="flat" cmpd="sng" algn="ctr">
-                      <a:solidFill>
-                        <a:srgbClr val="94A3B8"/>
-                      </a:solidFill>
-                      <a:prstDash val="solid"/>
-                      <a:round/>
-                      <a:headEnd type="none" w="med" len="med"/>
-                      <a:tailEnd type="none" w="med" len="med"/>
-                    </a:lnT>
-                    <a:lnB w="12700" cap="flat" cmpd="sng" algn="ctr">
-                      <a:solidFill>
-                        <a:srgbClr val="94A3B8"/>
-                      </a:solidFill>
-                      <a:prstDash val="solid"/>
-                      <a:round/>
-                      <a:headEnd type="none" w="med" len="med"/>
-                      <a:tailEnd type="none" w="med" len="med"/>
-                    </a:lnB>
-                    <a:solidFill>
-                      <a:srgbClr val="FFFFFF"/>
-                    </a:solidFill>
-                  </a:tcPr>
-                </a:tc>
-                <a:tc>
-                  <a:txBody>
-                    <a:bodyPr/>
-                    <a:lstStyle/>
-                    <a:p>
-                      <a:pPr eaLnBrk="0" algn="ctr" indent="0" marL="0">
-                        <a:buNone/>
-                      </a:pPr>
-                      <a:r>
-                        <a:rPr lang="en-US" sz="2200" dirty="0">
-                          <a:solidFill>
-                            <a:srgbClr val="1F2937"/>
-                          </a:solidFill>
-                          <a:latin typeface="맑은 고딕" pitchFamily="34" charset="0"/>
-                          <a:ea typeface="맑은 고딕" pitchFamily="34" charset="-122"/>
-                          <a:cs typeface="맑은 고딕" pitchFamily="34" charset="-120"/>
-                        </a:rPr>
-                        <a:t>□</a:t>
-                      </a:r>
-                      <a:endParaRPr lang="en-US" sz="2200" dirty="0">
-                        <a:latin typeface="맑은 고딕" charset="0"/>
-                        <a:ea typeface="맑은 고딕" charset="0"/>
-                        <a:cs typeface="맑은 고딕" charset="0"/>
-                      </a:endParaRPr>
-                    </a:p>
-                  </a:txBody>
-                  <a:tcPr marL="38100" marR="38100" marT="38100" marB="38100" anchor="ctr">
-                    <a:lnL w="12700" cap="flat" cmpd="sng" algn="ctr">
-                      <a:solidFill>
-                        <a:srgbClr val="94A3B8"/>
-                      </a:solidFill>
-                      <a:prstDash val="solid"/>
-                      <a:round/>
-                      <a:headEnd type="none" w="med" len="med"/>
-                      <a:tailEnd type="none" w="med" len="med"/>
-                    </a:lnL>
-                    <a:lnR w="12700" cap="flat" cmpd="sng" algn="ctr">
-                      <a:solidFill>
-                        <a:srgbClr val="94A3B8"/>
-                      </a:solidFill>
-                      <a:prstDash val="solid"/>
-                      <a:round/>
-                      <a:headEnd type="none" w="med" len="med"/>
-                      <a:tailEnd type="none" w="med" len="med"/>
-                    </a:lnR>
-                    <a:lnT w="12700" cap="flat" cmpd="sng" algn="ctr">
-                      <a:solidFill>
-                        <a:srgbClr val="94A3B8"/>
-                      </a:solidFill>
-                      <a:prstDash val="solid"/>
-                      <a:round/>
-                      <a:headEnd type="none" w="med" len="med"/>
-                      <a:tailEnd type="none" w="med" len="med"/>
-                    </a:lnT>
-                    <a:lnB w="12700" cap="flat" cmpd="sng" algn="ctr">
-                      <a:solidFill>
-                        <a:srgbClr val="94A3B8"/>
-                      </a:solidFill>
-                      <a:prstDash val="solid"/>
-                      <a:round/>
-                      <a:headEnd type="none" w="med" len="med"/>
-                      <a:tailEnd type="none" w="med" len="med"/>
-                    </a:lnB>
-                    <a:solidFill>
-                      <a:srgbClr val="FFFFFF"/>
-                    </a:solidFill>
-                  </a:tcPr>
-                </a:tc>
-              </a:tr>
-              <a:tr h="457200">
-                <a:tc>
-                  <a:txBody>
-                    <a:bodyPr/>
-                    <a:lstStyle/>
-                    <a:p>
-                      <a:pPr eaLnBrk="0" algn="ctr" indent="0" marL="0">
-                        <a:buNone/>
-                      </a:pPr>
-                      <a:endParaRPr lang="en-US" sz="2200" dirty="0">
-                        <a:latin typeface="맑은 고딕" charset="0"/>
-                        <a:ea typeface="맑은 고딕" charset="0"/>
-                        <a:cs typeface="맑은 고딕" charset="0"/>
-                      </a:endParaRPr>
-                    </a:p>
-                  </a:txBody>
-                  <a:tcPr marL="38100" marR="38100" marT="38100" marB="38100" anchor="ctr">
-                    <a:lnL w="12700" cap="flat" cmpd="sng" algn="ctr">
-                      <a:solidFill>
-                        <a:srgbClr val="94A3B8"/>
-                      </a:solidFill>
-                      <a:prstDash val="solid"/>
-                      <a:round/>
-                      <a:headEnd type="none" w="med" len="med"/>
-                      <a:tailEnd type="none" w="med" len="med"/>
-                    </a:lnL>
-                    <a:lnR w="12700" cap="flat" cmpd="sng" algn="ctr">
-                      <a:solidFill>
-                        <a:srgbClr val="94A3B8"/>
-                      </a:solidFill>
-                      <a:prstDash val="solid"/>
-                      <a:round/>
-                      <a:headEnd type="none" w="med" len="med"/>
-                      <a:tailEnd type="none" w="med" len="med"/>
-                    </a:lnR>
-                    <a:lnT w="12700" cap="flat" cmpd="sng" algn="ctr">
-                      <a:solidFill>
-                        <a:srgbClr val="94A3B8"/>
-                      </a:solidFill>
-                      <a:prstDash val="solid"/>
-                      <a:round/>
-                      <a:headEnd type="none" w="med" len="med"/>
-                      <a:tailEnd type="none" w="med" len="med"/>
-                    </a:lnT>
-                    <a:lnB w="12700" cap="flat" cmpd="sng" algn="ctr">
-                      <a:solidFill>
-                        <a:srgbClr val="94A3B8"/>
-                      </a:solidFill>
-                      <a:prstDash val="solid"/>
-                      <a:round/>
-                      <a:headEnd type="none" w="med" len="med"/>
-                      <a:tailEnd type="none" w="med" len="med"/>
-                    </a:lnB>
-                    <a:solidFill>
-                      <a:srgbClr val="FFFFFF"/>
-                    </a:solidFill>
-                  </a:tcPr>
-                </a:tc>
-                <a:tc>
-                  <a:txBody>
-                    <a:bodyPr/>
-                    <a:lstStyle/>
-                    <a:p>
-                      <a:pPr eaLnBrk="0" algn="ctr" indent="0" marL="0">
-                        <a:buNone/>
-                      </a:pPr>
-                      <a:r>
-                        <a:rPr lang="en-US" sz="2200" dirty="0">
-                          <a:solidFill>
-                            <a:srgbClr val="1F2937"/>
-                          </a:solidFill>
-                          <a:latin typeface="맑은 고딕" pitchFamily="34" charset="0"/>
-                          <a:ea typeface="맑은 고딕" pitchFamily="34" charset="-122"/>
-                          <a:cs typeface="맑은 고딕" pitchFamily="34" charset="-120"/>
-                        </a:rPr>
-                        <a:t>7</a:t>
-                      </a:r>
-                      <a:endParaRPr lang="en-US" sz="2200" dirty="0">
-                        <a:latin typeface="맑은 고딕" charset="0"/>
-                        <a:ea typeface="맑은 고딕" charset="0"/>
-                        <a:cs typeface="맑은 고딕" charset="0"/>
-                      </a:endParaRPr>
-                    </a:p>
-                  </a:txBody>
-                  <a:tcPr marL="38100" marR="38100" marT="38100" marB="38100" anchor="ctr">
-                    <a:lnL w="12700" cap="flat" cmpd="sng" algn="ctr">
-                      <a:solidFill>
-                        <a:srgbClr val="94A3B8"/>
-                      </a:solidFill>
-                      <a:prstDash val="solid"/>
-                      <a:round/>
-                      <a:headEnd type="none" w="med" len="med"/>
-                      <a:tailEnd type="none" w="med" len="med"/>
-                    </a:lnL>
-                    <a:lnR w="12700" cap="flat" cmpd="sng" algn="ctr">
-                      <a:solidFill>
-                        <a:srgbClr val="94A3B8"/>
-                      </a:solidFill>
-                      <a:prstDash val="solid"/>
-                      <a:round/>
-                      <a:headEnd type="none" w="med" len="med"/>
-                      <a:tailEnd type="none" w="med" len="med"/>
-                    </a:lnR>
-                    <a:lnT w="12700" cap="flat" cmpd="sng" algn="ctr">
-                      <a:solidFill>
-                        <a:srgbClr val="94A3B8"/>
-                      </a:solidFill>
-                      <a:prstDash val="solid"/>
-                      <a:round/>
-                      <a:headEnd type="none" w="med" len="med"/>
-                      <a:tailEnd type="none" w="med" len="med"/>
-                    </a:lnT>
-                    <a:lnB w="12700" cap="flat" cmpd="sng" algn="ctr">
-                      <a:solidFill>
-                        <a:srgbClr val="94A3B8"/>
-                      </a:solidFill>
-                      <a:prstDash val="solid"/>
-                      <a:round/>
-                      <a:headEnd type="none" w="med" len="med"/>
-                      <a:tailEnd type="none" w="med" len="med"/>
-                    </a:lnB>
-                    <a:solidFill>
-                      <a:srgbClr val="FFFFFF"/>
-                    </a:solidFill>
-                  </a:tcPr>
-                </a:tc>
-                <a:tc>
-                  <a:txBody>
-                    <a:bodyPr/>
-                    <a:lstStyle/>
-                    <a:p>
-                      <a:pPr eaLnBrk="0" algn="ctr" indent="0" marL="0">
-                        <a:buNone/>
-                      </a:pPr>
-                      <a:r>
-                        <a:rPr lang="en-US" sz="2200" dirty="0">
-                          <a:solidFill>
-                            <a:srgbClr val="1F2937"/>
-                          </a:solidFill>
-                          <a:latin typeface="맑은 고딕" pitchFamily="34" charset="0"/>
-                          <a:ea typeface="맑은 고딕" pitchFamily="34" charset="-122"/>
-                          <a:cs typeface="맑은 고딕" pitchFamily="34" charset="-120"/>
-                        </a:rPr>
-                        <a:t>3</a:t>
-                      </a:r>
-                      <a:endParaRPr lang="en-US" sz="2200" dirty="0">
-                        <a:latin typeface="맑은 고딕" charset="0"/>
-                        <a:ea typeface="맑은 고딕" charset="0"/>
-                        <a:cs typeface="맑은 고딕" charset="0"/>
-                      </a:endParaRPr>
-                    </a:p>
-                  </a:txBody>
-                  <a:tcPr marL="38100" marR="38100" marT="38100" marB="38100" anchor="ctr">
-                    <a:lnL w="12700" cap="flat" cmpd="sng" algn="ctr">
-                      <a:solidFill>
-                        <a:srgbClr val="94A3B8"/>
-                      </a:solidFill>
-                      <a:prstDash val="solid"/>
-                      <a:round/>
-                      <a:headEnd type="none" w="med" len="med"/>
-                      <a:tailEnd type="none" w="med" len="med"/>
-                    </a:lnL>
-                    <a:lnR w="12700" cap="flat" cmpd="sng" algn="ctr">
-                      <a:solidFill>
-                        <a:srgbClr val="94A3B8"/>
-                      </a:solidFill>
-                      <a:prstDash val="solid"/>
-                      <a:round/>
-                      <a:headEnd type="none" w="med" len="med"/>
-                      <a:tailEnd type="none" w="med" len="med"/>
-                    </a:lnR>
-                    <a:lnT w="12700" cap="flat" cmpd="sng" algn="ctr">
-                      <a:solidFill>
-                        <a:srgbClr val="94A3B8"/>
-                      </a:solidFill>
-                      <a:prstDash val="solid"/>
-                      <a:round/>
-                      <a:headEnd type="none" w="med" len="med"/>
-                      <a:tailEnd type="none" w="med" len="med"/>
-                    </a:lnT>
-                    <a:lnB w="12700" cap="flat" cmpd="sng" algn="ctr">
-                      <a:solidFill>
-                        <a:srgbClr val="94A3B8"/>
-                      </a:solidFill>
-                      <a:prstDash val="solid"/>
-                      <a:round/>
-                      <a:headEnd type="none" w="med" len="med"/>
-                      <a:tailEnd type="none" w="med" len="med"/>
-                    </a:lnB>
-                    <a:solidFill>
-                      <a:srgbClr val="FFFFFF"/>
-                    </a:solidFill>
-                  </a:tcPr>
-                </a:tc>
-                <a:tc>
-                  <a:txBody>
-                    <a:bodyPr/>
-                    <a:lstStyle/>
-                    <a:p>
-                      <a:pPr eaLnBrk="0" algn="ctr" indent="0" marL="0">
-                        <a:buNone/>
-                      </a:pPr>
-                      <a:r>
-                        <a:rPr lang="en-US" sz="2200" dirty="0">
-                          <a:solidFill>
-                            <a:srgbClr val="1F2937"/>
-                          </a:solidFill>
-                          <a:latin typeface="맑은 고딕" pitchFamily="34" charset="0"/>
-                          <a:ea typeface="맑은 고딕" pitchFamily="34" charset="-122"/>
-                          <a:cs typeface="맑은 고딕" pitchFamily="34" charset="-120"/>
-                        </a:rPr>
-                        <a:t>2</a:t>
-                      </a:r>
-                      <a:endParaRPr lang="en-US" sz="2200" dirty="0">
-                        <a:latin typeface="맑은 고딕" charset="0"/>
-                        <a:ea typeface="맑은 고딕" charset="0"/>
-                        <a:cs typeface="맑은 고딕" charset="0"/>
-                      </a:endParaRPr>
-                    </a:p>
-                  </a:txBody>
-                  <a:tcPr marL="38100" marR="38100" marT="38100" marB="38100" anchor="ctr">
-                    <a:lnL w="12700" cap="flat" cmpd="sng" algn="ctr">
-                      <a:solidFill>
-                        <a:srgbClr val="94A3B8"/>
-                      </a:solidFill>
-                      <a:prstDash val="solid"/>
-                      <a:round/>
-                      <a:headEnd type="none" w="med" len="med"/>
-                      <a:tailEnd type="none" w="med" len="med"/>
-                    </a:lnL>
-                    <a:lnR w="12700" cap="flat" cmpd="sng" algn="ctr">
-                      <a:solidFill>
-                        <a:srgbClr val="94A3B8"/>
-                      </a:solidFill>
-                      <a:prstDash val="solid"/>
-                      <a:round/>
-                      <a:headEnd type="none" w="med" len="med"/>
-                      <a:tailEnd type="none" w="med" len="med"/>
-                    </a:lnR>
-                    <a:lnT w="12700" cap="flat" cmpd="sng" algn="ctr">
-                      <a:solidFill>
-                        <a:srgbClr val="94A3B8"/>
-                      </a:solidFill>
-                      <a:prstDash val="solid"/>
-                      <a:round/>
-                      <a:headEnd type="none" w="med" len="med"/>
-                      <a:tailEnd type="none" w="med" len="med"/>
-                    </a:lnT>
-                    <a:lnB w="12700" cap="flat" cmpd="sng" algn="ctr">
-                      <a:solidFill>
-                        <a:srgbClr val="94A3B8"/>
-                      </a:solidFill>
-                      <a:prstDash val="solid"/>
-                      <a:round/>
-                      <a:headEnd type="none" w="med" len="med"/>
-                      <a:tailEnd type="none" w="med" len="med"/>
-                    </a:lnB>
-                    <a:solidFill>
-                      <a:srgbClr val="FFFFFF"/>
-                    </a:solidFill>
-                  </a:tcPr>
-                </a:tc>
-              </a:tr>
-              <a:tr h="457200">
-                <a:tc>
-                  <a:txBody>
-                    <a:bodyPr/>
-                    <a:lstStyle/>
-                    <a:p>
-                      <a:pPr eaLnBrk="0" algn="ctr" indent="0" marL="0">
-                        <a:buNone/>
-                      </a:pPr>
-                      <a:r>
-                        <a:rPr lang="en-US" sz="2200" dirty="0">
-                          <a:solidFill>
-                            <a:srgbClr val="1F2937"/>
-                          </a:solidFill>
-                          <a:latin typeface="맑은 고딕" pitchFamily="34" charset="0"/>
-                          <a:ea typeface="맑은 고딕" pitchFamily="34" charset="-122"/>
-                          <a:cs typeface="맑은 고딕" pitchFamily="34" charset="-120"/>
-                        </a:rPr>
-                        <a:t>−</a:t>
-                      </a:r>
-                      <a:endParaRPr lang="en-US" sz="2200" dirty="0">
-                        <a:latin typeface="맑은 고딕" charset="0"/>
-                        <a:ea typeface="맑은 고딕" charset="0"/>
-                        <a:cs typeface="맑은 고딕" charset="0"/>
-                      </a:endParaRPr>
-                    </a:p>
-                  </a:txBody>
-                  <a:tcPr marL="38100" marR="38100" marT="38100" marB="38100" anchor="ctr">
-                    <a:lnL w="12700" cap="flat" cmpd="sng" algn="ctr">
-                      <a:solidFill>
-                        <a:srgbClr val="94A3B8"/>
-                      </a:solidFill>
-                      <a:prstDash val="solid"/>
-                      <a:round/>
-                      <a:headEnd type="none" w="med" len="med"/>
-                      <a:tailEnd type="none" w="med" len="med"/>
-                    </a:lnL>
-                    <a:lnR w="12700" cap="flat" cmpd="sng" algn="ctr">
-                      <a:solidFill>
-                        <a:srgbClr val="94A3B8"/>
-                      </a:solidFill>
-                      <a:prstDash val="solid"/>
-                      <a:round/>
-                      <a:headEnd type="none" w="med" len="med"/>
-                      <a:tailEnd type="none" w="med" len="med"/>
-                    </a:lnR>
-                    <a:lnT w="12700" cap="flat" cmpd="sng" algn="ctr">
-                      <a:solidFill>
-                        <a:srgbClr val="94A3B8"/>
-                      </a:solidFill>
-                      <a:prstDash val="solid"/>
-                      <a:round/>
-                      <a:headEnd type="none" w="med" len="med"/>
-                      <a:tailEnd type="none" w="med" len="med"/>
-                    </a:lnT>
-                    <a:lnB w="12700" cap="flat" cmpd="sng" algn="ctr">
-                      <a:solidFill>
-                        <a:srgbClr val="94A3B8"/>
-                      </a:solidFill>
-                      <a:prstDash val="solid"/>
-                      <a:round/>
-                      <a:headEnd type="none" w="med" len="med"/>
-                      <a:tailEnd type="none" w="med" len="med"/>
-                    </a:lnB>
-                    <a:solidFill>
-                      <a:srgbClr val="FFFFFF"/>
-                    </a:solidFill>
-                  </a:tcPr>
-                </a:tc>
-                <a:tc>
-                  <a:txBody>
-                    <a:bodyPr/>
-                    <a:lstStyle/>
-                    <a:p>
-                      <a:pPr eaLnBrk="0" algn="ctr" indent="0" marL="0">
-                        <a:buNone/>
-                      </a:pPr>
-                      <a:r>
-                        <a:rPr lang="en-US" sz="2200" dirty="0">
-                          <a:solidFill>
-                            <a:srgbClr val="1F2937"/>
-                          </a:solidFill>
-                          <a:latin typeface="맑은 고딕" pitchFamily="34" charset="0"/>
-                          <a:ea typeface="맑은 고딕" pitchFamily="34" charset="-122"/>
-                          <a:cs typeface="맑은 고딕" pitchFamily="34" charset="-120"/>
-                        </a:rPr>
-                        <a:t>4</a:t>
-                      </a:r>
-                      <a:endParaRPr lang="en-US" sz="2200" dirty="0">
-                        <a:latin typeface="맑은 고딕" charset="0"/>
-                        <a:ea typeface="맑은 고딕" charset="0"/>
-                        <a:cs typeface="맑은 고딕" charset="0"/>
-                      </a:endParaRPr>
-                    </a:p>
-                  </a:txBody>
-                  <a:tcPr marL="38100" marR="38100" marT="38100" marB="38100" anchor="ctr">
-                    <a:lnL w="12700" cap="flat" cmpd="sng" algn="ctr">
-                      <a:solidFill>
-                        <a:srgbClr val="94A3B8"/>
-                      </a:solidFill>
-                      <a:prstDash val="solid"/>
-                      <a:round/>
-                      <a:headEnd type="none" w="med" len="med"/>
-                      <a:tailEnd type="none" w="med" len="med"/>
-                    </a:lnL>
-                    <a:lnR w="12700" cap="flat" cmpd="sng" algn="ctr">
-                      <a:solidFill>
-                        <a:srgbClr val="94A3B8"/>
-                      </a:solidFill>
-                      <a:prstDash val="solid"/>
-                      <a:round/>
-                      <a:headEnd type="none" w="med" len="med"/>
-                      <a:tailEnd type="none" w="med" len="med"/>
-                    </a:lnR>
-                    <a:lnT w="12700" cap="flat" cmpd="sng" algn="ctr">
-                      <a:solidFill>
-                        <a:srgbClr val="94A3B8"/>
-                      </a:solidFill>
-                      <a:prstDash val="solid"/>
-                      <a:round/>
-                      <a:headEnd type="none" w="med" len="med"/>
-                      <a:tailEnd type="none" w="med" len="med"/>
-                    </a:lnT>
-                    <a:lnB w="12700" cap="flat" cmpd="sng" algn="ctr">
-                      <a:solidFill>
-                        <a:srgbClr val="94A3B8"/>
-                      </a:solidFill>
-                      <a:prstDash val="solid"/>
-                      <a:round/>
-                      <a:headEnd type="none" w="med" len="med"/>
-                      <a:tailEnd type="none" w="med" len="med"/>
-                    </a:lnB>
-                    <a:solidFill>
-                      <a:srgbClr val="FFFFFF"/>
-                    </a:solidFill>
-                  </a:tcPr>
-                </a:tc>
-                <a:tc>
-                  <a:txBody>
-                    <a:bodyPr/>
-                    <a:lstStyle/>
-                    <a:p>
-                      <a:pPr eaLnBrk="0" algn="ctr" indent="0" marL="0">
-                        <a:buNone/>
-                      </a:pPr>
-                      <a:r>
-                        <a:rPr lang="en-US" sz="2200" dirty="0">
-                          <a:solidFill>
-                            <a:srgbClr val="1F2937"/>
-                          </a:solidFill>
-                          <a:latin typeface="맑은 고딕" pitchFamily="34" charset="0"/>
-                          <a:ea typeface="맑은 고딕" pitchFamily="34" charset="-122"/>
-                          <a:cs typeface="맑은 고딕" pitchFamily="34" charset="-120"/>
-                        </a:rPr>
-                        <a:t>5</a:t>
-                      </a:r>
-                      <a:endParaRPr lang="en-US" sz="2200" dirty="0">
-                        <a:latin typeface="맑은 고딕" charset="0"/>
-                        <a:ea typeface="맑은 고딕" charset="0"/>
-                        <a:cs typeface="맑은 고딕" charset="0"/>
-                      </a:endParaRPr>
-                    </a:p>
-                  </a:txBody>
-                  <a:tcPr marL="38100" marR="38100" marT="38100" marB="38100" anchor="ctr">
-                    <a:lnL w="12700" cap="flat" cmpd="sng" algn="ctr">
-                      <a:solidFill>
-                        <a:srgbClr val="94A3B8"/>
-                      </a:solidFill>
-                      <a:prstDash val="solid"/>
-                      <a:round/>
-                      <a:headEnd type="none" w="med" len="med"/>
-                      <a:tailEnd type="none" w="med" len="med"/>
-                    </a:lnL>
-                    <a:lnR w="12700" cap="flat" cmpd="sng" algn="ctr">
-                      <a:solidFill>
-                        <a:srgbClr val="94A3B8"/>
-                      </a:solidFill>
-                      <a:prstDash val="solid"/>
-                      <a:round/>
-                      <a:headEnd type="none" w="med" len="med"/>
-                      <a:tailEnd type="none" w="med" len="med"/>
-                    </a:lnR>
-                    <a:lnT w="12700" cap="flat" cmpd="sng" algn="ctr">
-                      <a:solidFill>
-                        <a:srgbClr val="94A3B8"/>
-                      </a:solidFill>
-                      <a:prstDash val="solid"/>
-                      <a:round/>
-                      <a:headEnd type="none" w="med" len="med"/>
-                      <a:tailEnd type="none" w="med" len="med"/>
-                    </a:lnT>
-                    <a:lnB w="12700" cap="flat" cmpd="sng" algn="ctr">
-                      <a:solidFill>
-                        <a:srgbClr val="94A3B8"/>
-                      </a:solidFill>
-                      <a:prstDash val="solid"/>
-                      <a:round/>
-                      <a:headEnd type="none" w="med" len="med"/>
-                      <a:tailEnd type="none" w="med" len="med"/>
-                    </a:lnB>
-                    <a:solidFill>
-                      <a:srgbClr val="FFFFFF"/>
-                    </a:solidFill>
-                  </a:tcPr>
-                </a:tc>
-                <a:tc>
-                  <a:txBody>
-                    <a:bodyPr/>
-                    <a:lstStyle/>
-                    <a:p>
-                      <a:pPr eaLnBrk="0" algn="ctr" indent="0" marL="0">
-                        <a:buNone/>
-                      </a:pPr>
-                      <a:r>
-                        <a:rPr lang="en-US" sz="2200" dirty="0">
-                          <a:solidFill>
-                            <a:srgbClr val="1F2937"/>
-                          </a:solidFill>
-                          <a:latin typeface="맑은 고딕" pitchFamily="34" charset="0"/>
-                          <a:ea typeface="맑은 고딕" pitchFamily="34" charset="-122"/>
-                          <a:cs typeface="맑은 고딕" pitchFamily="34" charset="-120"/>
-                        </a:rPr>
-                        <a:t>8</a:t>
-                      </a:r>
-                      <a:endParaRPr lang="en-US" sz="2200" dirty="0">
-                        <a:latin typeface="맑은 고딕" charset="0"/>
-                        <a:ea typeface="맑은 고딕" charset="0"/>
-                        <a:cs typeface="맑은 고딕" charset="0"/>
-                      </a:endParaRPr>
-                    </a:p>
-                  </a:txBody>
-                  <a:tcPr marL="38100" marR="38100" marT="38100" marB="38100" anchor="ctr">
-                    <a:lnL w="12700" cap="flat" cmpd="sng" algn="ctr">
-                      <a:solidFill>
-                        <a:srgbClr val="94A3B8"/>
-                      </a:solidFill>
-                      <a:prstDash val="solid"/>
-                      <a:round/>
-                      <a:headEnd type="none" w="med" len="med"/>
-                      <a:tailEnd type="none" w="med" len="med"/>
-                    </a:lnL>
-                    <a:lnR w="12700" cap="flat" cmpd="sng" algn="ctr">
-                      <a:solidFill>
-                        <a:srgbClr val="94A3B8"/>
-                      </a:solidFill>
-                      <a:prstDash val="solid"/>
-                      <a:round/>
-                      <a:headEnd type="none" w="med" len="med"/>
-                      <a:tailEnd type="none" w="med" len="med"/>
-                    </a:lnR>
-                    <a:lnT w="12700" cap="flat" cmpd="sng" algn="ctr">
-                      <a:solidFill>
-                        <a:srgbClr val="94A3B8"/>
-                      </a:solidFill>
-                      <a:prstDash val="solid"/>
-                      <a:round/>
-                      <a:headEnd type="none" w="med" len="med"/>
-                      <a:tailEnd type="none" w="med" len="med"/>
-                    </a:lnT>
-                    <a:lnB w="12700" cap="flat" cmpd="sng" algn="ctr">
-                      <a:solidFill>
-                        <a:srgbClr val="94A3B8"/>
-                      </a:solidFill>
-                      <a:prstDash val="solid"/>
-                      <a:round/>
-                      <a:headEnd type="none" w="med" len="med"/>
-                      <a:tailEnd type="none" w="med" len="med"/>
-                    </a:lnB>
-                    <a:solidFill>
-                      <a:srgbClr val="FFFFFF"/>
-                    </a:solidFill>
-                  </a:tcPr>
-                </a:tc>
-              </a:tr>
-              <a:tr h="457200">
-                <a:tc>
-                  <a:txBody>
-                    <a:bodyPr/>
-                    <a:lstStyle/>
-                    <a:p>
-                      <a:pPr eaLnBrk="0" algn="ctr" indent="0" marL="0">
-                        <a:buNone/>
-                      </a:pPr>
-                      <a:endParaRPr lang="en-US" sz="2200" dirty="0">
-                        <a:latin typeface="맑은 고딕" charset="0"/>
-                        <a:ea typeface="맑은 고딕" charset="0"/>
-                        <a:cs typeface="맑은 고딕" charset="0"/>
-                      </a:endParaRPr>
-                    </a:p>
-                  </a:txBody>
-                  <a:tcPr marL="38100" marR="38100" marT="38100" marB="38100" anchor="ctr">
-                    <a:lnL w="12700" cap="flat" cmpd="sng" algn="ctr">
-                      <a:solidFill>
-                        <a:srgbClr val="94A3B8"/>
-                      </a:solidFill>
-                      <a:prstDash val="solid"/>
-                      <a:round/>
-                      <a:headEnd type="none" w="med" len="med"/>
-                      <a:tailEnd type="none" w="med" len="med"/>
-                    </a:lnL>
-                    <a:lnR w="12700" cap="flat" cmpd="sng" algn="ctr">
-                      <a:solidFill>
-                        <a:srgbClr val="94A3B8"/>
-                      </a:solidFill>
-                      <a:prstDash val="solid"/>
-                      <a:round/>
-                      <a:headEnd type="none" w="med" len="med"/>
-                      <a:tailEnd type="none" w="med" len="med"/>
-                    </a:lnR>
-                    <a:lnT w="12700" cap="flat" cmpd="sng" algn="ctr">
-                      <a:solidFill>
-                        <a:srgbClr val="94A3B8"/>
-                      </a:solidFill>
-                      <a:prstDash val="solid"/>
-                      <a:round/>
-                      <a:headEnd type="none" w="med" len="med"/>
-                      <a:tailEnd type="none" w="med" len="med"/>
-                    </a:lnT>
-                    <a:lnB w="12700" cap="flat" cmpd="sng" algn="ctr">
-                      <a:solidFill>
-                        <a:srgbClr val="94A3B8"/>
-                      </a:solidFill>
-                      <a:prstDash val="solid"/>
-                      <a:round/>
-                      <a:headEnd type="none" w="med" len="med"/>
-                      <a:tailEnd type="none" w="med" len="med"/>
-                    </a:lnB>
-                    <a:solidFill>
-                      <a:srgbClr val="FFFFFF"/>
-                    </a:solidFill>
-                  </a:tcPr>
-                </a:tc>
-                <a:tc>
-                  <a:txBody>
-                    <a:bodyPr/>
-                    <a:lstStyle/>
-                    <a:p>
-                      <a:pPr eaLnBrk="0" algn="ctr" indent="0" marL="0">
-                        <a:buNone/>
-                      </a:pPr>
-                      <a:r>
-                        <a:rPr lang="en-US" sz="2200" dirty="0">
-                          <a:solidFill>
-                            <a:srgbClr val="1F2937"/>
-                          </a:solidFill>
-                          <a:latin typeface="맑은 고딕" pitchFamily="34" charset="0"/>
-                          <a:ea typeface="맑은 고딕" pitchFamily="34" charset="-122"/>
-                          <a:cs typeface="맑은 고딕" pitchFamily="34" charset="-120"/>
-                        </a:rPr>
-                        <a:t>□</a:t>
-                      </a:r>
-                      <a:endParaRPr lang="en-US" sz="2200" dirty="0">
-                        <a:latin typeface="맑은 고딕" charset="0"/>
-                        <a:ea typeface="맑은 고딕" charset="0"/>
-                        <a:cs typeface="맑은 고딕" charset="0"/>
-                      </a:endParaRPr>
-                    </a:p>
-                  </a:txBody>
-                  <a:tcPr marL="38100" marR="38100" marT="38100" marB="38100" anchor="ctr">
-                    <a:lnL w="12700" cap="flat" cmpd="sng" algn="ctr">
-                      <a:solidFill>
-                        <a:srgbClr val="94A3B8"/>
-                      </a:solidFill>
-                      <a:prstDash val="solid"/>
-                      <a:round/>
-                      <a:headEnd type="none" w="med" len="med"/>
-                      <a:tailEnd type="none" w="med" len="med"/>
-                    </a:lnL>
-                    <a:lnR w="12700" cap="flat" cmpd="sng" algn="ctr">
-                      <a:solidFill>
-                        <a:srgbClr val="94A3B8"/>
-                      </a:solidFill>
-                      <a:prstDash val="solid"/>
-                      <a:round/>
-                      <a:headEnd type="none" w="med" len="med"/>
-                      <a:tailEnd type="none" w="med" len="med"/>
-                    </a:lnR>
-                    <a:lnT w="12700" cap="flat" cmpd="sng" algn="ctr">
-                      <a:solidFill>
-                        <a:srgbClr val="94A3B8"/>
-                      </a:solidFill>
-                      <a:prstDash val="solid"/>
-                      <a:round/>
-                      <a:headEnd type="none" w="med" len="med"/>
-                      <a:tailEnd type="none" w="med" len="med"/>
-                    </a:lnT>
-                    <a:lnB w="12700" cap="flat" cmpd="sng" algn="ctr">
-                      <a:solidFill>
-                        <a:srgbClr val="94A3B8"/>
-                      </a:solidFill>
-                      <a:prstDash val="solid"/>
-                      <a:round/>
-                      <a:headEnd type="none" w="med" len="med"/>
-                      <a:tailEnd type="none" w="med" len="med"/>
-                    </a:lnB>
-                    <a:solidFill>
-                      <a:srgbClr val="FFFFFF"/>
-                    </a:solidFill>
-                  </a:tcPr>
-                </a:tc>
-                <a:tc>
-                  <a:txBody>
-                    <a:bodyPr/>
-                    <a:lstStyle/>
-                    <a:p>
-                      <a:pPr eaLnBrk="0" algn="ctr" indent="0" marL="0">
-                        <a:buNone/>
-                      </a:pPr>
-                      <a:r>
-                        <a:rPr lang="en-US" sz="2200" dirty="0">
-                          <a:solidFill>
-                            <a:srgbClr val="1F2937"/>
-                          </a:solidFill>
-                          <a:latin typeface="맑은 고딕" pitchFamily="34" charset="0"/>
-                          <a:ea typeface="맑은 고딕" pitchFamily="34" charset="-122"/>
-                          <a:cs typeface="맑은 고딕" pitchFamily="34" charset="-120"/>
-                        </a:rPr>
-                        <a:t>□</a:t>
-                      </a:r>
-                      <a:endParaRPr lang="en-US" sz="2200" dirty="0">
-                        <a:latin typeface="맑은 고딕" charset="0"/>
-                        <a:ea typeface="맑은 고딕" charset="0"/>
-                        <a:cs typeface="맑은 고딕" charset="0"/>
-                      </a:endParaRPr>
-                    </a:p>
-                  </a:txBody>
-                  <a:tcPr marL="38100" marR="38100" marT="38100" marB="38100" anchor="ctr">
-                    <a:lnL w="12700" cap="flat" cmpd="sng" algn="ctr">
-                      <a:solidFill>
-                        <a:srgbClr val="94A3B8"/>
-                      </a:solidFill>
-                      <a:prstDash val="solid"/>
-                      <a:round/>
-                      <a:headEnd type="none" w="med" len="med"/>
-                      <a:tailEnd type="none" w="med" len="med"/>
-                    </a:lnL>
-                    <a:lnR w="12700" cap="flat" cmpd="sng" algn="ctr">
-                      <a:solidFill>
-                        <a:srgbClr val="94A3B8"/>
-                      </a:solidFill>
-                      <a:prstDash val="solid"/>
-                      <a:round/>
-                      <a:headEnd type="none" w="med" len="med"/>
-                      <a:tailEnd type="none" w="med" len="med"/>
-                    </a:lnR>
-                    <a:lnT w="12700" cap="flat" cmpd="sng" algn="ctr">
-                      <a:solidFill>
-                        <a:srgbClr val="94A3B8"/>
-                      </a:solidFill>
-                      <a:prstDash val="solid"/>
-                      <a:round/>
-                      <a:headEnd type="none" w="med" len="med"/>
-                      <a:tailEnd type="none" w="med" len="med"/>
-                    </a:lnT>
-                    <a:lnB w="12700" cap="flat" cmpd="sng" algn="ctr">
-                      <a:solidFill>
-                        <a:srgbClr val="94A3B8"/>
-                      </a:solidFill>
-                      <a:prstDash val="solid"/>
-                      <a:round/>
-                      <a:headEnd type="none" w="med" len="med"/>
-                      <a:tailEnd type="none" w="med" len="med"/>
-                    </a:lnB>
-                    <a:solidFill>
-                      <a:srgbClr val="FFFFFF"/>
-                    </a:solidFill>
-                  </a:tcPr>
-                </a:tc>
-                <a:tc>
-                  <a:txBody>
-                    <a:bodyPr/>
-                    <a:lstStyle/>
-                    <a:p>
-                      <a:pPr eaLnBrk="0" algn="ctr" indent="0" marL="0">
-                        <a:buNone/>
-                      </a:pPr>
-                      <a:r>
-                        <a:rPr lang="en-US" sz="2200" dirty="0">
-                          <a:solidFill>
-                            <a:srgbClr val="1F2937"/>
-                          </a:solidFill>
-                          <a:latin typeface="맑은 고딕" pitchFamily="34" charset="0"/>
-                          <a:ea typeface="맑은 고딕" pitchFamily="34" charset="-122"/>
-                          <a:cs typeface="맑은 고딕" pitchFamily="34" charset="-120"/>
-                        </a:rPr>
-                        <a:t>□</a:t>
-                      </a:r>
-                      <a:endParaRPr lang="en-US" sz="2200" dirty="0">
-                        <a:latin typeface="맑은 고딕" charset="0"/>
-                        <a:ea typeface="맑은 고딕" charset="0"/>
-                        <a:cs typeface="맑은 고딕" charset="0"/>
-                      </a:endParaRPr>
-                    </a:p>
-                  </a:txBody>
-                  <a:tcPr marL="38100" marR="38100" marT="38100" marB="38100" anchor="ctr">
-                    <a:lnL w="12700" cap="flat" cmpd="sng" algn="ctr">
-                      <a:solidFill>
-                        <a:srgbClr val="94A3B8"/>
-                      </a:solidFill>
-                      <a:prstDash val="solid"/>
-                      <a:round/>
-                      <a:headEnd type="none" w="med" len="med"/>
-                      <a:tailEnd type="none" w="med" len="med"/>
-                    </a:lnL>
-                    <a:lnR w="12700" cap="flat" cmpd="sng" algn="ctr">
-                      <a:solidFill>
-                        <a:srgbClr val="94A3B8"/>
-                      </a:solidFill>
-                      <a:prstDash val="solid"/>
-                      <a:round/>
-                      <a:headEnd type="none" w="med" len="med"/>
-                      <a:tailEnd type="none" w="med" len="med"/>
-                    </a:lnR>
-                    <a:lnT w="12700" cap="flat" cmpd="sng" algn="ctr">
-                      <a:solidFill>
-                        <a:srgbClr val="94A3B8"/>
-                      </a:solidFill>
-                      <a:prstDash val="solid"/>
-                      <a:round/>
-                      <a:headEnd type="none" w="med" len="med"/>
-                      <a:tailEnd type="none" w="med" len="med"/>
-                    </a:lnT>
-                    <a:lnB w="12700" cap="flat" cmpd="sng" algn="ctr">
-                      <a:solidFill>
-                        <a:srgbClr val="94A3B8"/>
-                      </a:solidFill>
-                      <a:prstDash val="solid"/>
-                      <a:round/>
-                      <a:headEnd type="none" w="med" len="med"/>
-                      <a:tailEnd type="none" w="med" len="med"/>
-                    </a:lnB>
-                    <a:solidFill>
-                      <a:srgbClr val="FFFFFF"/>
-                    </a:solidFill>
-                  </a:tcPr>
-                </a:tc>
-              </a:tr>
-            </a:tbl>
-          </a:graphicData>
-        </a:graphic>
-      </p:graphicFrame>
-      <p:sp>
-        <p:nvSpPr>
-          <p:cNvPr id="8" name="S07-chip53"/>
-          <p:cNvSpPr txBox="1"/>
-          <p:nvPr/>
-        </p:nvSpPr>
-        <p:spPr>
-          <a:xfrm>
-            <a:off x="548640" y="1613916"/>
-            <a:ext cx="566928" cy="566928"/>
-          </a:xfrm>
-          <a:prstGeom prst="roundRect">
-            <a:avLst>
-              <a:gd name="adj" fmla="val 25806"/>
-            </a:avLst>
-          </a:prstGeom>
-          <a:solidFill>
-            <a:srgbClr val="264653"/>
-          </a:solidFill>
-          <a:ln>
-            <a:solidFill>
-              <a:srgbClr val="264653"/>
-            </a:solidFill>
-          </a:ln>
-        </p:spPr>
-        <p:txBody>
-          <a:bodyPr wrap="square" lIns="0" tIns="0" rIns="0" bIns="0" rtlCol="0" anchor="ctr"/>
-          <a:lstStyle/>
-          <a:p>
-            <a:pPr eaLnBrk="0" algn="ctr" indent="0" marL="0">
-              <a:buNone/>
-            </a:pPr>
-            <a:r>
-              <a:rPr lang="ko-KR" altLang="en-US" sz="2400" b="1" dirty="0">
-                <a:solidFill>
-                  <a:srgbClr val="FFFFFF"/>
-                </a:solidFill>
-                <a:latin typeface="맑은 고딕" pitchFamily="34" charset="0"/>
-                <a:ea typeface="맑은 고딕" pitchFamily="34" charset="-122"/>
-                <a:cs typeface="맑은 고딕" pitchFamily="34" charset="-120"/>
-              </a:rPr>
-              <a:t>①</a:t>
-            </a:r>
-            <a:endParaRPr lang="ko-KR" sz="2400" dirty="0"/>
-          </a:p>
-        </p:txBody>
-      </p:sp>
-      <p:sp>
-        <p:nvSpPr>
-          <p:cNvPr id="9" name="S07-eqtext54"/>
-          <p:cNvSpPr txBox="1"/>
-          <p:nvPr/>
-        </p:nvSpPr>
-        <p:spPr>
-          <a:xfrm>
-            <a:off x="1344168" y="1325880"/>
-            <a:ext cx="4567428" cy="1143000"/>
-          </a:xfrm>
-          <a:prstGeom prst="rect">
-            <a:avLst/>
-          </a:prstGeom>
-          <a:noFill/>
-          <a:ln/>
-        </p:spPr>
-        <p:txBody>
-          <a:bodyPr wrap="square" lIns="0" tIns="0" rIns="0" bIns="0" rtlCol="0" anchor="ctr"/>
-          <a:lstStyle/>
-          <a:p>
-            <a:pPr eaLnBrk="0" algn="l" indent="0" marL="0">
-              <a:buNone/>
-            </a:pPr>
-            <a:r>
-              <a:rPr lang="ko-KR" altLang="en-US" sz="3400" b="1" dirty="0">
-                <a:solidFill>
-                  <a:srgbClr val="1F2937"/>
-                </a:solidFill>
-                <a:latin typeface="맑은 고딕" pitchFamily="34" charset="0"/>
-                <a:ea typeface="맑은 고딕" pitchFamily="34" charset="-122"/>
-                <a:cs typeface="맑은 고딕" pitchFamily="34" charset="-120"/>
-              </a:rPr>
-              <a:t>463 − 128 = □</a:t>
-            </a:r>
-            <a:endParaRPr lang="ko-KR" sz="3400" dirty="0"/>
-          </a:p>
-        </p:txBody>
-      </p:sp>
-      <p:sp>
-        <p:nvSpPr>
-          <p:cNvPr id="10" name="S07-chip55"/>
-          <p:cNvSpPr txBox="1"/>
-          <p:nvPr/>
-        </p:nvSpPr>
-        <p:spPr>
-          <a:xfrm>
-            <a:off x="548640" y="2939796"/>
-            <a:ext cx="566928" cy="566928"/>
-          </a:xfrm>
-          <a:prstGeom prst="roundRect">
-            <a:avLst>
-              <a:gd name="adj" fmla="val 25806"/>
-            </a:avLst>
-          </a:prstGeom>
-          <a:solidFill>
-            <a:srgbClr val="264653"/>
-          </a:solidFill>
-          <a:ln>
-            <a:solidFill>
-              <a:srgbClr val="264653"/>
-            </a:solidFill>
-          </a:ln>
-        </p:spPr>
-        <p:txBody>
-          <a:bodyPr wrap="square" lIns="0" tIns="0" rIns="0" bIns="0" rtlCol="0" anchor="ctr"/>
-          <a:lstStyle/>
-          <a:p>
-            <a:pPr eaLnBrk="0" algn="ctr" indent="0" marL="0">
-              <a:buNone/>
-            </a:pPr>
-            <a:r>
-              <a:rPr lang="ko-KR" altLang="en-US" sz="2400" b="1" dirty="0">
-                <a:solidFill>
-                  <a:srgbClr val="FFFFFF"/>
-                </a:solidFill>
-                <a:latin typeface="맑은 고딕" pitchFamily="34" charset="0"/>
-                <a:ea typeface="맑은 고딕" pitchFamily="34" charset="-122"/>
-                <a:cs typeface="맑은 고딕" pitchFamily="34" charset="-120"/>
-              </a:rPr>
-              <a:t>②</a:t>
-            </a:r>
-            <a:endParaRPr lang="ko-KR" sz="2400" dirty="0"/>
-          </a:p>
-        </p:txBody>
-      </p:sp>
-      <p:sp>
-        <p:nvSpPr>
-          <p:cNvPr id="11" name="S07-eqtext56"/>
-          <p:cNvSpPr txBox="1"/>
-          <p:nvPr/>
-        </p:nvSpPr>
-        <p:spPr>
-          <a:xfrm>
-            <a:off x="1344168" y="2651760"/>
-            <a:ext cx="4567428" cy="1143000"/>
-          </a:xfrm>
-          <a:prstGeom prst="rect">
-            <a:avLst/>
-          </a:prstGeom>
-          <a:noFill/>
-          <a:ln/>
-        </p:spPr>
-        <p:txBody>
-          <a:bodyPr wrap="square" lIns="0" tIns="0" rIns="0" bIns="0" rtlCol="0" anchor="ctr"/>
-          <a:lstStyle/>
-          <a:p>
-            <a:pPr eaLnBrk="0" algn="l" indent="0" marL="0">
-              <a:buNone/>
-            </a:pPr>
-            <a:r>
-              <a:rPr lang="ko-KR" altLang="en-US" sz="3400" b="1" dirty="0">
-                <a:solidFill>
-                  <a:srgbClr val="1F2937"/>
-                </a:solidFill>
-                <a:latin typeface="맑은 고딕" pitchFamily="34" charset="0"/>
-                <a:ea typeface="맑은 고딕" pitchFamily="34" charset="-122"/>
-                <a:cs typeface="맑은 고딕" pitchFamily="34" charset="-120"/>
-              </a:rPr>
-              <a:t>617 − 254 = □</a:t>
-            </a:r>
-            <a:endParaRPr lang="ko-KR" sz="3400" dirty="0"/>
-          </a:p>
-        </p:txBody>
-      </p:sp>
-      <p:sp>
-        <p:nvSpPr>
-          <p:cNvPr id="12" name="S07-chip57"/>
-          <p:cNvSpPr txBox="1"/>
-          <p:nvPr/>
-        </p:nvSpPr>
-        <p:spPr>
-          <a:xfrm>
-            <a:off x="548640" y="4265676"/>
-            <a:ext cx="566928" cy="566928"/>
-          </a:xfrm>
-          <a:prstGeom prst="roundRect">
-            <a:avLst>
-              <a:gd name="adj" fmla="val 25806"/>
-            </a:avLst>
-          </a:prstGeom>
-          <a:solidFill>
-            <a:srgbClr val="264653"/>
-          </a:solidFill>
-          <a:ln>
-            <a:solidFill>
-              <a:srgbClr val="264653"/>
-            </a:solidFill>
-          </a:ln>
-        </p:spPr>
-        <p:txBody>
-          <a:bodyPr wrap="square" lIns="0" tIns="0" rIns="0" bIns="0" rtlCol="0" anchor="ctr"/>
-          <a:lstStyle/>
-          <a:p>
-            <a:pPr eaLnBrk="0" algn="ctr" indent="0" marL="0">
-              <a:buNone/>
-            </a:pPr>
-            <a:r>
-              <a:rPr lang="ko-KR" altLang="en-US" sz="2400" b="1" dirty="0">
-                <a:solidFill>
-                  <a:srgbClr val="FFFFFF"/>
-                </a:solidFill>
-                <a:latin typeface="맑은 고딕" pitchFamily="34" charset="0"/>
-                <a:ea typeface="맑은 고딕" pitchFamily="34" charset="-122"/>
-                <a:cs typeface="맑은 고딕" pitchFamily="34" charset="-120"/>
-              </a:rPr>
-              <a:t>③</a:t>
-            </a:r>
-            <a:endParaRPr lang="ko-KR" sz="2400" dirty="0"/>
-          </a:p>
-        </p:txBody>
-      </p:sp>
-      <p:sp>
-        <p:nvSpPr>
-          <p:cNvPr id="13" name="S07-eqtext58"/>
-          <p:cNvSpPr txBox="1"/>
-          <p:nvPr/>
-        </p:nvSpPr>
-        <p:spPr>
-          <a:xfrm>
-            <a:off x="1344168" y="3977640"/>
-            <a:ext cx="4567428" cy="1143000"/>
-          </a:xfrm>
-          <a:prstGeom prst="rect">
-            <a:avLst/>
-          </a:prstGeom>
-          <a:noFill/>
-          <a:ln/>
-        </p:spPr>
-        <p:txBody>
-          <a:bodyPr wrap="square" lIns="0" tIns="0" rIns="0" bIns="0" rtlCol="0" anchor="ctr"/>
-          <a:lstStyle/>
-          <a:p>
-            <a:pPr eaLnBrk="0" algn="l" indent="0" marL="0">
-              <a:buNone/>
-            </a:pPr>
-            <a:r>
-              <a:rPr lang="ko-KR" altLang="en-US" sz="3400" b="1" dirty="0">
-                <a:solidFill>
-                  <a:srgbClr val="1F2937"/>
-                </a:solidFill>
-                <a:latin typeface="맑은 고딕" pitchFamily="34" charset="0"/>
-                <a:ea typeface="맑은 고딕" pitchFamily="34" charset="-122"/>
-                <a:cs typeface="맑은 고딕" pitchFamily="34" charset="-120"/>
-              </a:rPr>
-              <a:t>732 − 458 = □</a:t>
-            </a:r>
-            <a:endParaRPr lang="ko-KR" sz="3400" dirty="0"/>
-          </a:p>
-        </p:txBody>
-      </p:sp>
-      <p:sp>
-        <p:nvSpPr>
-          <p:cNvPr id="25" name="Slide Number Placeholder 0"/>
-          <p:cNvSpPr>
-            <a:spLocks noGrp="1"/>
-          </p:cNvSpPr>
-          <p:nvPr>
-            <p:ph type="sldNum" sz="quarter" idx="4294967295"/>
-          </p:nvPr>
-        </p:nvSpPr>
-        <p:spPr>
-          <a:xfrm>
-            <a:off x="10881360" y="6382512"/>
-            <a:ext cx="731520" cy="320040"/>
-          </a:xfrm>
-          <a:prstGeom prst="rect">
-            <a:avLst/>
-          </a:prstGeom>
-          <a:extLst>
-            <a:ext uri="{C572A759-6A51-4108-AA02-DFA0A04FC94B}">
-              <ma14:wrappingTextBoxFlag xmlns:ma14="http://schemas.microsoft.com/office/mac/drawingml/2011/main" val="0"/>
-            </a:ext>
-          </a:extLst>
-        </p:spPr>
-        <p:txBody>
-          <a:bodyPr/>
-          <a:lstStyle>
-            <a:lvl1pPr>
-              <a:defRPr sz="1200">
-                <a:solidFill>
-                  <a:srgbClr val="4B5563"/>
-                </a:solidFill>
-                <a:latin typeface="맑은 고딕"/>
-                <a:ea typeface="맑은 고딕"/>
-                <a:cs typeface="맑은 고딕"/>
-              </a:defRPr>
-            </a:lvl1pPr>
-          </a:lstStyle>
-          <a:p>
-            <a:pPr eaLnBrk="0" algn="r"/>
-            <a:fld id="{F7021451-1387-4CA6-816F-3879F97B5CBC}" type="slidenum">
-              <a:rPr b="0" lang="en-US"/>
               <a:t>7</a:t>
             </a:fld>
             <a:endParaRPr lang="en-US"/>
@@ -18522,7 +18522,7 @@
           </p:nvPr>
         </p:nvGraphicFramePr>
         <p:xfrm>
-          <a:off x="7483450" y="2042160"/>
+          <a:off x="7483450" y="2089785"/>
           <a:ext cx="4023360" cy="914400"/>
         </p:xfrm>
         <a:graphic>
@@ -18535,7 +18535,7 @@
                 <a:gridCol w="1005840"/>
                 <a:gridCol w="1005840"/>
               </a:tblGrid>
-              <a:tr h="609600">
+              <a:tr h="590550">
                 <a:tc>
                   <a:txBody>
                     <a:bodyPr/>
@@ -18798,7 +18798,7 @@
                   </a:tcPr>
                 </a:tc>
               </a:tr>
-              <a:tr h="609600">
+              <a:tr h="590550">
                 <a:tc>
                   <a:txBody>
                     <a:bodyPr/>
@@ -19050,7 +19050,7 @@
                   </a:tcPr>
                 </a:tc>
               </a:tr>
-              <a:tr h="609600">
+              <a:tr h="590550">
                 <a:tc>
                   <a:txBody>
                     <a:bodyPr/>
@@ -19313,7 +19313,7 @@
                   </a:tcPr>
                 </a:tc>
               </a:tr>
-              <a:tr h="609600">
+              <a:tr h="590550">
                 <a:tc>
                   <a:txBody>
                     <a:bodyPr/>
@@ -19587,7 +19587,7 @@
                   </a:tcPr>
                 </a:tc>
               </a:tr>
-              <a:tr h="609600">
+              <a:tr h="590550">
                 <a:tc>
                   <a:txBody>
                     <a:bodyPr/>

--- a/dist/초3/수학/자연수계산/초3_수학_자연수계산_02_세자리수의뺄셈.pptx
+++ b/dist/초3/수학/자연수계산/초3_수학_자연수계산_02_세자리수의뺄셈.pptx
@@ -121,13 +121,13 @@
   <p:extLst>
     <p:ext uri="{521415D9-36F7-43E2-AB2F-B90AF26B5E84}">
       <p14:sectionLst xmlns:p14="http://schemas.microsoft.com/office/powerpoint/2010/main">
-        <p14:section name="도입" id="{a4af4909-344f-f060-773e-917566a7cfb4}">
+        <p14:section name="도입" id="{de6f5ced-15eb-c12b-fc08-5c2560a7cfbc}">
           <p14:sldIdLst>
             <p14:sldId id="256"/>
             <p14:sldId id="257"/>
           </p14:sldIdLst>
         </p14:section>
-        <p14:section name="개념" id="{aef8dd77-4fee-becb-475a-3b185b837159}">
+        <p14:section name="개념" id="{4d0884dd-a4bd-ecaf-30ef-b29a16e9d494}">
           <p14:sldIdLst>
             <p14:sldId id="258"/>
             <p14:sldId id="259"/>
@@ -136,32 +136,32 @@
             <p14:sldId id="263"/>
           </p14:sldIdLst>
         </p14:section>
-        <p14:section name="연습" id="{ea5f5ffb-864a-1cb8-7dfb-adf15030b3de}">
+        <p14:section name="연습" id="{24a02a27-f29a-db0d-4fbb-21f081bd00a0}">
           <p14:sldIdLst>
             <p14:sldId id="262"/>
             <p14:sldId id="264"/>
             <p14:sldId id="265"/>
           </p14:sldIdLst>
         </p14:section>
-        <p14:section name="개념" id="{04779a41-962d-ad2a-f4d8-24d148b725e7}">
+        <p14:section name="개념" id="{d296d2af-d1aa-828f-6162-c4354c3d7fb9}">
           <p14:sldIdLst/>
         </p14:section>
-        <p14:section name="연습" id="{9aa0fa47-649a-107b-32c4-ff09050c66ef}">
+        <p14:section name="연습" id="{7d94de13-26fc-90d0-26ce-5d2b4e19cf4a}">
           <p14:sldIdLst/>
         </p14:section>
-        <p14:section name="확인" id="{90216819-2d8f-af1d-c68c-1b7be14db7de}">
+        <p14:section name="확인" id="{282ea4e2-6264-7be7-46e4-c47fca6bd55e}">
           <p14:sldIdLst>
             <p14:sldId id="266"/>
             <p14:sldId id="267"/>
             <p14:sldId id="268"/>
           </p14:sldIdLst>
         </p14:section>
-        <p14:section name="정리" id="{d4f3253f-7ad5-e657-2977-ab7ad6d0e3b5}">
+        <p14:section name="정리" id="{51880390-42db-8234-69cd-c1071feff6db}">
           <p14:sldIdLst>
             <p14:sldId id="269"/>
           </p14:sldIdLst>
         </p14:section>
-        <p14:section name="보충" id="{96a352ce-9f00-24d2-184c-2e9e64e52e5b}">
+        <p14:section name="보충" id="{dfdf50f0-0375-d255-8752-6e6ca99bcfeb}">
           <p14:sldIdLst>
             <p14:sldId id="270"/>
           </p14:sldIdLst>
